--- a/Deliverable2_Supervisor_Update.pptx
+++ b/Deliverable2_Supervisor_Update.pptx
@@ -4,6 +4,9 @@
   <p:sldMasterIdLst>
     <p:sldMasterId id="2147483648" r:id="rId1"/>
   </p:sldMasterIdLst>
+  <p:notesMasterIdLst>
+    <p:notesMasterId r:id="rId16"/>
+  </p:notesMasterIdLst>
   <p:sldIdLst>
     <p:sldId id="256" r:id="rId2"/>
     <p:sldId id="257" r:id="rId3"/>
@@ -20,9 +23,6 @@
     <p:sldId id="268" r:id="rId14"/>
     <p:sldId id="269" r:id="rId15"/>
   </p:sldIdLst>
-  <p:notesMasterIdLst>
-    <p:notesMasterId r:id="rId16"/>
-  </p:notesMasterIdLst>
   <p:sldSz cx="12192000" cy="6858000"/>
   <p:notesSz cx="6858000" cy="12192000"/>
   <p:defaultTextStyle>
@@ -117,6 +117,11 @@
       </a:defRPr>
     </a:lvl9pPr>
   </p:defaultTextStyle>
+  <p:extLst>
+    <p:ext uri="{EFAFB233-063F-42B5-8137-9DF3F51BA10A}">
+      <p15:sldGuideLst xmlns:p15="http://schemas.microsoft.com/office/powerpoint/2012/main"/>
+    </p:ext>
+  </p:extLst>
 </p:presentation>
 </file>
 
@@ -142,234 +147,10 @@
           <a:chExt cx="0" cy="0"/>
         </a:xfrm>
       </p:grpSpPr>
-      <p:sp>
-        <p:nvSpPr>
-          <p:cNvPr id="2" name="Header Placeholder 1"/>
-          <p:cNvSpPr>
-            <a:spLocks noGrp="1"/>
-          </p:cNvSpPr>
-          <p:nvPr>
-            <p:ph type="hdr" sz="quarter"/>
-          </p:nvPr>
-        </p:nvSpPr>
-        <p:spPr>
-          <a:xfrm>
-            <a:off x="0" y="0"/>
-            <a:ext cx="2971800" cy="458788"/>
-          </a:xfrm>
-          <a:prstGeom prst="rect">
-            <a:avLst/>
-          </a:prstGeom>
-        </p:spPr>
-        <p:txBody>
-          <a:bodyPr vert="horz" lIns="91440" tIns="45720" rIns="91440" bIns="45720" rtlCol="0"/>
-          <a:lstStyle>
-            <a:lvl1pPr algn="l">
-              <a:defRPr sz="1200"/>
-            </a:lvl1pPr>
-          </a:lstStyle>
-          <a:p>
-            <a:endParaRPr lang="en-US"/>
-          </a:p>
-        </p:txBody>
-      </p:sp>
-      <p:sp>
-        <p:nvSpPr>
-          <p:cNvPr id="3" name="Date Placeholder 2"/>
-          <p:cNvSpPr>
-            <a:spLocks noGrp="1"/>
-          </p:cNvSpPr>
-          <p:nvPr>
-            <p:ph type="dt" idx="1"/>
-          </p:nvPr>
-        </p:nvSpPr>
-        <p:spPr>
-          <a:xfrm>
-            <a:off x="3884613" y="0"/>
-            <a:ext cx="2971800" cy="458788"/>
-          </a:xfrm>
-          <a:prstGeom prst="rect">
-            <a:avLst/>
-          </a:prstGeom>
-        </p:spPr>
-        <p:txBody>
-          <a:bodyPr vert="horz" lIns="91440" tIns="45720" rIns="91440" bIns="45720" rtlCol="0"/>
-          <a:lstStyle>
-            <a:lvl1pPr algn="r">
-              <a:defRPr sz="1200"/>
-            </a:lvl1pPr>
-          </a:lstStyle>
-          <a:p>
-            <a:fld id="{5282F153-3F37-0F45-9E97-73ACFA13230C}" type="datetimeFigureOut">
-              <a:rPr lang="en-US"/>
-              <a:t>7/23/19</a:t>
-            </a:fld>
-            <a:endParaRPr lang="en-US"/>
-          </a:p>
-        </p:txBody>
-      </p:sp>
-      <p:sp>
-        <p:nvSpPr>
-          <p:cNvPr id="4" name="Slide Image Placeholder 3"/>
-          <p:cNvSpPr>
-            <a:spLocks noGrp="1" noRot="1" noChangeAspect="1"/>
-          </p:cNvSpPr>
-          <p:nvPr>
-            <p:ph type="sldImg" idx="2"/>
-          </p:nvPr>
-        </p:nvSpPr>
-        <p:spPr>
-          <a:xfrm>
-            <a:off x="685800" y="1143000"/>
-            <a:ext cx="5486400" cy="3086100"/>
-          </a:xfrm>
-          <a:prstGeom prst="rect">
-            <a:avLst/>
-          </a:prstGeom>
-          <a:noFill/>
-          <a:ln w="12700">
-            <a:solidFill>
-              <a:prstClr val="black"/>
-            </a:solidFill>
-          </a:ln>
-        </p:spPr>
-        <p:txBody>
-          <a:bodyPr vert="horz" lIns="91440" tIns="45720" rIns="91440" bIns="45720" rtlCol="0" anchor="ctr"/>
-          <a:lstStyle/>
-          <a:p>
-            <a:endParaRPr lang="en-US"/>
-          </a:p>
-        </p:txBody>
-      </p:sp>
-      <p:sp>
-        <p:nvSpPr>
-          <p:cNvPr id="5" name="Notes Placeholder 4"/>
-          <p:cNvSpPr>
-            <a:spLocks noGrp="1"/>
-          </p:cNvSpPr>
-          <p:nvPr>
-            <p:ph type="body" sz="quarter" idx="3"/>
-          </p:nvPr>
-        </p:nvSpPr>
-        <p:spPr>
-          <a:xfrm>
-            <a:off x="685800" y="4400550"/>
-            <a:ext cx="5486400" cy="3600450"/>
-          </a:xfrm>
-          <a:prstGeom prst="rect">
-            <a:avLst/>
-          </a:prstGeom>
-        </p:spPr>
-        <p:txBody>
-          <a:bodyPr vert="horz" lIns="91440" tIns="45720" rIns="91440" bIns="45720" rtlCol="0"/>
-          <a:lstStyle/>
-          <a:p>
-            <a:pPr lvl="0"/>
-            <a:r>
-              <a:rPr lang="en-US"/>
-              <a:t>Click to edit Master text styles</a:t>
-            </a:r>
-          </a:p>
-          <a:p>
-            <a:pPr lvl="1"/>
-            <a:r>
-              <a:rPr lang="en-US"/>
-              <a:t>Second level</a:t>
-            </a:r>
-          </a:p>
-          <a:p>
-            <a:pPr lvl="2"/>
-            <a:r>
-              <a:rPr lang="en-US"/>
-              <a:t>Third level</a:t>
-            </a:r>
-          </a:p>
-          <a:p>
-            <a:pPr lvl="3"/>
-            <a:r>
-              <a:rPr lang="en-US"/>
-              <a:t>Fourth level</a:t>
-            </a:r>
-          </a:p>
-          <a:p>
-            <a:pPr lvl="4"/>
-            <a:r>
-              <a:rPr lang="en-US"/>
-              <a:t>Fifth level</a:t>
-            </a:r>
-          </a:p>
-        </p:txBody>
-      </p:sp>
-      <p:sp>
-        <p:nvSpPr>
-          <p:cNvPr id="6" name="Footer Placeholder 5"/>
-          <p:cNvSpPr>
-            <a:spLocks noGrp="1"/>
-          </p:cNvSpPr>
-          <p:nvPr>
-            <p:ph type="ftr" sz="quarter" idx="4"/>
-          </p:nvPr>
-        </p:nvSpPr>
-        <p:spPr>
-          <a:xfrm>
-            <a:off x="0" y="8685213"/>
-            <a:ext cx="2971800" cy="458787"/>
-          </a:xfrm>
-          <a:prstGeom prst="rect">
-            <a:avLst/>
-          </a:prstGeom>
-        </p:spPr>
-        <p:txBody>
-          <a:bodyPr vert="horz" lIns="91440" tIns="45720" rIns="91440" bIns="45720" rtlCol="0" anchor="b"/>
-          <a:lstStyle>
-            <a:lvl1pPr algn="l">
-              <a:defRPr sz="1200"/>
-            </a:lvl1pPr>
-          </a:lstStyle>
-          <a:p>
-            <a:endParaRPr lang="en-US"/>
-          </a:p>
-        </p:txBody>
-      </p:sp>
-      <p:sp>
-        <p:nvSpPr>
-          <p:cNvPr id="7" name="Slide Number Placeholder 6"/>
-          <p:cNvSpPr>
-            <a:spLocks noGrp="1"/>
-          </p:cNvSpPr>
-          <p:nvPr>
-            <p:ph type="sldNum" sz="quarter" idx="5"/>
-          </p:nvPr>
-        </p:nvSpPr>
-        <p:spPr>
-          <a:xfrm>
-            <a:off x="3884613" y="8685213"/>
-            <a:ext cx="2971800" cy="458787"/>
-          </a:xfrm>
-          <a:prstGeom prst="rect">
-            <a:avLst/>
-          </a:prstGeom>
-        </p:spPr>
-        <p:txBody>
-          <a:bodyPr vert="horz" lIns="91440" tIns="45720" rIns="91440" bIns="45720" rtlCol="0" anchor="b"/>
-          <a:lstStyle>
-            <a:lvl1pPr algn="r">
-              <a:defRPr sz="1200"/>
-            </a:lvl1pPr>
-          </a:lstStyle>
-          <a:p>
-            <a:fld id="{CE5E9CC1-C706-0F49-92D6-E571CC5EEA8F}" type="slidenum">
-              <a:rPr lang="en-US"/>
-              <a:t>‹#›</a:t>
-            </a:fld>
-            <a:endParaRPr lang="en-US"/>
-          </a:p>
-        </p:txBody>
-      </p:sp>
     </p:spTree>
     <p:extLst>
       <p:ext uri="{BB962C8B-B14F-4D97-AF65-F5344CB8AC3E}">
-        <p14:creationId xmlns:p14="http://schemas.microsoft.com/office/powerpoint/2010/main" val="1024086991"/>
+        <p14:creationId xmlns:p14="http://schemas.microsoft.com/office/powerpoint/2010/main" val="1054243652"/>
       </p:ext>
     </p:extLst>
   </p:cSld>
@@ -515,9 +296,16 @@
           <a:p>
             <a:r>
               <a:rPr lang="en-US" dirty="0"/>
-              <a:t>Since the last meeting: the full pipeline is implemented and produced its first real compliance report on independent.ie yesterday. Today: (1) what each of the 10 papers contributes to the build — in depth; (2) every model choice and its justification, including one empirical reversal; (3) exactly which code is mine vs adapted vs reused; (4) live results and the error analysis; (5) evaluation plan and remaining work.</a:t>
-            </a:r>
-            <a:endParaRPr lang="en-US" dirty="0"/>
+              <a:t>Since the last meeting: the full pipeline is implemented and produced its first real compliance report on independent.ie yesterday. Today: (1) what each of the 10 papers contributes to the </a:t>
+            </a:r>
+            <a:r>
+              <a:rPr lang="en-US"/>
+              <a:t>build - </a:t>
+            </a:r>
+            <a:r>
+              <a:rPr lang="en-US" dirty="0"/>
+              <a:t>in depth; (2) every model choice and its justification, including one empirical reversal; (3) exactly which code is mine vs adapted vs reused; (4) live results and the error analysis; (5) evaluation plan and remaining work.</a:t>
+            </a:r>
           </a:p>
         </p:txBody>
       </p:sp>
@@ -603,9 +391,32 @@
           <a:p>
             <a:r>
               <a:rPr lang="en-US" dirty="0"/>
-              <a:t>Why independent.ie: news media had the worst violation rates in Trevisan's study (86%). Interesting nuance: the strict profiling-cookie rule found ZERO pre-consent profiling cookies — the site's CMP appears to hold cookies — yet tracker REQUESTS to doubleclick/taboola/GA and fingerprinting API calls still fire pre-consent. That distinction (cookies held, requests not) is exactly what a cookie-only audit would miss and our telemetry catches. Policy quirk: independent.ie hosts its policies on parent mediahuis.ie — the cookie policy explicitly lists Independent.ie in scope, so the cross-reference is valid; our scraper needed a cross-domain fix to find it (logged).</a:t>
-            </a:r>
-            <a:endParaRPr lang="en-US" dirty="0"/>
+              <a:t>Why independent.ie: news media had the worst violation rates in Trevisan's study (86%). Interesting nuance: the strict profiling-cookie rule found ZERO pre-consent profiling </a:t>
+            </a:r>
+            <a:r>
+              <a:rPr lang="en-US"/>
+              <a:t>cookies - </a:t>
+            </a:r>
+            <a:r>
+              <a:rPr lang="en-US" dirty="0"/>
+              <a:t>the site's CMP appears to hold </a:t>
+            </a:r>
+            <a:r>
+              <a:rPr lang="en-US"/>
+              <a:t>cookies - </a:t>
+            </a:r>
+            <a:r>
+              <a:rPr lang="en-US" dirty="0"/>
+              <a:t>yet tracker REQUESTS to doubleclick/taboola/GA and fingerprinting API calls still fire pre-consent. That distinction (cookies held, requests not) is exactly what a cookie-only audit would miss and our telemetry catches. Policy quirk: independent.ie hosts its policies on parent mediahuis.</a:t>
+            </a:r>
+            <a:r>
+              <a:rPr lang="en-US"/>
+              <a:t>ie - </a:t>
+            </a:r>
+            <a:r>
+              <a:rPr lang="en-US" dirty="0"/>
+              <a:t>the cookie policy explicitly lists Independent.ie in scope, so the cross-reference is valid; our scraper needed a cross-domain fix to find it (logged).</a:t>
+            </a:r>
           </a:p>
         </p:txBody>
       </p:sp>
@@ -691,9 +502,32 @@
           <a:p>
             <a:r>
               <a:rPr lang="en-US" dirty="0"/>
-              <a:t>This slide pre-empts 'how do you know the LLM output is right?' — we don't assume it; we caught it being wrong twice, in two different components (prompt design, retrieval), fixed each at the correct layer and re-verified. Both incidents are dated in PROGRESS.md with before/after JSON — they become the error-analysis subsection of the evaluation chapter. Note failure 2 was NOT an LLM hallucination: the model followed instructions perfectly and quoted the retrieved text — the retriever served the wrong article. Grounding shifts the failure surface from generation to retrieval, where it is fixable deterministically.</a:t>
-            </a:r>
-            <a:endParaRPr lang="en-US" dirty="0"/>
+              <a:t>This slide pre-empts 'how do you know the LLM output is right</a:t>
+            </a:r>
+            <a:r>
+              <a:rPr lang="en-US"/>
+              <a:t>?' - </a:t>
+            </a:r>
+            <a:r>
+              <a:rPr lang="en-US" dirty="0"/>
+              <a:t>we don't assume it; we caught it being wrong twice, in two different components (prompt design, retrieval), fixed each at the correct layer and re-verified. Both incidents are dated in PROGRESS.md with before/after </a:t>
+            </a:r>
+            <a:r>
+              <a:rPr lang="en-US"/>
+              <a:t>JSON - </a:t>
+            </a:r>
+            <a:r>
+              <a:rPr lang="en-US" dirty="0"/>
+              <a:t>they become the error-analysis subsection of the evaluation chapter. Note failure 2 was NOT an LLM hallucination: the model followed instructions perfectly and quoted the retrieved </a:t>
+            </a:r>
+            <a:r>
+              <a:rPr lang="en-US"/>
+              <a:t>text - </a:t>
+            </a:r>
+            <a:r>
+              <a:rPr lang="en-US" dirty="0"/>
+              <a:t>the retriever served the wrong article. Grounding shifts the failure surface from generation to retrieval, where it is fixable deterministically.</a:t>
+            </a:r>
           </a:p>
         </p:txBody>
       </p:sp>
@@ -779,9 +613,16 @@
           <a:p>
             <a:r>
               <a:rPr lang="en-US" dirty="0"/>
-              <a:t>The evaluation is not invented — each element is the standard from a reviewed paper. If asked about ground truth: I annotate the sample myself against the article text with a documented rubric (and can validate a subset with the supervisor); inter-annotator agreement is out of scope for a capstone but acknowledged as a limitation, exactly as PrivacyQA motivates.</a:t>
-            </a:r>
-            <a:endParaRPr lang="en-US" dirty="0"/>
+              <a:t>The evaluation is not </a:t>
+            </a:r>
+            <a:r>
+              <a:rPr lang="en-US"/>
+              <a:t>invented - </a:t>
+            </a:r>
+            <a:r>
+              <a:rPr lang="en-US" dirty="0"/>
+              <a:t>each element is the standard from a reviewed paper. If asked about ground truth: I annotate the sample myself against the article text with a documented rubric (and can validate a subset with the supervisor); inter-annotator agreement is out of scope for a capstone but acknowledged as a limitation, exactly as PrivacyQA motivates.</a:t>
+            </a:r>
           </a:p>
         </p:txBody>
       </p:sp>
@@ -867,9 +708,16 @@
           <a:p>
             <a:r>
               <a:rPr lang="en-US" dirty="0"/>
-              <a:t>Item 4 is the differentiator to discuss with the supervisor: consent-scope-exceeded evidence (GDPR Art 7(1) scope of consent + Art 13). It extends the accept/reject protocol with an authenticated state — design notes already in PROGRESS.md backlog. Asking whether he wants it in scope for the final report or kept as future work.</a:t>
-            </a:r>
-            <a:endParaRPr lang="en-US" dirty="0"/>
+              <a:t>Item 4 is the differentiator to discuss with the supervisor: consent-scope-exceeded evidence (GDPR Art 7(1) scope of consent + Art 13). It extends the accept/reject protocol with an authenticated </a:t>
+            </a:r>
+            <a:r>
+              <a:rPr lang="en-US"/>
+              <a:t>state - </a:t>
+            </a:r>
+            <a:r>
+              <a:rPr lang="en-US" dirty="0"/>
+              <a:t>design notes already in PROGRESS.md backlog. Asking whether he wants it in scope for the final report or kept as future work.</a:t>
+            </a:r>
           </a:p>
         </p:txBody>
       </p:sp>
@@ -957,7 +805,6 @@
               <a:rPr lang="en-US" dirty="0"/>
               <a:t>Close by handing over the repo: PROGRESS.md (dated log), CODE_PROVENANCE.md (module-by-module), Implementation_Pointers.md (paper-to-code mapping), compliance_reports/ (both JSON runs). Everything claimed on these slides is reproducible from the repository.</a:t>
             </a:r>
-            <a:endParaRPr lang="en-US" dirty="0"/>
           </a:p>
         </p:txBody>
       </p:sp>
@@ -1043,9 +890,16 @@
           <a:p>
             <a:r>
               <a:rPr lang="en-US" dirty="0"/>
-              <a:t>One-slide recap of the literature-review conclusion, framed as the requirement it imposes on the build. Four research directions, each masters one modality. The mobile-hybrid line (Zimmeck NDSS'17, MAPS, Lalaine) proves notice-vs-practice checking is possible — but via static binary analysis, which cannot observe consent state changing with user interaction on the web.</a:t>
-            </a:r>
-            <a:endParaRPr lang="en-US" dirty="0"/>
+              <a:t>One-slide recap of the literature-review conclusion, framed as the requirement it imposes on the build. Four research directions, each masters one modality. The mobile-hybrid line (Zimmeck NDSS'17, MAPS, Lalaine) proves notice-vs-practice checking is </a:t>
+            </a:r>
+            <a:r>
+              <a:rPr lang="en-US"/>
+              <a:t>possible - </a:t>
+            </a:r>
+            <a:r>
+              <a:rPr lang="en-US" dirty="0"/>
+              <a:t>but via static binary analysis, which cannot observe consent state changing with user interaction on the web.</a:t>
+            </a:r>
           </a:p>
         </p:txBody>
       </p:sp>
@@ -1131,9 +985,24 @@
           <a:p>
             <a:r>
               <a:rPr lang="en-US" dirty="0"/>
-              <a:t>Depth answers: OPP-115 — first public annotated corpus; 10 data-practice categories (first-party collection, third-party sharing, choice/control, retention, security, policy change, DNT, specific audiences, access/edit/delete, other); each policy read by three law students; classifiers plateaued because bag-of-words captures keywords, not semantics. Polisis — privacy-specific embeddings trained on 130k policies beat general embeddings; hierarchical CNN, 88.4% top-level accuracy; powers PriBot QA. PrivacyQA — 1,750 questions over app policies; key finding: even legal experts disagree, many questions unanswerable from the policy — that is why our scorer can abstain. Zimmeck/MAPS — mapped a small closed set of practices (location, identifiers, contacts × 1st/3rd party) checkable on both sides; static analysis flagged dead code (libraries included but never called) — the false-positive argument for our runtime evidence. MAPS phrase every finding 'potential non-compliance' for legal prudence — we copied that. Lalaine — dynamic traffic + NLP on 5,102 iOS apps; 3,423 non-compliant labels: 3,281 neglect, 1,628 contrary, 677 inadequate — that typology is now a field in every report we emit.</a:t>
-            </a:r>
-            <a:endParaRPr lang="en-US" dirty="0"/>
+              <a:t>Depth answers: OPP-115 - first public annotated corpus; 10 data-practice categories (first-party collection, third-party sharing, choice/control, retention, security, policy change, DNT, specific audiences, access/edit/delete, other); each policy read by three law students; classifiers plateaued because bag-of-words captures keywords, not semantics. </a:t>
+            </a:r>
+            <a:r>
+              <a:rPr lang="en-US" dirty="0" err="1"/>
+              <a:t>Polisis</a:t>
+            </a:r>
+            <a:r>
+              <a:rPr lang="en-US" dirty="0"/>
+              <a:t> - privacy-specific embeddings trained on 130k policies beat general embeddings; hierarchical CNN, 88.4% top-level accuracy; powers PriBot QA. </a:t>
+            </a:r>
+            <a:r>
+              <a:rPr lang="en-US" dirty="0" err="1"/>
+              <a:t>PrivacyQA</a:t>
+            </a:r>
+            <a:r>
+              <a:rPr lang="en-US" dirty="0"/>
+              <a:t> - 1,750 questions over app policies; key finding: even legal experts disagree, many questions unanswerable from the policy - that is why our scorer can abstain. Zimmeck/MAPS - mapped a small closed set of practices (location, identifiers, contacts × 1st/3rd party) checkable on both sides; static analysis flagged dead code (libraries included but never called) - the false-positive argument for our runtime evidence. MAPS phrase every finding 'potential non-compliance' for legal prudence - we copied that. Lalaine - dynamic traffic + NLP on 5,102 iOS apps; 3,423 non-compliant labels: 3,281 neglect, 1,628 contrary, 677 inadequate - that typology is now a field in every report we emit.</a:t>
+            </a:r>
           </a:p>
         </p:txBody>
       </p:sp>
@@ -1219,9 +1088,56 @@
           <a:p>
             <a:r>
               <a:rPr lang="en-US" dirty="0"/>
-              <a:t>Depth answers: Trevisan — CookieCheck instruments Chrome via DevTools Protocol in Docker; 179,310 visits over 15 days; violation = at least one profiling cookie before any interaction; profiling = third-party + in Ghostery∩Disconnect + lifetime ≥1 month (empirically justified: 80% of tracker cookies last ≥1 month); results invariant across 9 proxy countries and 7 browsers — so our single-vantage scans are methodologically fine. Bouhoula — banner detection via EasyList Cookie filter list + z-index + sentence segmentation; DFS through banner settings; three BERT/XGBoost models (declared purposes 97.6%, interactive elements 95.1%, cookie purpose P 98.7/R 91.9 via CookieBlock); decision tree → 10 violation types; models tuned conservative. LegalBench — 162 tasks from 40 contributors, organized by IRAC; includes OPP-115-derived tasks. Xie — systematized 10 laws into 34 clauses across 4 themes; validated against expert annotation; average F1 0.94 — proof LLM-vs-codified-law works, but on text alone. Our addition is the practice evidence.</a:t>
-            </a:r>
-            <a:endParaRPr lang="en-US" dirty="0"/>
+              <a:t>Depth answers: </a:t>
+            </a:r>
+            <a:r>
+              <a:rPr lang="en-US"/>
+              <a:t>Trevisan - </a:t>
+            </a:r>
+            <a:r>
+              <a:rPr lang="en-US" dirty="0"/>
+              <a:t>CookieCheck instruments Chrome via DevTools Protocol in Docker; 179,310 visits over 15 days; violation = at least one profiling cookie before any interaction; profiling = third-party + in Ghostery∩Disconnect + lifetime ≥1 month (empirically justified: 80% of tracker cookies last ≥1 month); results invariant across 9 proxy countries and 7 </a:t>
+            </a:r>
+            <a:r>
+              <a:rPr lang="en-US"/>
+              <a:t>browsers - </a:t>
+            </a:r>
+            <a:r>
+              <a:rPr lang="en-US" dirty="0"/>
+              <a:t>so our single-vantage scans are methodologically fine. </a:t>
+            </a:r>
+            <a:r>
+              <a:rPr lang="en-US"/>
+              <a:t>Bouhoula - </a:t>
+            </a:r>
+            <a:r>
+              <a:rPr lang="en-US" dirty="0"/>
+              <a:t>banner detection via EasyList Cookie filter list + z-index + sentence segmentation; DFS through banner settings; three BERT/XGBoost models (declared purposes 97.6%, interactive elements 95.1%, cookie purpose P 98.7/R 91.9 via CookieBlock); decision tree → 10 violation types; models tuned conservative. </a:t>
+            </a:r>
+            <a:r>
+              <a:rPr lang="en-US"/>
+              <a:t>LegalBench - </a:t>
+            </a:r>
+            <a:r>
+              <a:rPr lang="en-US" dirty="0"/>
+              <a:t>162 tasks from 40 contributors, organized by IRAC; includes OPP-115-derived tasks. </a:t>
+            </a:r>
+            <a:r>
+              <a:rPr lang="en-US"/>
+              <a:t>Xie - </a:t>
+            </a:r>
+            <a:r>
+              <a:rPr lang="en-US" dirty="0"/>
+              <a:t>systematized 10 laws into 34 clauses across 4 themes; validated against expert annotation; average F1 </a:t>
+            </a:r>
+            <a:r>
+              <a:rPr lang="en-US"/>
+              <a:t>0.94 - </a:t>
+            </a:r>
+            <a:r>
+              <a:rPr lang="en-US" dirty="0"/>
+              <a:t>proof LLM-vs-codified-law works, but on text alone. Our addition is the practice evidence.</a:t>
+            </a:r>
           </a:p>
         </p:txBody>
       </p:sp>
@@ -1307,9 +1223,16 @@
           <a:p>
             <a:r>
               <a:rPr lang="en-US" dirty="0"/>
-              <a:t>This is Table II of the literature review made concrete with the module that answers each gap. If asked 'why RAG and not just prompting': ungrounded generation hallucinates citations; retrieving the exact article makes every judgement traceable — and we verified this matters in practice (slide 11: the model once cited the wrong article because retrieval served a near-miss; the fix was retrieval-side, not prompt-side).</a:t>
-            </a:r>
-            <a:endParaRPr lang="en-US" dirty="0"/>
+              <a:t>This is Table II of the literature review made concrete with the module that answers each gap. If asked 'why RAG and not just prompting': ungrounded generation hallucinates citations; retrieving the exact article makes every judgement </a:t>
+            </a:r>
+            <a:r>
+              <a:rPr lang="en-US"/>
+              <a:t>traceable - </a:t>
+            </a:r>
+            <a:r>
+              <a:rPr lang="en-US" dirty="0"/>
+              <a:t>and we verified this matters in practice (slide 11: the model once cited the wrong article because retrieval served a near-miss; the fix was retrieval-side, not prompt-side).</a:t>
+            </a:r>
           </a:p>
         </p:txBody>
       </p:sp>
@@ -1395,9 +1318,16 @@
           <a:p>
             <a:r>
               <a:rPr lang="en-US" dirty="0"/>
-              <a:t>Walk the data flow left to right: regulations are chunked by legal unit (Article for GDPR/DPDP, '6.—(1)' UK-SI numbering for PECR, '1798.100.' for CCPA) so citations stay valid; embedded and stored once. Per scan: Playwright records the HAR, fingerprinting trap script raises alarms (canvas/WebGL/audio/WebRTC/battery/fonts), consent elements tagged in the DOM; extractor converts to a structured evidence dict; scraper captures the policy as markdown. The scorer assembles law+notice+practice per dimension and returns strict JSON. Everything downstream of the collector runs offline except the LLM call.</a:t>
-            </a:r>
-            <a:endParaRPr lang="en-US" dirty="0"/>
+              <a:t>Walk the data flow left to right: regulations are chunked by legal unit (Article for GDPR/DPDP, </a:t>
+            </a:r>
+            <a:r>
+              <a:rPr lang="en-US"/>
+              <a:t>'6.-(</a:t>
+            </a:r>
+            <a:r>
+              <a:rPr lang="en-US" dirty="0"/>
+              <a:t>1)' UK-SI numbering for PECR, '1798.100.' for CCPA) so citations stay valid; embedded and stored once. Per scan: Playwright records the HAR, fingerprinting trap script raises alarms (canvas/WebGL/audio/WebRTC/battery/fonts), consent elements tagged in the DOM; extractor converts to a structured evidence dict; scraper captures the policy as markdown. The scorer assembles law+notice+practice per dimension and returns strict JSON. Everything downstream of the collector runs offline except the LLM call.</a:t>
+            </a:r>
           </a:p>
         </p:txBody>
       </p:sp>
@@ -1483,9 +1413,16 @@
           <a:p>
             <a:r>
               <a:rPr lang="en-US" dirty="0"/>
-              <a:t>The embedder story is the strongest answer to 'why this model': we chose legal-BERT for domain vocabulary (Polisis showed domain-specific embeddings help classification), discovered empirically that a raw BERT checkpoint without sentence-level training gives near-random retrieval (known anisotropy problem — cosine similarity ~0.72 for everything), and switched to all-mpnet-base-v2, a sentence-trained encoder. Retrieval went from ranking DPDP penalty clauses first to GDPR Art 7 first on the same query. Lesson for the paper: domain vocabulary does not compensate for missing sentence-level training. LLM: gpt-4o-mini chosen for cost + JSON mode; the scorer infers provider from the model name so Haiku/Sonnet are drop-ins; temperature 0 for reproducibility; formal selection will use LegalBench privacy tasks (F1 comparison).</a:t>
-            </a:r>
-            <a:endParaRPr lang="en-US" dirty="0"/>
+              <a:t>The embedder story is the strongest answer to 'why this model': we chose legal-BERT for domain vocabulary (Polisis showed domain-specific embeddings help classification), discovered empirically that a raw BERT checkpoint without sentence-level training gives near-random retrieval (known anisotropy </a:t>
+            </a:r>
+            <a:r>
+              <a:rPr lang="en-US"/>
+              <a:t>problem - </a:t>
+            </a:r>
+            <a:r>
+              <a:rPr lang="en-US" dirty="0"/>
+              <a:t>cosine similarity ~0.72 for everything), and switched to all-mpnet-base-v2, a sentence-trained encoder. Retrieval went from ranking DPDP penalty clauses first to GDPR Art 7 first on the same query. Lesson for the paper: domain vocabulary does not compensate for missing sentence-level training. LLM: gpt-4o-mini chosen for cost + JSON mode; the scorer infers provider from the model name so Haiku/Sonnet are drop-ins; temperature 0 for reproducibility; formal selection will use LegalBench privacy tasks (F1 comparison).</a:t>
+            </a:r>
           </a:p>
         </p:txBody>
       </p:sp>
@@ -1571,9 +1508,24 @@
           <a:p>
             <a:r>
               <a:rPr lang="en-US" dirty="0"/>
-              <a:t>Every adapted element is cited at the point of use in code comments and in the paper's Table IV. The distinction: I reuse validated RULES (the scientifically load-bearing parts — e.g. Trevisan's dual-list ∩ + ≥30-day lifetime definition survived peer review at PoPETs) but implement them inside our own pipeline, because the published tools produce aggregate crawl statistics, not the per-site structured evidence dicts an LLM prompt needs. Licences checked: Ghostery trackerdb is CC-BY-NC-SA — fine for academic use.</a:t>
-            </a:r>
-            <a:endParaRPr lang="en-US" dirty="0"/>
+              <a:t>Every adapted element is cited at the point of use in code comments and in the paper's Table IV. The distinction: I reuse validated RULES (the scientifically load-bearing </a:t>
+            </a:r>
+            <a:r>
+              <a:rPr lang="en-US"/>
+              <a:t>parts - </a:t>
+            </a:r>
+            <a:r>
+              <a:rPr lang="en-US" dirty="0"/>
+              <a:t>e.g. Trevisan's dual-list ∩ + ≥30-day lifetime definition survived peer review at PoPETs) but implement them inside our own pipeline, because the published tools produce aggregate crawl statistics, not the per-site structured evidence dicts an LLM prompt needs. Licences checked: Ghostery trackerdb is </a:t>
+            </a:r>
+            <a:r>
+              <a:rPr lang="en-US"/>
+              <a:t>CC-BY-NC-SA - </a:t>
+            </a:r>
+            <a:r>
+              <a:rPr lang="en-US" dirty="0"/>
+              <a:t>fine for academic use.</a:t>
+            </a:r>
           </a:p>
         </p:txBody>
       </p:sp>
@@ -1661,7 +1613,6 @@
               <a:rPr lang="en-US" dirty="0"/>
               <a:t>If the supervisor prefers a code walkthrough, follow this table top to bottom in the repo: telemetry_collector.py (show the trap script and consent tagging), har_extractor.py (show the profiling-cookie rule with the Trevisan citation in the docstring), ingestion/compliance_loader.py (the legal-unit regex), rag/scorer.py (IRAC system prompt, evidence-discipline guard), then open compliance_reports/ and show the JSON.</a:t>
             </a:r>
-            <a:endParaRPr lang="en-US" dirty="0"/>
           </a:p>
         </p:txBody>
       </p:sp>
@@ -1734,6 +1685,11 @@
 <file path=ppt/slideMasters/slideMaster1.xml><?xml version="1.0" encoding="utf-8"?>
 <p:sldMaster xmlns:a="http://schemas.openxmlformats.org/drawingml/2006/main" xmlns:r="http://schemas.openxmlformats.org/officeDocument/2006/relationships" xmlns:p="http://schemas.openxmlformats.org/presentationml/2006/main">
   <p:cSld>
+    <p:bg>
+      <p:bgRef idx="1001">
+        <a:schemeClr val="bg1"/>
+      </p:bgRef>
+    </p:bg>
     <p:spTree>
       <p:nvGrpSpPr>
         <p:cNvPr id="1" name=""/>
@@ -2016,6 +1972,7 @@
         <a:solidFill>
           <a:srgbClr val="1E2761"/>
         </a:solidFill>
+        <a:effectLst/>
       </p:bgPr>
     </p:bg>
     <p:spTree>
@@ -2053,7 +2010,7 @@
           <a:bodyPr wrap="square" lIns="0" tIns="0" rIns="0" bIns="0" rtlCol="0" anchor="ctr"/>
           <a:lstStyle/>
           <a:p>
-            <a:pPr indent="0" marL="0">
+            <a:pPr marL="0" indent="0">
               <a:buNone/>
             </a:pPr>
             <a:r>
@@ -2092,7 +2049,7 @@
           <a:bodyPr wrap="square" lIns="0" tIns="0" rIns="0" bIns="0" rtlCol="0" anchor="ctr"/>
           <a:lstStyle/>
           <a:p>
-            <a:pPr indent="0" marL="0">
+            <a:pPr marL="0" indent="0">
               <a:buNone/>
             </a:pPr>
             <a:r>
@@ -2131,7 +2088,7 @@
           <a:bodyPr wrap="square" lIns="0" tIns="0" rIns="0" bIns="0" rtlCol="0" anchor="ctr"/>
           <a:lstStyle/>
           <a:p>
-            <a:pPr indent="0" marL="0">
+            <a:pPr marL="0" indent="0">
               <a:buNone/>
             </a:pPr>
             <a:r>
@@ -2143,7 +2100,7 @@
                 <a:ea typeface="Calibri" pitchFamily="34" charset="-122"/>
                 <a:cs typeface="Calibri" pitchFamily="34" charset="-120"/>
               </a:rPr>
-              <a:t>Primary Research Update — Deliverable 2</a:t>
+              <a:t>Primary Research Update - Deliverable 2</a:t>
             </a:r>
             <a:endParaRPr lang="en-US" sz="1600" dirty="0"/>
           </a:p>
@@ -2170,7 +2127,7 @@
           <a:bodyPr wrap="square" lIns="0" tIns="0" rIns="0" bIns="0" rtlCol="0" anchor="ctr"/>
           <a:lstStyle/>
           <a:p>
-            <a:pPr indent="0" marL="0">
+            <a:pPr marL="0" indent="0">
               <a:buNone/>
             </a:pPr>
             <a:r>
@@ -2185,9 +2142,6 @@
               <a:t>Aaron Joseph Jean · 25233118 · University of Galway
 </a:t>
             </a:r>
-            <a:pPr indent="0" marL="0">
-              <a:buNone/>
-            </a:pPr>
             <a:r>
               <a:rPr lang="en-US" sz="1200" dirty="0">
                 <a:solidFill>
@@ -2228,7 +2182,7 @@
           <a:bodyPr wrap="square" lIns="1270" tIns="1270" rIns="1270" bIns="1270" rtlCol="0" anchor="ctr"/>
           <a:lstStyle/>
           <a:p>
-            <a:pPr indent="0" marL="0">
+            <a:pPr marL="0" indent="0">
               <a:buNone/>
             </a:pPr>
             <a:r>
@@ -2240,7 +2194,7 @@
                 <a:ea typeface="Calibri" pitchFamily="34" charset="-122"/>
                 <a:cs typeface="Calibri" pitchFamily="34" charset="-120"/>
               </a:rPr>
-              <a:t>STATUS: end-to-end pipeline running — law retrieval + policy + runtime evidence → scored report</a:t>
+              <a:t>STATUS: end-to-end pipeline running - law retrieval + policy + runtime evidence → scored report</a:t>
             </a:r>
             <a:endParaRPr lang="en-US" sz="1300" dirty="0"/>
           </a:p>
@@ -2262,6 +2216,7 @@
         <a:solidFill>
           <a:srgbClr val="FFFFFF"/>
         </a:solidFill>
+        <a:effectLst/>
       </p:bgPr>
     </p:bg>
     <p:spTree>
@@ -2299,7 +2254,7 @@
           <a:bodyPr wrap="square" lIns="0" tIns="0" rIns="0" bIns="0" rtlCol="0" anchor="ctr"/>
           <a:lstStyle/>
           <a:p>
-            <a:pPr indent="0" marL="0">
+            <a:pPr marL="0" indent="0">
               <a:buNone/>
             </a:pPr>
             <a:r>
@@ -2311,7 +2266,7 @@
                 <a:ea typeface="Cambria" pitchFamily="34" charset="-122"/>
                 <a:cs typeface="Cambria" pitchFamily="34" charset="-120"/>
               </a:rPr>
-              <a:t>First live audit — www.independent.ie (news site)</a:t>
+              <a:t>First live audit - www.independent.ie (news site)</a:t>
             </a:r>
             <a:endParaRPr lang="en-US" sz="3000" dirty="0"/>
           </a:p>
@@ -2338,7 +2293,7 @@
           <a:bodyPr wrap="square" lIns="0" tIns="0" rIns="0" bIns="0" rtlCol="0" anchor="ctr"/>
           <a:lstStyle/>
           <a:p>
-            <a:pPr indent="0" marL="0">
+            <a:pPr marL="0" indent="0">
               <a:buNone/>
             </a:pPr>
             <a:r>
@@ -2377,7 +2332,7 @@
           <a:bodyPr wrap="square" lIns="0" tIns="0" rIns="0" bIns="0" rtlCol="0" anchor="ctr"/>
           <a:lstStyle/>
           <a:p>
-            <a:pPr algn="ctr" indent="0" marL="0">
+            <a:pPr marL="0" indent="0" algn="ctr">
               <a:buNone/>
             </a:pPr>
             <a:r>
@@ -2416,7 +2371,7 @@
           <a:bodyPr wrap="square" lIns="0" tIns="0" rIns="0" bIns="0" rtlCol="0" anchor="ctr"/>
           <a:lstStyle/>
           <a:p>
-            <a:pPr algn="ctr" indent="0" marL="0">
+            <a:pPr marL="0" indent="0" algn="ctr">
               <a:buNone/>
             </a:pPr>
             <a:r>
@@ -2455,7 +2410,7 @@
           <a:bodyPr wrap="square" lIns="0" tIns="0" rIns="0" bIns="0" rtlCol="0" anchor="ctr"/>
           <a:lstStyle/>
           <a:p>
-            <a:pPr algn="ctr" indent="0" marL="0">
+            <a:pPr marL="0" indent="0" algn="ctr">
               <a:buNone/>
             </a:pPr>
             <a:r>
@@ -2494,7 +2449,7 @@
           <a:bodyPr wrap="square" lIns="0" tIns="0" rIns="0" bIns="0" rtlCol="0" anchor="ctr"/>
           <a:lstStyle/>
           <a:p>
-            <a:pPr algn="ctr" indent="0" marL="0">
+            <a:pPr marL="0" indent="0" algn="ctr">
               <a:buNone/>
             </a:pPr>
             <a:r>
@@ -2533,7 +2488,7 @@
           <a:bodyPr wrap="square" lIns="0" tIns="0" rIns="0" bIns="0" rtlCol="0" anchor="ctr"/>
           <a:lstStyle/>
           <a:p>
-            <a:pPr algn="ctr" indent="0" marL="0">
+            <a:pPr marL="0" indent="0" algn="ctr">
               <a:buNone/>
             </a:pPr>
             <a:r>
@@ -2572,7 +2527,7 @@
           <a:bodyPr wrap="square" lIns="0" tIns="0" rIns="0" bIns="0" rtlCol="0" anchor="ctr"/>
           <a:lstStyle/>
           <a:p>
-            <a:pPr algn="ctr" indent="0" marL="0">
+            <a:pPr marL="0" indent="0" algn="ctr">
               <a:buNone/>
             </a:pPr>
             <a:r>
@@ -2611,7 +2566,7 @@
           <a:bodyPr wrap="square" lIns="0" tIns="0" rIns="0" bIns="0" rtlCol="0" anchor="ctr"/>
           <a:lstStyle/>
           <a:p>
-            <a:pPr algn="ctr" indent="0" marL="0">
+            <a:pPr marL="0" indent="0" algn="ctr">
               <a:buNone/>
             </a:pPr>
             <a:r>
@@ -2650,7 +2605,7 @@
           <a:bodyPr wrap="square" lIns="0" tIns="0" rIns="0" bIns="0" rtlCol="0" anchor="ctr"/>
           <a:lstStyle/>
           <a:p>
-            <a:pPr algn="ctr" indent="0" marL="0">
+            <a:pPr marL="0" indent="0" algn="ctr">
               <a:buNone/>
             </a:pPr>
             <a:r>
@@ -2670,7 +2625,7 @@
       </p:sp>
       <p:graphicFrame>
         <p:nvGraphicFramePr>
-          <p:cNvPr id="11" name="Table 0"/>
+          <p:cNvPr id="12" name="Table 0"/>
           <p:cNvGraphicFramePr>
             <a:graphicFrameLocks noGrp="1"/>
           </p:cNvGraphicFramePr>
@@ -2684,17 +2639,41 @@
         </p:nvGraphicFramePr>
         <p:xfrm>
           <a:off x="548640" y="3200400"/>
-          <a:ext cx="11091672" cy="914400"/>
+          <a:ext cx="11091672" cy="2194560"/>
         </p:xfrm>
         <a:graphic>
           <a:graphicData uri="http://schemas.openxmlformats.org/drawingml/2006/table">
             <a:tbl>
               <a:tblPr/>
               <a:tblGrid>
-                <a:gridCol w="3566160"/>
-                <a:gridCol w="1097280"/>
-                <a:gridCol w="822960"/>
-                <a:gridCol w="5605272"/>
+                <a:gridCol w="3566160">
+                  <a:extLst>
+                    <a:ext uri="{9D8B030D-6E8A-4147-A177-3AD203B41FA5}">
+                      <a16:colId xmlns:a16="http://schemas.microsoft.com/office/drawing/2014/main" val="20000"/>
+                    </a:ext>
+                  </a:extLst>
+                </a:gridCol>
+                <a:gridCol w="1097280">
+                  <a:extLst>
+                    <a:ext uri="{9D8B030D-6E8A-4147-A177-3AD203B41FA5}">
+                      <a16:colId xmlns:a16="http://schemas.microsoft.com/office/drawing/2014/main" val="20001"/>
+                    </a:ext>
+                  </a:extLst>
+                </a:gridCol>
+                <a:gridCol w="822960">
+                  <a:extLst>
+                    <a:ext uri="{9D8B030D-6E8A-4147-A177-3AD203B41FA5}">
+                      <a16:colId xmlns:a16="http://schemas.microsoft.com/office/drawing/2014/main" val="20002"/>
+                    </a:ext>
+                  </a:extLst>
+                </a:gridCol>
+                <a:gridCol w="5605272">
+                  <a:extLst>
+                    <a:ext uri="{9D8B030D-6E8A-4147-A177-3AD203B41FA5}">
+                      <a16:colId xmlns:a16="http://schemas.microsoft.com/office/drawing/2014/main" val="20003"/>
+                    </a:ext>
+                  </a:extLst>
+                </a:gridCol>
               </a:tblGrid>
               <a:tr h="548640">
                 <a:tc>
@@ -2702,7 +2681,7 @@
                     <a:bodyPr/>
                     <a:lstStyle/>
                     <a:p>
-                      <a:pPr indent="0" marL="0">
+                      <a:pPr marL="0" indent="0">
                         <a:buNone/>
                       </a:pPr>
                       <a:r>
@@ -2723,7 +2702,7 @@
                       </a:endParaRPr>
                     </a:p>
                   </a:txBody>
-                  <a:tcPr marL="91440" marR="91440" marT="45720" marB="45720" anchor="ctr">
+                  <a:tcPr anchor="ctr">
                     <a:lnL w="6350" cap="flat" cmpd="sng" algn="ctr">
                       <a:solidFill>
                         <a:srgbClr val="D8DEEA"/>
@@ -2770,7 +2749,7 @@
                     <a:bodyPr/>
                     <a:lstStyle/>
                     <a:p>
-                      <a:pPr indent="0" marL="0">
+                      <a:pPr marL="0" indent="0">
                         <a:buNone/>
                       </a:pPr>
                       <a:r>
@@ -2791,7 +2770,7 @@
                       </a:endParaRPr>
                     </a:p>
                   </a:txBody>
-                  <a:tcPr marL="91440" marR="91440" marT="45720" marB="45720" anchor="ctr">
+                  <a:tcPr anchor="ctr">
                     <a:lnL w="6350" cap="flat" cmpd="sng" algn="ctr">
                       <a:solidFill>
                         <a:srgbClr val="D8DEEA"/>
@@ -2838,7 +2817,7 @@
                     <a:bodyPr/>
                     <a:lstStyle/>
                     <a:p>
-                      <a:pPr indent="0" marL="0">
+                      <a:pPr marL="0" indent="0">
                         <a:buNone/>
                       </a:pPr>
                       <a:r>
@@ -2859,7 +2838,7 @@
                       </a:endParaRPr>
                     </a:p>
                   </a:txBody>
-                  <a:tcPr marL="91440" marR="91440" marT="45720" marB="45720" anchor="ctr">
+                  <a:tcPr anchor="ctr">
                     <a:lnL w="6350" cap="flat" cmpd="sng" algn="ctr">
                       <a:solidFill>
                         <a:srgbClr val="D8DEEA"/>
@@ -2906,7 +2885,7 @@
                     <a:bodyPr/>
                     <a:lstStyle/>
                     <a:p>
-                      <a:pPr indent="0" marL="0">
+                      <a:pPr marL="0" indent="0">
                         <a:buNone/>
                       </a:pPr>
                       <a:r>
@@ -2927,7 +2906,7 @@
                       </a:endParaRPr>
                     </a:p>
                   </a:txBody>
-                  <a:tcPr marL="91440" marR="91440" marT="45720" marB="45720" anchor="ctr">
+                  <a:tcPr anchor="ctr">
                     <a:lnL w="6350" cap="flat" cmpd="sng" algn="ctr">
                       <a:solidFill>
                         <a:srgbClr val="D8DEEA"/>
@@ -2969,6 +2948,11 @@
                     </a:solidFill>
                   </a:tcPr>
                 </a:tc>
+                <a:extLst>
+                  <a:ext uri="{0D108BD9-81ED-4DB2-BD59-A6C34878D82A}">
+                    <a16:rowId xmlns:a16="http://schemas.microsoft.com/office/drawing/2014/main" val="10000"/>
+                  </a:ext>
+                </a:extLst>
               </a:tr>
               <a:tr h="548640">
                 <a:tc>
@@ -2976,7 +2960,7 @@
                     <a:bodyPr/>
                     <a:lstStyle/>
                     <a:p>
-                      <a:pPr indent="0" marL="0">
+                      <a:pPr marL="0" indent="0">
                         <a:buNone/>
                       </a:pPr>
                       <a:r>
@@ -2997,7 +2981,7 @@
                       </a:endParaRPr>
                     </a:p>
                   </a:txBody>
-                  <a:tcPr marL="91440" marR="91440" marT="45720" marB="45720" anchor="ctr">
+                  <a:tcPr anchor="ctr">
                     <a:lnL w="6350" cap="flat" cmpd="sng" algn="ctr">
                       <a:solidFill>
                         <a:srgbClr val="D8DEEA"/>
@@ -3041,7 +3025,7 @@
                     <a:bodyPr/>
                     <a:lstStyle/>
                     <a:p>
-                      <a:pPr indent="0" marL="0">
+                      <a:pPr marL="0" indent="0">
                         <a:buNone/>
                       </a:pPr>
                       <a:r>
@@ -3062,7 +3046,7 @@
                       </a:endParaRPr>
                     </a:p>
                   </a:txBody>
-                  <a:tcPr marL="91440" marR="91440" marT="45720" marB="45720" anchor="ctr">
+                  <a:tcPr anchor="ctr">
                     <a:lnL w="6350" cap="flat" cmpd="sng" algn="ctr">
                       <a:solidFill>
                         <a:srgbClr val="D8DEEA"/>
@@ -3106,7 +3090,7 @@
                     <a:bodyPr/>
                     <a:lstStyle/>
                     <a:p>
-                      <a:pPr indent="0" marL="0">
+                      <a:pPr marL="0" indent="0">
                         <a:buNone/>
                       </a:pPr>
                       <a:r>
@@ -3127,7 +3111,7 @@
                       </a:endParaRPr>
                     </a:p>
                   </a:txBody>
-                  <a:tcPr marL="91440" marR="91440" marT="45720" marB="45720" anchor="ctr">
+                  <a:tcPr anchor="ctr">
                     <a:lnL w="6350" cap="flat" cmpd="sng" algn="ctr">
                       <a:solidFill>
                         <a:srgbClr val="D8DEEA"/>
@@ -3171,7 +3155,7 @@
                     <a:bodyPr/>
                     <a:lstStyle/>
                     <a:p>
-                      <a:pPr indent="0" marL="0">
+                      <a:pPr marL="0" indent="0">
                         <a:buNone/>
                       </a:pPr>
                       <a:r>
@@ -3183,7 +3167,7 @@
                           <a:ea typeface="Calibri" pitchFamily="34" charset="-122"/>
                           <a:cs typeface="Calibri" pitchFamily="34" charset="-120"/>
                         </a:rPr>
-                        <a:t>tracker requests + fingerprinting fired before any consent — discrepancy: contrary</a:t>
+                        <a:t>tracker requests + fingerprinting fired before any consent - discrepancy: contrary</a:t>
                       </a:r>
                       <a:endParaRPr lang="en-US" sz="1050" dirty="0">
                         <a:latin typeface="Calibri" charset="0"/>
@@ -3192,7 +3176,7 @@
                       </a:endParaRPr>
                     </a:p>
                   </a:txBody>
-                  <a:tcPr marL="91440" marR="91440" marT="45720" marB="45720" anchor="ctr">
+                  <a:tcPr anchor="ctr">
                     <a:lnL w="6350" cap="flat" cmpd="sng" algn="ctr">
                       <a:solidFill>
                         <a:srgbClr val="D8DEEA"/>
@@ -3231,6 +3215,11 @@
                     </a:lnB>
                   </a:tcPr>
                 </a:tc>
+                <a:extLst>
+                  <a:ext uri="{0D108BD9-81ED-4DB2-BD59-A6C34878D82A}">
+                    <a16:rowId xmlns:a16="http://schemas.microsoft.com/office/drawing/2014/main" val="10001"/>
+                  </a:ext>
+                </a:extLst>
               </a:tr>
               <a:tr h="548640">
                 <a:tc>
@@ -3238,7 +3227,7 @@
                     <a:bodyPr/>
                     <a:lstStyle/>
                     <a:p>
-                      <a:pPr indent="0" marL="0">
+                      <a:pPr marL="0" indent="0">
                         <a:buNone/>
                       </a:pPr>
                       <a:r>
@@ -3259,7 +3248,7 @@
                       </a:endParaRPr>
                     </a:p>
                   </a:txBody>
-                  <a:tcPr marL="91440" marR="91440" marT="45720" marB="45720" anchor="ctr">
+                  <a:tcPr anchor="ctr">
                     <a:lnL w="6350" cap="flat" cmpd="sng" algn="ctr">
                       <a:solidFill>
                         <a:srgbClr val="D8DEEA"/>
@@ -3303,7 +3292,7 @@
                     <a:bodyPr/>
                     <a:lstStyle/>
                     <a:p>
-                      <a:pPr indent="0" marL="0">
+                      <a:pPr marL="0" indent="0">
                         <a:buNone/>
                       </a:pPr>
                       <a:r>
@@ -3324,7 +3313,7 @@
                       </a:endParaRPr>
                     </a:p>
                   </a:txBody>
-                  <a:tcPr marL="91440" marR="91440" marT="45720" marB="45720" anchor="ctr">
+                  <a:tcPr anchor="ctr">
                     <a:lnL w="6350" cap="flat" cmpd="sng" algn="ctr">
                       <a:solidFill>
                         <a:srgbClr val="D8DEEA"/>
@@ -3368,7 +3357,7 @@
                     <a:bodyPr/>
                     <a:lstStyle/>
                     <a:p>
-                      <a:pPr indent="0" marL="0">
+                      <a:pPr marL="0" indent="0">
                         <a:buNone/>
                       </a:pPr>
                       <a:r>
@@ -3389,7 +3378,7 @@
                       </a:endParaRPr>
                     </a:p>
                   </a:txBody>
-                  <a:tcPr marL="91440" marR="91440" marT="45720" marB="45720" anchor="ctr">
+                  <a:tcPr anchor="ctr">
                     <a:lnL w="6350" cap="flat" cmpd="sng" algn="ctr">
                       <a:solidFill>
                         <a:srgbClr val="D8DEEA"/>
@@ -3433,7 +3422,7 @@
                     <a:bodyPr/>
                     <a:lstStyle/>
                     <a:p>
-                      <a:pPr indent="0" marL="0">
+                      <a:pPr marL="0" indent="0">
                         <a:buNone/>
                       </a:pPr>
                       <a:r>
@@ -3445,7 +3434,7 @@
                           <a:ea typeface="Calibri" pitchFamily="34" charset="-122"/>
                           <a:cs typeface="Calibri" pitchFamily="34" charset="-120"/>
                         </a:rPr>
-                        <a:t>policy names no recipients; 15 tracker domains observed — “we may partner with third parties” quoted as inadequate</a:t>
+                        <a:t>policy names no recipients; 15 tracker domains observed - “we may partner with third parties” quoted as inadequate</a:t>
                       </a:r>
                       <a:endParaRPr lang="en-US" sz="1050" dirty="0">
                         <a:latin typeface="Calibri" charset="0"/>
@@ -3454,7 +3443,7 @@
                       </a:endParaRPr>
                     </a:p>
                   </a:txBody>
-                  <a:tcPr marL="91440" marR="91440" marT="45720" marB="45720" anchor="ctr">
+                  <a:tcPr anchor="ctr">
                     <a:lnL w="6350" cap="flat" cmpd="sng" algn="ctr">
                       <a:solidFill>
                         <a:srgbClr val="D8DEEA"/>
@@ -3493,6 +3482,11 @@
                     </a:lnB>
                   </a:tcPr>
                 </a:tc>
+                <a:extLst>
+                  <a:ext uri="{0D108BD9-81ED-4DB2-BD59-A6C34878D82A}">
+                    <a16:rowId xmlns:a16="http://schemas.microsoft.com/office/drawing/2014/main" val="10002"/>
+                  </a:ext>
+                </a:extLst>
               </a:tr>
               <a:tr h="548640">
                 <a:tc>
@@ -3500,7 +3494,7 @@
                     <a:bodyPr/>
                     <a:lstStyle/>
                     <a:p>
-                      <a:pPr indent="0" marL="0">
+                      <a:pPr marL="0" indent="0">
                         <a:buNone/>
                       </a:pPr>
                       <a:r>
@@ -3521,7 +3515,7 @@
                       </a:endParaRPr>
                     </a:p>
                   </a:txBody>
-                  <a:tcPr marL="91440" marR="91440" marT="45720" marB="45720" anchor="ctr">
+                  <a:tcPr anchor="ctr">
                     <a:lnL w="6350" cap="flat" cmpd="sng" algn="ctr">
                       <a:solidFill>
                         <a:srgbClr val="D8DEEA"/>
@@ -3565,7 +3559,7 @@
                     <a:bodyPr/>
                     <a:lstStyle/>
                     <a:p>
-                      <a:pPr indent="0" marL="0">
+                      <a:pPr marL="0" indent="0">
                         <a:buNone/>
                       </a:pPr>
                       <a:r>
@@ -3586,7 +3580,7 @@
                       </a:endParaRPr>
                     </a:p>
                   </a:txBody>
-                  <a:tcPr marL="91440" marR="91440" marT="45720" marB="45720" anchor="ctr">
+                  <a:tcPr anchor="ctr">
                     <a:lnL w="6350" cap="flat" cmpd="sng" algn="ctr">
                       <a:solidFill>
                         <a:srgbClr val="D8DEEA"/>
@@ -3630,7 +3624,7 @@
                     <a:bodyPr/>
                     <a:lstStyle/>
                     <a:p>
-                      <a:pPr indent="0" marL="0">
+                      <a:pPr marL="0" indent="0">
                         <a:buNone/>
                       </a:pPr>
                       <a:r>
@@ -3651,7 +3645,7 @@
                       </a:endParaRPr>
                     </a:p>
                   </a:txBody>
-                  <a:tcPr marL="91440" marR="91440" marT="45720" marB="45720" anchor="ctr">
+                  <a:tcPr anchor="ctr">
                     <a:lnL w="6350" cap="flat" cmpd="sng" algn="ctr">
                       <a:solidFill>
                         <a:srgbClr val="D8DEEA"/>
@@ -3695,7 +3689,7 @@
                     <a:bodyPr/>
                     <a:lstStyle/>
                     <a:p>
-                      <a:pPr indent="0" marL="0">
+                      <a:pPr marL="0" indent="0">
                         <a:buNone/>
                       </a:pPr>
                       <a:r>
@@ -3716,7 +3710,7 @@
                       </a:endParaRPr>
                     </a:p>
                   </a:txBody>
-                  <a:tcPr marL="91440" marR="91440" marT="45720" marB="45720" anchor="ctr">
+                  <a:tcPr anchor="ctr">
                     <a:lnL w="6350" cap="flat" cmpd="sng" algn="ctr">
                       <a:solidFill>
                         <a:srgbClr val="D8DEEA"/>
@@ -3755,6 +3749,11 @@
                     </a:lnB>
                   </a:tcPr>
                 </a:tc>
+                <a:extLst>
+                  <a:ext uri="{0D108BD9-81ED-4DB2-BD59-A6C34878D82A}">
+                    <a16:rowId xmlns:a16="http://schemas.microsoft.com/office/drawing/2014/main" val="10003"/>
+                  </a:ext>
+                </a:extLst>
               </a:tr>
             </a:tbl>
           </a:graphicData>
@@ -3785,7 +3784,7 @@
           <a:bodyPr wrap="square" lIns="1270" tIns="1270" rIns="1270" bIns="1270" rtlCol="0" anchor="ctr"/>
           <a:lstStyle/>
           <a:p>
-            <a:pPr algn="ctr" indent="0" marL="0">
+            <a:pPr marL="0" indent="0" algn="ctr">
               <a:buNone/>
             </a:pPr>
             <a:r>
@@ -3797,7 +3796,7 @@
                 <a:ea typeface="Calibri" pitchFamily="34" charset="-122"/>
                 <a:cs typeface="Calibri" pitchFamily="34" charset="-120"/>
               </a:rPr>
-              <a:t>Overall: 26 / 100 — POTENTIAL NON-COMPLIANCE   ·   every verdict carries the article text, a policy quote, behavioural evidence and a recommended fix</a:t>
+              <a:t>Overall: 26 / 100 - POTENTIAL NON-COMPLIANCE   ·   every verdict carries the article text, a policy quote, behavioural evidence and a recommended fix</a:t>
             </a:r>
             <a:endParaRPr lang="en-US" sz="1300" dirty="0"/>
           </a:p>
@@ -3824,7 +3823,7 @@
           <a:bodyPr wrap="square" lIns="0" tIns="0" rIns="0" bIns="0" rtlCol="0" anchor="ctr"/>
           <a:lstStyle/>
           <a:p>
-            <a:pPr algn="r" indent="0" marL="0">
+            <a:pPr marL="0" indent="0" algn="r">
               <a:buNone/>
             </a:pPr>
             <a:r>
@@ -3836,7 +3835,7 @@
                 <a:ea typeface="Calibri" pitchFamily="34" charset="-122"/>
                 <a:cs typeface="Calibri" pitchFamily="34" charset="-120"/>
               </a:rPr>
-              <a:t>comp_square · primary research update — 10</a:t>
+              <a:t>comp_square · primary research update - 10</a:t>
             </a:r>
             <a:endParaRPr lang="en-US" sz="900" dirty="0"/>
           </a:p>
@@ -3858,6 +3857,7 @@
         <a:solidFill>
           <a:srgbClr val="FFFFFF"/>
         </a:solidFill>
+        <a:effectLst/>
       </p:bgPr>
     </p:bg>
     <p:spTree>
@@ -3895,7 +3895,7 @@
           <a:bodyPr wrap="square" lIns="0" tIns="0" rIns="0" bIns="0" rtlCol="0" anchor="ctr"/>
           <a:lstStyle/>
           <a:p>
-            <a:pPr indent="0" marL="0">
+            <a:pPr marL="0" indent="0">
               <a:buNone/>
             </a:pPr>
             <a:r>
@@ -3907,7 +3907,7 @@
                 <a:ea typeface="Cambria" pitchFamily="34" charset="-122"/>
                 <a:cs typeface="Cambria" pitchFamily="34" charset="-120"/>
               </a:rPr>
-              <a:t>Error analysis — found, diagnosed, fixed, re-verified</a:t>
+              <a:t>Error analysis - found, diagnosed, fixed, re-verified</a:t>
             </a:r>
             <a:endParaRPr lang="en-US" sz="3000" dirty="0"/>
           </a:p>
@@ -3934,7 +3934,7 @@
           <a:bodyPr wrap="square" lIns="0" tIns="0" rIns="0" bIns="0" rtlCol="0" anchor="ctr"/>
           <a:lstStyle/>
           <a:p>
-            <a:pPr indent="0" marL="0">
+            <a:pPr marL="0" indent="0">
               <a:buNone/>
             </a:pPr>
             <a:r>
@@ -3975,7 +3975,7 @@
           <a:bodyPr wrap="square" lIns="0" tIns="0" rIns="0" bIns="0" rtlCol="0" anchor="ctr"/>
           <a:lstStyle/>
           <a:p>
-            <a:pPr algn="ctr" indent="0" marL="0">
+            <a:pPr marL="0" indent="0" algn="ctr">
               <a:buNone/>
             </a:pPr>
             <a:r>
@@ -4018,7 +4018,7 @@
           <a:bodyPr wrap="square" lIns="2032" tIns="2032" rIns="2032" bIns="2032" rtlCol="0" anchor="ctr"/>
           <a:lstStyle/>
           <a:p>
-            <a:pPr indent="0" marL="0">
+            <a:pPr marL="0" indent="0">
               <a:buNone/>
             </a:pPr>
             <a:r>
@@ -4033,9 +4033,6 @@
               <a:t>LLM over-condemnation (hallucinated evidence)
 </a:t>
             </a:r>
-            <a:pPr indent="0" marL="0">
-              <a:buNone/>
-            </a:pPr>
             <a:r>
               <a:rPr lang="en-US" sz="1150" b="1" dirty="0">
                 <a:solidFill>
@@ -4047,9 +4044,6 @@
               </a:rPr>
               <a:t>Observed: </a:t>
             </a:r>
-            <a:pPr indent="0" marL="0">
-              <a:buNone/>
-            </a:pPr>
             <a:r>
               <a:rPr lang="en-US" sz="1150" dirty="0">
                 <a:solidFill>
@@ -4059,12 +4053,9 @@
                 <a:ea typeface="Calibri" pitchFamily="34" charset="-122"/>
                 <a:cs typeface="Calibri" pitchFamily="34" charset="-120"/>
               </a:rPr>
-              <a:t>pre_consent_tracking scored FAIL 0 @ confidence 1.0 — but the extractor had found no profiling cookies; the model invented cookie installations and misread our no-interaction protocol as the site lacking a consent mechanism
+              <a:t>pre_consent_tracking scored FAIL 0 @ confidence 1.0 - but the extractor had found no profiling cookies; the model invented cookie installations and misread our no-interaction protocol as the site lacking a consent mechanism
 </a:t>
             </a:r>
-            <a:pPr indent="0" marL="0">
-              <a:buNone/>
-            </a:pPr>
             <a:r>
               <a:rPr lang="en-US" sz="1150" b="1" dirty="0">
                 <a:solidFill>
@@ -4076,9 +4067,6 @@
               </a:rPr>
               <a:t>Diagnosis: </a:t>
             </a:r>
-            <a:pPr indent="0" marL="0">
-              <a:buNone/>
-            </a:pPr>
             <a:r>
               <a:rPr lang="en-US" sz="1150" dirty="0">
                 <a:solidFill>
@@ -4091,9 +4079,6 @@
               <a:t>prompt ambiguity: “consent interaction: none” described OUR crawler, not the site
 </a:t>
             </a:r>
-            <a:pPr indent="0" marL="0">
-              <a:buNone/>
-            </a:pPr>
             <a:r>
               <a:rPr lang="en-US" sz="1150" b="1" dirty="0">
                 <a:solidFill>
@@ -4105,9 +4090,6 @@
               </a:rPr>
               <a:t>Fix: </a:t>
             </a:r>
-            <a:pPr indent="0" marL="0">
-              <a:buNone/>
-            </a:pPr>
             <a:r>
               <a:rPr lang="en-US" sz="1150" dirty="0">
                 <a:solidFill>
@@ -4120,9 +4102,6 @@
               <a:t>AUDIT PROTOCOL NOTE in the evidence block; hard guard: empty evidence ⇒ must not assert behavioural violation; “Evidence discipline” rules in system prompt
 </a:t>
             </a:r>
-            <a:pPr indent="0" marL="0">
-              <a:buNone/>
-            </a:pPr>
             <a:r>
               <a:rPr lang="en-US" sz="1150" b="1" dirty="0">
                 <a:solidFill>
@@ -4134,9 +4113,6 @@
               </a:rPr>
               <a:t>Re-run: </a:t>
             </a:r>
-            <a:pPr indent="0" marL="0">
-              <a:buNone/>
-            </a:pPr>
             <a:r>
               <a:rPr lang="en-US" sz="1150" dirty="0">
                 <a:solidFill>
@@ -4175,7 +4151,7 @@
           <a:bodyPr wrap="square" lIns="0" tIns="0" rIns="0" bIns="0" rtlCol="0" anchor="ctr"/>
           <a:lstStyle/>
           <a:p>
-            <a:pPr algn="ctr" indent="0" marL="0">
+            <a:pPr marL="0" indent="0" algn="ctr">
               <a:buNone/>
             </a:pPr>
             <a:r>
@@ -4218,7 +4194,7 @@
           <a:bodyPr wrap="square" lIns="2032" tIns="2032" rIns="2032" bIns="2032" rtlCol="0" anchor="ctr"/>
           <a:lstStyle/>
           <a:p>
-            <a:pPr indent="0" marL="0">
+            <a:pPr marL="0" indent="0">
               <a:buNone/>
             </a:pPr>
             <a:r>
@@ -4233,9 +4209,6 @@
               <a:t>Retrieval near-miss (wrong article cited)
 </a:t>
             </a:r>
-            <a:pPr indent="0" marL="0">
-              <a:buNone/>
-            </a:pPr>
             <a:r>
               <a:rPr lang="en-US" sz="1150" b="1" dirty="0">
                 <a:solidFill>
@@ -4247,9 +4220,6 @@
               </a:rPr>
               <a:t>Observed: </a:t>
             </a:r>
-            <a:pPr indent="0" marL="0">
-              <a:buNone/>
-            </a:pPr>
             <a:r>
               <a:rPr lang="en-US" sz="1150" dirty="0">
                 <a:solidFill>
@@ -4262,9 +4232,6 @@
               <a:t>disclosure_of_third_parties verdict cited GDPR Art 19 (rectification notification) instead of Art 13(1)(e)
 </a:t>
             </a:r>
-            <a:pPr indent="0" marL="0">
-              <a:buNone/>
-            </a:pPr>
             <a:r>
               <a:rPr lang="en-US" sz="1150" b="1" dirty="0">
                 <a:solidFill>
@@ -4276,9 +4243,6 @@
               </a:rPr>
               <a:t>Diagnosis: </a:t>
             </a:r>
-            <a:pPr indent="0" marL="0">
-              <a:buNone/>
-            </a:pPr>
             <a:r>
               <a:rPr lang="en-US" sz="1150" dirty="0">
                 <a:solidFill>
@@ -4288,12 +4252,9 @@
                 <a:ea typeface="Calibri" pitchFamily="34" charset="-122"/>
                 <a:cs typeface="Calibri" pitchFamily="34" charset="-120"/>
               </a:rPr>
-              <a:t>semantic embedding ranked Art 19's “recipient to whom data have been disclosed” above Art 13 — the LLM obeyed “cite only the Rule”; the Rule was wrong
+              <a:t>semantic embedding ranked Art 19's “recipient to whom data have been disclosed” above Art 13 - the LLM obeyed “cite only the Rule”; the Rule was wrong
 </a:t>
             </a:r>
-            <a:pPr indent="0" marL="0">
-              <a:buNone/>
-            </a:pPr>
             <a:r>
               <a:rPr lang="en-US" sz="1150" b="1" dirty="0">
                 <a:solidFill>
@@ -4305,9 +4266,6 @@
               </a:rPr>
               <a:t>Fix: </a:t>
             </a:r>
-            <a:pPr indent="0" marL="0">
-              <a:buNone/>
-            </a:pPr>
             <a:r>
               <a:rPr lang="en-US" sz="1150" dirty="0">
                 <a:solidFill>
@@ -4320,9 +4278,6 @@
               <a:t>dimension-anchored retrieval: each dimension's known articles fetched deterministically by metadata, placed ahead of semantic hits (verified for all 15 dimensions)
 </a:t>
             </a:r>
-            <a:pPr indent="0" marL="0">
-              <a:buNone/>
-            </a:pPr>
             <a:r>
               <a:rPr lang="en-US" sz="1150" b="1" dirty="0">
                 <a:solidFill>
@@ -4334,9 +4289,6 @@
               </a:rPr>
               <a:t>Re-run: </a:t>
             </a:r>
-            <a:pPr indent="0" marL="0">
-              <a:buNone/>
-            </a:pPr>
             <a:r>
               <a:rPr lang="en-US" sz="1150" dirty="0">
                 <a:solidFill>
@@ -4346,7 +4298,7 @@
                 <a:ea typeface="Calibri" pitchFamily="34" charset="-122"/>
                 <a:cs typeface="Calibri" pitchFamily="34" charset="-120"/>
               </a:rPr>
-              <a:t>re-run pending — expected Art 13(1)(e) with discrepancy: inadequate</a:t>
+              <a:t>re-run pending - expected Art 13(1)(e) with discrepancy: inadequate</a:t>
             </a:r>
             <a:endParaRPr lang="en-US" sz="1300" dirty="0"/>
           </a:p>
@@ -4373,7 +4325,7 @@
           <a:bodyPr wrap="square" lIns="0" tIns="0" rIns="0" bIns="0" rtlCol="0" anchor="ctr"/>
           <a:lstStyle/>
           <a:p>
-            <a:pPr algn="r" indent="0" marL="0">
+            <a:pPr marL="0" indent="0" algn="r">
               <a:buNone/>
             </a:pPr>
             <a:r>
@@ -4385,7 +4337,7 @@
                 <a:ea typeface="Calibri" pitchFamily="34" charset="-122"/>
                 <a:cs typeface="Calibri" pitchFamily="34" charset="-120"/>
               </a:rPr>
-              <a:t>comp_square · primary research update — 11</a:t>
+              <a:t>comp_square · primary research update - 11</a:t>
             </a:r>
             <a:endParaRPr lang="en-US" sz="900" dirty="0"/>
           </a:p>
@@ -4407,6 +4359,7 @@
         <a:solidFill>
           <a:srgbClr val="FFFFFF"/>
         </a:solidFill>
+        <a:effectLst/>
       </p:bgPr>
     </p:bg>
     <p:spTree>
@@ -4444,7 +4397,7 @@
           <a:bodyPr wrap="square" lIns="0" tIns="0" rIns="0" bIns="0" rtlCol="0" anchor="ctr"/>
           <a:lstStyle/>
           <a:p>
-            <a:pPr indent="0" marL="0">
+            <a:pPr marL="0" indent="0">
               <a:buNone/>
             </a:pPr>
             <a:r>
@@ -4456,7 +4409,7 @@
                 <a:ea typeface="Cambria" pitchFamily="34" charset="-122"/>
                 <a:cs typeface="Cambria" pitchFamily="34" charset="-120"/>
               </a:rPr>
-              <a:t>Evaluation plan — adopted from the reviewed papers</a:t>
+              <a:t>Evaluation plan - adopted from the reviewed papers</a:t>
             </a:r>
             <a:endParaRPr lang="en-US" sz="3000" dirty="0"/>
           </a:p>
@@ -4483,7 +4436,7 @@
           <a:bodyPr wrap="square" lIns="0" tIns="0" rIns="0" bIns="0" rtlCol="0" anchor="ctr"/>
           <a:lstStyle/>
           <a:p>
-            <a:pPr indent="0" marL="0">
+            <a:pPr marL="0" indent="0">
               <a:buNone/>
             </a:pPr>
             <a:r>
@@ -4526,7 +4479,7 @@
           <a:bodyPr wrap="square" lIns="2032" tIns="2032" rIns="2032" bIns="2032" rtlCol="0" anchor="ctr"/>
           <a:lstStyle/>
           <a:p>
-            <a:pPr indent="0" marL="0">
+            <a:pPr marL="0" indent="0">
               <a:buNone/>
             </a:pPr>
             <a:r>
@@ -4541,9 +4494,6 @@
               <a:t>Per-dimension F1 vs expert annotation
 </a:t>
             </a:r>
-            <a:pPr indent="0" marL="0">
-              <a:buNone/>
-            </a:pPr>
             <a:r>
               <a:rPr lang="en-US" sz="1200" dirty="0">
                 <a:solidFill>
@@ -4556,9 +4506,6 @@
               <a:t>Hand-label a site sample (news / SaaS / education / public sector), compare scorer verdicts → per-dimension precision, recall, F1
 </a:t>
             </a:r>
-            <a:pPr indent="0" marL="0">
-              <a:buNone/>
-            </a:pPr>
             <a:r>
               <a:rPr lang="en-US" sz="1050" i="1" dirty="0">
                 <a:solidFill>
@@ -4599,7 +4546,7 @@
           <a:bodyPr wrap="square" lIns="2032" tIns="2032" rIns="2032" bIns="2032" rtlCol="0" anchor="ctr"/>
           <a:lstStyle/>
           <a:p>
-            <a:pPr indent="0" marL="0">
+            <a:pPr marL="0" indent="0">
               <a:buNone/>
             </a:pPr>
             <a:r>
@@ -4614,9 +4561,6 @@
               <a:t>Scorer-LLM selection
 </a:t>
             </a:r>
-            <a:pPr indent="0" marL="0">
-              <a:buNone/>
-            </a:pPr>
             <a:r>
               <a:rPr lang="en-US" sz="1200" dirty="0">
                 <a:solidFill>
@@ -4629,9 +4573,6 @@
               <a:t>Run candidate models on LegalBench privacy tasks + our labelled sample; pick on F1 per dollar
 </a:t>
             </a:r>
-            <a:pPr indent="0" marL="0">
-              <a:buNone/>
-            </a:pPr>
             <a:r>
               <a:rPr lang="en-US" sz="1050" i="1" dirty="0">
                 <a:solidFill>
@@ -4672,7 +4613,7 @@
           <a:bodyPr wrap="square" lIns="2032" tIns="2032" rIns="2032" bIns="2032" rtlCol="0" anchor="ctr"/>
           <a:lstStyle/>
           <a:p>
-            <a:pPr indent="0" marL="0">
+            <a:pPr marL="0" indent="0">
               <a:buNone/>
             </a:pPr>
             <a:r>
@@ -4687,9 +4628,6 @@
               <a:t>Detection-rule validation
 </a:t>
             </a:r>
-            <a:pPr indent="0" marL="0">
-              <a:buNone/>
-            </a:pPr>
             <a:r>
               <a:rPr lang="en-US" sz="1200" dirty="0">
                 <a:solidFill>
@@ -4702,9 +4640,6 @@
               <a:t>Extractor verdicts vs published baselines (49% pre-consent rate, news-sector worst) on a small crawl
 </a:t>
             </a:r>
-            <a:pPr indent="0" marL="0">
-              <a:buNone/>
-            </a:pPr>
             <a:r>
               <a:rPr lang="en-US" sz="1050" i="1" dirty="0">
                 <a:solidFill>
@@ -4745,7 +4680,7 @@
           <a:bodyPr wrap="square" lIns="2032" tIns="2032" rIns="2032" bIns="2032" rtlCol="0" anchor="ctr"/>
           <a:lstStyle/>
           <a:p>
-            <a:pPr indent="0" marL="0">
+            <a:pPr marL="0" indent="0">
               <a:buNone/>
             </a:pPr>
             <a:r>
@@ -4760,9 +4695,6 @@
               <a:t>Reproducibility
 </a:t>
             </a:r>
-            <a:pPr indent="0" marL="0">
-              <a:buNone/>
-            </a:pPr>
             <a:r>
               <a:rPr lang="en-US" sz="1200" dirty="0">
                 <a:solidFill>
@@ -4775,9 +4707,6 @@
               <a:t>temperature 0 + pinned tracker lists + versioned prompts; repeat-run variance reported
 </a:t>
             </a:r>
-            <a:pPr indent="0" marL="0">
-              <a:buNone/>
-            </a:pPr>
             <a:r>
               <a:rPr lang="en-US" sz="1050" i="1" dirty="0">
                 <a:solidFill>
@@ -4814,7 +4743,7 @@
           <a:bodyPr wrap="square" lIns="0" tIns="0" rIns="0" bIns="0" rtlCol="0" anchor="ctr"/>
           <a:lstStyle/>
           <a:p>
-            <a:pPr algn="ctr" indent="0" marL="0">
+            <a:pPr marL="0" indent="0" algn="ctr">
               <a:buNone/>
             </a:pPr>
             <a:r>
@@ -4826,7 +4755,7 @@
                 <a:ea typeface="Calibri" pitchFamily="34" charset="-122"/>
                 <a:cs typeface="Calibri" pitchFamily="34" charset="-120"/>
               </a:rPr>
-              <a:t>Already banked for the paper: the legal-BERT retrieval failure, the over-condemnation fix, and the anchored-retrieval fix — three documented empirical findings.</a:t>
+              <a:t>Already banked for the paper: the legal-BERT retrieval failure, the over-condemnation fix, and the anchored-retrieval fix - three documented empirical findings.</a:t>
             </a:r>
             <a:endParaRPr lang="en-US" sz="1250" dirty="0"/>
           </a:p>
@@ -4853,7 +4782,7 @@
           <a:bodyPr wrap="square" lIns="0" tIns="0" rIns="0" bIns="0" rtlCol="0" anchor="ctr"/>
           <a:lstStyle/>
           <a:p>
-            <a:pPr algn="r" indent="0" marL="0">
+            <a:pPr marL="0" indent="0" algn="r">
               <a:buNone/>
             </a:pPr>
             <a:r>
@@ -4865,7 +4794,7 @@
                 <a:ea typeface="Calibri" pitchFamily="34" charset="-122"/>
                 <a:cs typeface="Calibri" pitchFamily="34" charset="-120"/>
               </a:rPr>
-              <a:t>comp_square · primary research update — 12</a:t>
+              <a:t>comp_square · primary research update - 12</a:t>
             </a:r>
             <a:endParaRPr lang="en-US" sz="900" dirty="0"/>
           </a:p>
@@ -4887,6 +4816,7 @@
         <a:solidFill>
           <a:srgbClr val="FFFFFF"/>
         </a:solidFill>
+        <a:effectLst/>
       </p:bgPr>
     </p:bg>
     <p:spTree>
@@ -4924,7 +4854,7 @@
           <a:bodyPr wrap="square" lIns="0" tIns="0" rIns="0" bIns="0" rtlCol="0" anchor="ctr"/>
           <a:lstStyle/>
           <a:p>
-            <a:pPr indent="0" marL="0">
+            <a:pPr marL="0" indent="0">
               <a:buNone/>
             </a:pPr>
             <a:r>
@@ -4963,7 +4893,7 @@
           <a:bodyPr wrap="square" lIns="0" tIns="0" rIns="0" bIns="0" rtlCol="0" anchor="ctr"/>
           <a:lstStyle/>
           <a:p>
-            <a:pPr indent="0" marL="0">
+            <a:pPr marL="0" indent="0">
               <a:buNone/>
             </a:pPr>
             <a:r>
@@ -5004,7 +4934,7 @@
           <a:bodyPr wrap="square" lIns="0" tIns="0" rIns="0" bIns="0" rtlCol="0" anchor="ctr"/>
           <a:lstStyle/>
           <a:p>
-            <a:pPr algn="ctr" indent="0" marL="0">
+            <a:pPr marL="0" indent="0" algn="ctr">
               <a:buNone/>
             </a:pPr>
             <a:r>
@@ -5047,7 +4977,7 @@
           <a:bodyPr wrap="square" lIns="1778" tIns="1778" rIns="1778" bIns="1778" rtlCol="0" anchor="ctr"/>
           <a:lstStyle/>
           <a:p>
-            <a:pPr indent="0" marL="0">
+            <a:pPr marL="0" indent="0">
               <a:buNone/>
             </a:pPr>
             <a:r>
@@ -5059,7 +4989,7 @@
                 <a:ea typeface="Calibri" pitchFamily="34" charset="-122"/>
                 <a:cs typeface="Calibri" pitchFamily="34" charset="-120"/>
               </a:rPr>
-              <a:t>Consent-banner interaction — accept / reject / no-interaction protocol (EasyList Cookie + z-index heuristics from alsacnc); enables the strongest test: tracking AFTER explicit rejection (65.4% of sites fail it)</a:t>
+              <a:t>Consent-banner interaction - accept / reject / no-interaction protocol (EasyList Cookie + z-index heuristics from alsacnc); enables the strongest test: tracking AFTER explicit rejection (65.4% of sites fail it)</a:t>
             </a:r>
             <a:endParaRPr lang="en-US" sz="1200" dirty="0"/>
           </a:p>
@@ -5086,7 +5016,7 @@
           <a:bodyPr wrap="square" lIns="0" tIns="0" rIns="0" bIns="0" rtlCol="0" anchor="ctr"/>
           <a:lstStyle/>
           <a:p>
-            <a:pPr indent="0" marL="0">
+            <a:pPr marL="0" indent="0">
               <a:buNone/>
             </a:pPr>
             <a:r>
@@ -5127,7 +5057,7 @@
           <a:bodyPr wrap="square" lIns="0" tIns="0" rIns="0" bIns="0" rtlCol="0" anchor="ctr"/>
           <a:lstStyle/>
           <a:p>
-            <a:pPr algn="ctr" indent="0" marL="0">
+            <a:pPr marL="0" indent="0" algn="ctr">
               <a:buNone/>
             </a:pPr>
             <a:r>
@@ -5170,11 +5100,11 @@
           <a:bodyPr wrap="square" lIns="1778" tIns="1778" rIns="1778" bIns="1778" rtlCol="0" anchor="ctr"/>
           <a:lstStyle/>
           <a:p>
-            <a:pPr indent="0" marL="0">
+            <a:pPr marL="0" indent="0">
               <a:buNone/>
             </a:pPr>
             <a:r>
-              <a:rPr lang="en-US" sz="1200" dirty="0">
+              <a:rPr lang="en-US" sz="1200" dirty="0" err="1">
                 <a:solidFill>
                   <a:srgbClr val="1A1A2E"/>
                 </a:solidFill>
@@ -5182,7 +5112,18 @@
                 <a:ea typeface="Calibri" pitchFamily="34" charset="-122"/>
                 <a:cs typeface="Calibri" pitchFamily="34" charset="-120"/>
               </a:rPr>
-              <a:t>report_builder.py — executive-summary prose over the JSON (larger model), HTML/PDF render</a:t>
+              <a:t>report_builder.py</a:t>
+            </a:r>
+            <a:r>
+              <a:rPr lang="en-US" sz="1200" dirty="0">
+                <a:solidFill>
+                  <a:srgbClr val="1A1A2E"/>
+                </a:solidFill>
+                <a:latin typeface="Calibri" pitchFamily="34" charset="0"/>
+                <a:ea typeface="Calibri" pitchFamily="34" charset="-122"/>
+                <a:cs typeface="Calibri" pitchFamily="34" charset="-120"/>
+              </a:rPr>
+              <a:t> - executive-summary prose over the JSON (larger model), HTML/PDF render</a:t>
             </a:r>
             <a:endParaRPr lang="en-US" sz="1200" dirty="0"/>
           </a:p>
@@ -5209,7 +5150,7 @@
           <a:bodyPr wrap="square" lIns="0" tIns="0" rIns="0" bIns="0" rtlCol="0" anchor="ctr"/>
           <a:lstStyle/>
           <a:p>
-            <a:pPr indent="0" marL="0">
+            <a:pPr marL="0" indent="0">
               <a:buNone/>
             </a:pPr>
             <a:r>
@@ -5250,7 +5191,7 @@
           <a:bodyPr wrap="square" lIns="0" tIns="0" rIns="0" bIns="0" rtlCol="0" anchor="ctr"/>
           <a:lstStyle/>
           <a:p>
-            <a:pPr algn="ctr" indent="0" marL="0">
+            <a:pPr marL="0" indent="0" algn="ctr">
               <a:buNone/>
             </a:pPr>
             <a:r>
@@ -5293,7 +5234,7 @@
           <a:bodyPr wrap="square" lIns="1778" tIns="1778" rIns="1778" bIns="1778" rtlCol="0" anchor="ctr"/>
           <a:lstStyle/>
           <a:p>
-            <a:pPr indent="0" marL="0">
+            <a:pPr marL="0" indent="0">
               <a:buNone/>
             </a:pPr>
             <a:r>
@@ -5332,7 +5273,7 @@
           <a:bodyPr wrap="square" lIns="0" tIns="0" rIns="0" bIns="0" rtlCol="0" anchor="ctr"/>
           <a:lstStyle/>
           <a:p>
-            <a:pPr indent="0" marL="0">
+            <a:pPr marL="0" indent="0">
               <a:buNone/>
             </a:pPr>
             <a:r>
@@ -5373,7 +5314,7 @@
           <a:bodyPr wrap="square" lIns="0" tIns="0" rIns="0" bIns="0" rtlCol="0" anchor="ctr"/>
           <a:lstStyle/>
           <a:p>
-            <a:pPr algn="ctr" indent="0" marL="0">
+            <a:pPr marL="0" indent="0" algn="ctr">
               <a:buNone/>
             </a:pPr>
             <a:r>
@@ -5416,7 +5357,7 @@
           <a:bodyPr wrap="square" lIns="1778" tIns="1778" rIns="1778" bIns="1778" rtlCol="0" anchor="ctr"/>
           <a:lstStyle/>
           <a:p>
-            <a:pPr indent="0" marL="0">
+            <a:pPr marL="0" indent="0">
               <a:buNone/>
             </a:pPr>
             <a:r>
@@ -5428,7 +5369,7 @@
                 <a:ea typeface="Calibri" pitchFamily="34" charset="-122"/>
                 <a:cs typeface="Calibri" pitchFamily="34" charset="-120"/>
               </a:rPr>
-              <a:t>Post-login observation — second capture pass after authentication: what is collected once logged in vs what was consented to. No reviewed paper does this for the web — novel contribution, scoped as extension</a:t>
+              <a:t>Post-login observation - second capture pass after authentication: what is collected once logged in vs what was consented to. No reviewed paper does this for the web - novel contribution, scoped as extension</a:t>
             </a:r>
             <a:endParaRPr lang="en-US" sz="1200" dirty="0"/>
           </a:p>
@@ -5455,7 +5396,7 @@
           <a:bodyPr wrap="square" lIns="0" tIns="0" rIns="0" bIns="0" rtlCol="0" anchor="ctr"/>
           <a:lstStyle/>
           <a:p>
-            <a:pPr indent="0" marL="0">
+            <a:pPr marL="0" indent="0">
               <a:buNone/>
             </a:pPr>
             <a:r>
@@ -5494,7 +5435,7 @@
           <a:bodyPr wrap="square" lIns="0" tIns="0" rIns="0" bIns="0" rtlCol="0" anchor="ctr"/>
           <a:lstStyle/>
           <a:p>
-            <a:pPr algn="r" indent="0" marL="0">
+            <a:pPr marL="0" indent="0" algn="r">
               <a:buNone/>
             </a:pPr>
             <a:r>
@@ -5506,7 +5447,7 @@
                 <a:ea typeface="Calibri" pitchFamily="34" charset="-122"/>
                 <a:cs typeface="Calibri" pitchFamily="34" charset="-120"/>
               </a:rPr>
-              <a:t>comp_square · primary research update — 13</a:t>
+              <a:t>comp_square · primary research update - 13</a:t>
             </a:r>
             <a:endParaRPr lang="en-US" sz="900" dirty="0"/>
           </a:p>
@@ -5528,6 +5469,7 @@
         <a:solidFill>
           <a:srgbClr val="1E2761"/>
         </a:solidFill>
+        <a:effectLst/>
       </p:bgPr>
     </p:bg>
     <p:spTree>
@@ -5565,7 +5507,7 @@
           <a:bodyPr wrap="square" lIns="0" tIns="0" rIns="0" bIns="0" rtlCol="0" anchor="ctr"/>
           <a:lstStyle/>
           <a:p>
-            <a:pPr indent="0" marL="0">
+            <a:pPr marL="0" indent="0">
               <a:buNone/>
             </a:pPr>
             <a:r>
@@ -5606,7 +5548,7 @@
           <a:bodyPr wrap="square" lIns="0" tIns="0" rIns="0" bIns="0" rtlCol="0" anchor="ctr"/>
           <a:lstStyle/>
           <a:p>
-            <a:pPr algn="ctr" indent="0" marL="0">
+            <a:pPr marL="0" indent="0" algn="ctr">
               <a:buNone/>
             </a:pPr>
             <a:r>
@@ -5645,7 +5587,7 @@
           <a:bodyPr wrap="square" lIns="0" tIns="0" rIns="0" bIns="0" rtlCol="0" anchor="ctr"/>
           <a:lstStyle/>
           <a:p>
-            <a:pPr indent="0" marL="0">
+            <a:pPr marL="0" indent="0">
               <a:buNone/>
             </a:pPr>
             <a:r>
@@ -5657,7 +5599,7 @@
                 <a:ea typeface="Calibri" pitchFamily="34" charset="-122"/>
                 <a:cs typeface="Calibri" pitchFamily="34" charset="-120"/>
               </a:rPr>
-              <a:t>The pipeline exists and produced a real, article-cited compliance report — the gap identified in the literature review is now a running system</a:t>
+              <a:t>The pipeline exists and produced a real, article-cited compliance report - the gap identified in the literature review is now a running system</a:t>
             </a:r>
             <a:endParaRPr lang="en-US" sz="1500" dirty="0"/>
           </a:p>
@@ -5686,7 +5628,7 @@
           <a:bodyPr wrap="square" lIns="0" tIns="0" rIns="0" bIns="0" rtlCol="0" anchor="ctr"/>
           <a:lstStyle/>
           <a:p>
-            <a:pPr algn="ctr" indent="0" marL="0">
+            <a:pPr marL="0" indent="0" algn="ctr">
               <a:buNone/>
             </a:pPr>
             <a:r>
@@ -5725,7 +5667,7 @@
           <a:bodyPr wrap="square" lIns="0" tIns="0" rIns="0" bIns="0" rtlCol="0" anchor="ctr"/>
           <a:lstStyle/>
           <a:p>
-            <a:pPr indent="0" marL="0">
+            <a:pPr marL="0" indent="0">
               <a:buNone/>
             </a:pPr>
             <a:r>
@@ -5766,7 +5708,7 @@
           <a:bodyPr wrap="square" lIns="0" tIns="0" rIns="0" bIns="0" rtlCol="0" anchor="ctr"/>
           <a:lstStyle/>
           <a:p>
-            <a:pPr algn="ctr" indent="0" marL="0">
+            <a:pPr marL="0" indent="0" algn="ctr">
               <a:buNone/>
             </a:pPr>
             <a:r>
@@ -5805,7 +5747,7 @@
           <a:bodyPr wrap="square" lIns="0" tIns="0" rIns="0" bIns="0" rtlCol="0" anchor="ctr"/>
           <a:lstStyle/>
           <a:p>
-            <a:pPr indent="0" marL="0">
+            <a:pPr marL="0" indent="0">
               <a:buNone/>
             </a:pPr>
             <a:r>
@@ -5817,7 +5759,7 @@
                 <a:ea typeface="Calibri" pitchFamily="34" charset="-122"/>
                 <a:cs typeface="Calibri" pitchFamily="34" charset="-120"/>
               </a:rPr>
-              <a:t>Two failures were found by testing, diagnosed to the correct layer, fixed and re-verified — the evaluation methodology is already producing findings</a:t>
+              <a:t>Two failures were found by testing, diagnosed to the correct layer, fixed and re-verified - the evaluation methodology is already producing findings</a:t>
             </a:r>
             <a:endParaRPr lang="en-US" sz="1500" dirty="0"/>
           </a:p>
@@ -5848,7 +5790,7 @@
           <a:bodyPr wrap="square" lIns="1905" tIns="1905" rIns="1905" bIns="1905" rtlCol="0" anchor="ctr"/>
           <a:lstStyle/>
           <a:p>
-            <a:pPr indent="0" marL="0">
+            <a:pPr marL="0" indent="0">
               <a:buNone/>
             </a:pPr>
             <a:r>
@@ -5882,6 +5824,7 @@
         <a:solidFill>
           <a:srgbClr val="FFFFFF"/>
         </a:solidFill>
+        <a:effectLst/>
       </p:bgPr>
     </p:bg>
     <p:spTree>
@@ -5919,7 +5862,7 @@
           <a:bodyPr wrap="square" lIns="0" tIns="0" rIns="0" bIns="0" rtlCol="0" anchor="ctr"/>
           <a:lstStyle/>
           <a:p>
-            <a:pPr indent="0" marL="0">
+            <a:pPr marL="0" indent="0">
               <a:buNone/>
             </a:pPr>
             <a:r>
@@ -5958,7 +5901,7 @@
           <a:bodyPr wrap="square" lIns="0" tIns="0" rIns="0" bIns="0" rtlCol="0" anchor="ctr"/>
           <a:lstStyle/>
           <a:p>
-            <a:pPr indent="0" marL="0">
+            <a:pPr marL="0" indent="0">
               <a:buNone/>
             </a:pPr>
             <a:r>
@@ -5997,7 +5940,7 @@
           <a:bodyPr wrap="square" lIns="0" tIns="0" rIns="0" bIns="0" rtlCol="0" anchor="ctr"/>
           <a:lstStyle/>
           <a:p>
-            <a:pPr algn="ctr" indent="0" marL="0">
+            <a:pPr marL="0" indent="0" algn="ctr">
               <a:buNone/>
             </a:pPr>
             <a:r>
@@ -6036,7 +5979,7 @@
           <a:bodyPr wrap="square" lIns="0" tIns="0" rIns="0" bIns="0" rtlCol="0" anchor="ctr"/>
           <a:lstStyle/>
           <a:p>
-            <a:pPr algn="ctr" indent="0" marL="0">
+            <a:pPr marL="0" indent="0" algn="ctr">
               <a:buNone/>
             </a:pPr>
             <a:r>
@@ -6079,7 +6022,7 @@
           <a:bodyPr wrap="square" lIns="1524" tIns="1524" rIns="1524" bIns="1524" rtlCol="0" anchor="ctr"/>
           <a:lstStyle/>
           <a:p>
-            <a:pPr algn="ctr" indent="0" marL="0">
+            <a:pPr marL="0" indent="0" algn="ctr">
               <a:buNone/>
             </a:pPr>
             <a:r>
@@ -6091,7 +6034,7 @@
                 <a:ea typeface="Calibri" pitchFamily="34" charset="-122"/>
                 <a:cs typeface="Calibri" pitchFamily="34" charset="-120"/>
               </a:rPr>
-              <a:t>LLM legal reasoning exists — on clean, isolated text only (LegalBench, Xie)</a:t>
+              <a:t>LLM legal reasoning exists - on clean, isolated text only (LegalBench, Xie)</a:t>
             </a:r>
             <a:endParaRPr lang="en-US" sz="1200" dirty="0"/>
           </a:p>
@@ -6118,7 +6061,7 @@
           <a:bodyPr wrap="square" lIns="0" tIns="0" rIns="0" bIns="0" rtlCol="0" anchor="ctr"/>
           <a:lstStyle/>
           <a:p>
-            <a:pPr algn="ctr" indent="0" marL="0">
+            <a:pPr marL="0" indent="0" algn="ctr">
               <a:buNone/>
             </a:pPr>
             <a:r>
@@ -6157,7 +6100,7 @@
           <a:bodyPr wrap="square" lIns="0" tIns="0" rIns="0" bIns="0" rtlCol="0" anchor="ctr"/>
           <a:lstStyle/>
           <a:p>
-            <a:pPr algn="ctr" indent="0" marL="0">
+            <a:pPr marL="0" indent="0" algn="ctr">
               <a:buNone/>
             </a:pPr>
             <a:r>
@@ -6200,7 +6143,7 @@
           <a:bodyPr wrap="square" lIns="1524" tIns="1524" rIns="1524" bIns="1524" rtlCol="0" anchor="ctr"/>
           <a:lstStyle/>
           <a:p>
-            <a:pPr algn="ctr" indent="0" marL="0">
+            <a:pPr marL="0" indent="0" algn="ctr">
               <a:buNone/>
             </a:pPr>
             <a:r>
@@ -6212,7 +6155,7 @@
                 <a:ea typeface="Calibri" pitchFamily="34" charset="-122"/>
                 <a:cs typeface="Calibri" pitchFamily="34" charset="-120"/>
               </a:rPr>
-              <a:t>NLP policy analysis exists — cannot verify actual behaviour (OPP-115, Polisis, PrivacyQA)</a:t>
+              <a:t>NLP policy analysis exists - cannot verify actual behaviour (OPP-115, Polisis, PrivacyQA)</a:t>
             </a:r>
             <a:endParaRPr lang="en-US" sz="1200" dirty="0"/>
           </a:p>
@@ -6239,7 +6182,7 @@
           <a:bodyPr wrap="square" lIns="0" tIns="0" rIns="0" bIns="0" rtlCol="0" anchor="ctr"/>
           <a:lstStyle/>
           <a:p>
-            <a:pPr algn="ctr" indent="0" marL="0">
+            <a:pPr marL="0" indent="0" algn="ctr">
               <a:buNone/>
             </a:pPr>
             <a:r>
@@ -6278,7 +6221,7 @@
           <a:bodyPr wrap="square" lIns="0" tIns="0" rIns="0" bIns="0" rtlCol="0" anchor="ctr"/>
           <a:lstStyle/>
           <a:p>
-            <a:pPr algn="ctr" indent="0" marL="0">
+            <a:pPr marL="0" indent="0" algn="ctr">
               <a:buNone/>
             </a:pPr>
             <a:r>
@@ -6321,7 +6264,7 @@
           <a:bodyPr wrap="square" lIns="1524" tIns="1524" rIns="1524" bIns="1524" rtlCol="0" anchor="ctr"/>
           <a:lstStyle/>
           <a:p>
-            <a:pPr algn="ctr" indent="0" marL="0">
+            <a:pPr marL="0" indent="0" algn="ctr">
               <a:buNone/>
             </a:pPr>
             <a:r>
@@ -6333,7 +6276,29 @@
                 <a:ea typeface="Calibri" pitchFamily="34" charset="-122"/>
                 <a:cs typeface="Calibri" pitchFamily="34" charset="-120"/>
               </a:rPr>
-              <a:t>web audits measure behaviour — never reconcile it with the policy (Trevisan, Bouhoula)</a:t>
+              <a:t>web audits measure </a:t>
+            </a:r>
+            <a:r>
+              <a:rPr lang="en-US" sz="1200" dirty="0" err="1">
+                <a:solidFill>
+                  <a:srgbClr val="1A1A2E"/>
+                </a:solidFill>
+                <a:latin typeface="Calibri" pitchFamily="34" charset="0"/>
+                <a:ea typeface="Calibri" pitchFamily="34" charset="-122"/>
+                <a:cs typeface="Calibri" pitchFamily="34" charset="-120"/>
+              </a:rPr>
+              <a:t>behaviour</a:t>
+            </a:r>
+            <a:r>
+              <a:rPr lang="en-US" sz="1200" dirty="0">
+                <a:solidFill>
+                  <a:srgbClr val="1A1A2E"/>
+                </a:solidFill>
+                <a:latin typeface="Calibri" pitchFamily="34" charset="0"/>
+                <a:ea typeface="Calibri" pitchFamily="34" charset="-122"/>
+                <a:cs typeface="Calibri" pitchFamily="34" charset="-120"/>
+              </a:rPr>
+              <a:t> - never reconcile it with the policy (Trevisan, Bouhoula)</a:t>
             </a:r>
             <a:endParaRPr lang="en-US" sz="1200" dirty="0"/>
           </a:p>
@@ -6361,6 +6326,13 @@
             <a:prstDash val="solid"/>
           </a:ln>
         </p:spPr>
+        <p:txBody>
+          <a:bodyPr/>
+          <a:lstStyle/>
+          <a:p>
+            <a:endParaRPr lang="en-US"/>
+          </a:p>
+        </p:txBody>
       </p:sp>
       <p:sp>
         <p:nvSpPr>
@@ -6384,6 +6356,13 @@
             <a:prstDash val="solid"/>
           </a:ln>
         </p:spPr>
+        <p:txBody>
+          <a:bodyPr/>
+          <a:lstStyle/>
+          <a:p>
+            <a:endParaRPr lang="en-US"/>
+          </a:p>
+        </p:txBody>
       </p:sp>
       <p:sp>
         <p:nvSpPr>
@@ -6410,7 +6389,7 @@
           <a:bodyPr wrap="square" lIns="1905" tIns="1905" rIns="1905" bIns="1905" rtlCol="0" anchor="ctr"/>
           <a:lstStyle/>
           <a:p>
-            <a:pPr algn="ctr" indent="0" marL="0">
+            <a:pPr marL="0" indent="0" algn="ctr">
               <a:buNone/>
             </a:pPr>
             <a:r>
@@ -6422,7 +6401,7 @@
                 <a:ea typeface="Calibri" pitchFamily="34" charset="-122"/>
                 <a:cs typeface="Calibri" pitchFamily="34" charset="-120"/>
               </a:rPr>
-              <a:t>comp_square: a RAG pipeline that retrieves the legal standard, reads the scraped policy in full, and injects runtime HAR/JS telemetry — so the LLM judges all three together, per compliance dimension.</a:t>
+              <a:t>comp_square: a RAG pipeline that retrieves the legal standard, reads the scraped policy in full, and injects runtime HAR/JS telemetry - so the LLM judges all three together, per compliance dimension.</a:t>
             </a:r>
             <a:endParaRPr lang="en-US" sz="1500" dirty="0"/>
           </a:p>
@@ -6449,7 +6428,7 @@
           <a:bodyPr wrap="square" lIns="0" tIns="0" rIns="0" bIns="0" rtlCol="0" anchor="ctr"/>
           <a:lstStyle/>
           <a:p>
-            <a:pPr algn="ctr" indent="0" marL="0">
+            <a:pPr marL="0" indent="0" algn="ctr">
               <a:buNone/>
             </a:pPr>
             <a:r>
@@ -6461,7 +6440,7 @@
                 <a:ea typeface="Calibri" pitchFamily="34" charset="-122"/>
                 <a:cs typeface="Calibri" pitchFamily="34" charset="-120"/>
               </a:rPr>
-              <a:t>Hybrid notice-vs-practice systems exist only for mobile app binaries via static analysis (Zimmeck, MAPS, Lalaine) — the dynamic web is unaddressed.</a:t>
+              <a:t>Hybrid notice-vs-practice systems exist only for mobile app binaries via static analysis (Zimmeck, MAPS, Lalaine) - the dynamic web is unaddressed.</a:t>
             </a:r>
             <a:endParaRPr lang="en-US" sz="1300" dirty="0"/>
           </a:p>
@@ -6488,7 +6467,7 @@
           <a:bodyPr wrap="square" lIns="0" tIns="0" rIns="0" bIns="0" rtlCol="0" anchor="ctr"/>
           <a:lstStyle/>
           <a:p>
-            <a:pPr algn="r" indent="0" marL="0">
+            <a:pPr marL="0" indent="0" algn="r">
               <a:buNone/>
             </a:pPr>
             <a:r>
@@ -6500,7 +6479,7 @@
                 <a:ea typeface="Calibri" pitchFamily="34" charset="-122"/>
                 <a:cs typeface="Calibri" pitchFamily="34" charset="-120"/>
               </a:rPr>
-              <a:t>comp_square · primary research update — 2</a:t>
+              <a:t>comp_square · primary research update - 2</a:t>
             </a:r>
             <a:endParaRPr lang="en-US" sz="900" dirty="0"/>
           </a:p>
@@ -6522,6 +6501,7 @@
         <a:solidFill>
           <a:srgbClr val="FFFFFF"/>
         </a:solidFill>
+        <a:effectLst/>
       </p:bgPr>
     </p:bg>
     <p:spTree>
@@ -6559,7 +6539,7 @@
           <a:bodyPr wrap="square" lIns="0" tIns="0" rIns="0" bIns="0" rtlCol="0" anchor="ctr"/>
           <a:lstStyle/>
           <a:p>
-            <a:pPr indent="0" marL="0">
+            <a:pPr marL="0" indent="0">
               <a:buNone/>
             </a:pPr>
             <a:r>
@@ -6571,7 +6551,7 @@
                 <a:ea typeface="Cambria" pitchFamily="34" charset="-122"/>
                 <a:cs typeface="Cambria" pitchFamily="34" charset="-120"/>
               </a:rPr>
-              <a:t>What each paper contributes — I: policy text &amp; mobile hybrid</a:t>
+              <a:t>What each paper contributes - I: policy text &amp; mobile hybrid</a:t>
             </a:r>
             <a:endParaRPr lang="en-US" sz="3000" dirty="0"/>
           </a:p>
@@ -6598,7 +6578,7 @@
           <a:bodyPr wrap="square" lIns="0" tIns="0" rIns="0" bIns="0" rtlCol="0" anchor="ctr"/>
           <a:lstStyle/>
           <a:p>
-            <a:pPr indent="0" marL="0">
+            <a:pPr marL="0" indent="0">
               <a:buNone/>
             </a:pPr>
             <a:r>
@@ -6632,17 +6612,41 @@
         </p:nvGraphicFramePr>
         <p:xfrm>
           <a:off x="548640" y="1417320"/>
-          <a:ext cx="11091672" cy="914400"/>
+          <a:ext cx="11091672" cy="3950208"/>
         </p:xfrm>
         <a:graphic>
           <a:graphicData uri="http://schemas.openxmlformats.org/drawingml/2006/table">
             <a:tbl>
               <a:tblPr/>
               <a:tblGrid>
-                <a:gridCol w="2286000"/>
-                <a:gridCol w="3108960"/>
-                <a:gridCol w="2011680"/>
-                <a:gridCol w="3685032"/>
+                <a:gridCol w="2286000">
+                  <a:extLst>
+                    <a:ext uri="{9D8B030D-6E8A-4147-A177-3AD203B41FA5}">
+                      <a16:colId xmlns:a16="http://schemas.microsoft.com/office/drawing/2014/main" val="20000"/>
+                    </a:ext>
+                  </a:extLst>
+                </a:gridCol>
+                <a:gridCol w="3108960">
+                  <a:extLst>
+                    <a:ext uri="{9D8B030D-6E8A-4147-A177-3AD203B41FA5}">
+                      <a16:colId xmlns:a16="http://schemas.microsoft.com/office/drawing/2014/main" val="20001"/>
+                    </a:ext>
+                  </a:extLst>
+                </a:gridCol>
+                <a:gridCol w="2011680">
+                  <a:extLst>
+                    <a:ext uri="{9D8B030D-6E8A-4147-A177-3AD203B41FA5}">
+                      <a16:colId xmlns:a16="http://schemas.microsoft.com/office/drawing/2014/main" val="20002"/>
+                    </a:ext>
+                  </a:extLst>
+                </a:gridCol>
+                <a:gridCol w="3685032">
+                  <a:extLst>
+                    <a:ext uri="{9D8B030D-6E8A-4147-A177-3AD203B41FA5}">
+                      <a16:colId xmlns:a16="http://schemas.microsoft.com/office/drawing/2014/main" val="20003"/>
+                    </a:ext>
+                  </a:extLst>
+                </a:gridCol>
               </a:tblGrid>
               <a:tr h="658368">
                 <a:tc>
@@ -6650,7 +6654,7 @@
                     <a:bodyPr/>
                     <a:lstStyle/>
                     <a:p>
-                      <a:pPr indent="0" marL="0">
+                      <a:pPr marL="0" indent="0">
                         <a:buNone/>
                       </a:pPr>
                       <a:r>
@@ -6671,7 +6675,7 @@
                       </a:endParaRPr>
                     </a:p>
                   </a:txBody>
-                  <a:tcPr marL="91440" marR="91440" marT="45720" marB="45720" anchor="ctr">
+                  <a:tcPr anchor="ctr">
                     <a:lnL w="6350" cap="flat" cmpd="sng" algn="ctr">
                       <a:solidFill>
                         <a:srgbClr val="D8DEEA"/>
@@ -6718,7 +6722,7 @@
                     <a:bodyPr/>
                     <a:lstStyle/>
                     <a:p>
-                      <a:pPr indent="0" marL="0">
+                      <a:pPr marL="0" indent="0">
                         <a:buNone/>
                       </a:pPr>
                       <a:r>
@@ -6739,7 +6743,7 @@
                       </a:endParaRPr>
                     </a:p>
                   </a:txBody>
-                  <a:tcPr marL="91440" marR="91440" marT="45720" marB="45720" anchor="ctr">
+                  <a:tcPr anchor="ctr">
                     <a:lnL w="6350" cap="flat" cmpd="sng" algn="ctr">
                       <a:solidFill>
                         <a:srgbClr val="D8DEEA"/>
@@ -6786,7 +6790,7 @@
                     <a:bodyPr/>
                     <a:lstStyle/>
                     <a:p>
-                      <a:pPr indent="0" marL="0">
+                      <a:pPr marL="0" indent="0">
                         <a:buNone/>
                       </a:pPr>
                       <a:r>
@@ -6807,7 +6811,7 @@
                       </a:endParaRPr>
                     </a:p>
                   </a:txBody>
-                  <a:tcPr marL="91440" marR="91440" marT="45720" marB="45720" anchor="ctr">
+                  <a:tcPr anchor="ctr">
                     <a:lnL w="6350" cap="flat" cmpd="sng" algn="ctr">
                       <a:solidFill>
                         <a:srgbClr val="D8DEEA"/>
@@ -6854,7 +6858,7 @@
                     <a:bodyPr/>
                     <a:lstStyle/>
                     <a:p>
-                      <a:pPr indent="0" marL="0">
+                      <a:pPr marL="0" indent="0">
                         <a:buNone/>
                       </a:pPr>
                       <a:r>
@@ -6875,7 +6879,7 @@
                       </a:endParaRPr>
                     </a:p>
                   </a:txBody>
-                  <a:tcPr marL="91440" marR="91440" marT="45720" marB="45720" anchor="ctr">
+                  <a:tcPr anchor="ctr">
                     <a:lnL w="6350" cap="flat" cmpd="sng" algn="ctr">
                       <a:solidFill>
                         <a:srgbClr val="D8DEEA"/>
@@ -6917,6 +6921,11 @@
                     </a:solidFill>
                   </a:tcPr>
                 </a:tc>
+                <a:extLst>
+                  <a:ext uri="{0D108BD9-81ED-4DB2-BD59-A6C34878D82A}">
+                    <a16:rowId xmlns:a16="http://schemas.microsoft.com/office/drawing/2014/main" val="10000"/>
+                  </a:ext>
+                </a:extLst>
               </a:tr>
               <a:tr h="658368">
                 <a:tc>
@@ -6924,7 +6933,7 @@
                     <a:bodyPr/>
                     <a:lstStyle/>
                     <a:p>
-                      <a:pPr indent="0" marL="0">
+                      <a:pPr marL="0" indent="0">
                         <a:buNone/>
                       </a:pPr>
                       <a:r>
@@ -6936,7 +6945,7 @@
                           <a:ea typeface="Calibri" pitchFamily="34" charset="-122"/>
                           <a:cs typeface="Calibri" pitchFamily="34" charset="-120"/>
                         </a:rPr>
-                        <a:t>Wilson '16 — OPP-115 (ACL)</a:t>
+                        <a:t>Wilson '16 - OPP-115 (ACL)</a:t>
                       </a:r>
                       <a:endParaRPr lang="en-US" sz="1050" dirty="0">
                         <a:latin typeface="Calibri" charset="0"/>
@@ -6945,7 +6954,7 @@
                       </a:endParaRPr>
                     </a:p>
                   </a:txBody>
-                  <a:tcPr marL="91440" marR="91440" marT="45720" marB="45720" anchor="ctr">
+                  <a:tcPr anchor="ctr">
                     <a:lnL w="6350" cap="flat" cmpd="sng" algn="ctr">
                       <a:solidFill>
                         <a:srgbClr val="D8DEEA"/>
@@ -6989,7 +6998,7 @@
                     <a:bodyPr/>
                     <a:lstStyle/>
                     <a:p>
-                      <a:pPr indent="0" marL="0">
+                      <a:pPr marL="0" indent="0">
                         <a:buNone/>
                       </a:pPr>
                       <a:r>
@@ -7010,7 +7019,7 @@
                       </a:endParaRPr>
                     </a:p>
                   </a:txBody>
-                  <a:tcPr marL="91440" marR="91440" marT="45720" marB="45720" anchor="ctr">
+                  <a:tcPr anchor="ctr">
                     <a:lnL w="6350" cap="flat" cmpd="sng" algn="ctr">
                       <a:solidFill>
                         <a:srgbClr val="D8DEEA"/>
@@ -7054,7 +7063,7 @@
                     <a:bodyPr/>
                     <a:lstStyle/>
                     <a:p>
-                      <a:pPr indent="0" marL="0">
+                      <a:pPr marL="0" indent="0">
                         <a:buNone/>
                       </a:pPr>
                       <a:r>
@@ -7075,7 +7084,7 @@
                       </a:endParaRPr>
                     </a:p>
                   </a:txBody>
-                  <a:tcPr marL="91440" marR="91440" marT="45720" marB="45720" anchor="ctr">
+                  <a:tcPr anchor="ctr">
                     <a:lnL w="6350" cap="flat" cmpd="sng" algn="ctr">
                       <a:solidFill>
                         <a:srgbClr val="D8DEEA"/>
@@ -7119,7 +7128,7 @@
                     <a:bodyPr/>
                     <a:lstStyle/>
                     <a:p>
-                      <a:pPr indent="0" marL="0">
+                      <a:pPr marL="0" indent="0">
                         <a:buNone/>
                       </a:pPr>
                       <a:r>
@@ -7140,7 +7149,7 @@
                       </a:endParaRPr>
                     </a:p>
                   </a:txBody>
-                  <a:tcPr marL="91440" marR="91440" marT="45720" marB="45720" anchor="ctr">
+                  <a:tcPr anchor="ctr">
                     <a:lnL w="6350" cap="flat" cmpd="sng" algn="ctr">
                       <a:solidFill>
                         <a:srgbClr val="D8DEEA"/>
@@ -7179,6 +7188,11 @@
                     </a:lnB>
                   </a:tcPr>
                 </a:tc>
+                <a:extLst>
+                  <a:ext uri="{0D108BD9-81ED-4DB2-BD59-A6C34878D82A}">
+                    <a16:rowId xmlns:a16="http://schemas.microsoft.com/office/drawing/2014/main" val="10001"/>
+                  </a:ext>
+                </a:extLst>
               </a:tr>
               <a:tr h="658368">
                 <a:tc>
@@ -7186,7 +7200,7 @@
                     <a:bodyPr/>
                     <a:lstStyle/>
                     <a:p>
-                      <a:pPr indent="0" marL="0">
+                      <a:pPr marL="0" indent="0">
                         <a:buNone/>
                       </a:pPr>
                       <a:r>
@@ -7198,7 +7212,7 @@
                           <a:ea typeface="Calibri" pitchFamily="34" charset="-122"/>
                           <a:cs typeface="Calibri" pitchFamily="34" charset="-120"/>
                         </a:rPr>
-                        <a:t>Harkous '18 — Polisis (USENIX)</a:t>
+                        <a:t>Harkous '18 - Polisis (USENIX)</a:t>
                       </a:r>
                       <a:endParaRPr lang="en-US" sz="1050" dirty="0">
                         <a:latin typeface="Calibri" charset="0"/>
@@ -7207,7 +7221,7 @@
                       </a:endParaRPr>
                     </a:p>
                   </a:txBody>
-                  <a:tcPr marL="91440" marR="91440" marT="45720" marB="45720" anchor="ctr">
+                  <a:tcPr anchor="ctr">
                     <a:lnL w="6350" cap="flat" cmpd="sng" algn="ctr">
                       <a:solidFill>
                         <a:srgbClr val="D8DEEA"/>
@@ -7251,7 +7265,7 @@
                     <a:bodyPr/>
                     <a:lstStyle/>
                     <a:p>
-                      <a:pPr indent="0" marL="0">
+                      <a:pPr marL="0" indent="0">
                         <a:buNone/>
                       </a:pPr>
                       <a:r>
@@ -7272,7 +7286,7 @@
                       </a:endParaRPr>
                     </a:p>
                   </a:txBody>
-                  <a:tcPr marL="91440" marR="91440" marT="45720" marB="45720" anchor="ctr">
+                  <a:tcPr anchor="ctr">
                     <a:lnL w="6350" cap="flat" cmpd="sng" algn="ctr">
                       <a:solidFill>
                         <a:srgbClr val="D8DEEA"/>
@@ -7316,7 +7330,7 @@
                     <a:bodyPr/>
                     <a:lstStyle/>
                     <a:p>
-                      <a:pPr indent="0" marL="0">
+                      <a:pPr marL="0" indent="0">
                         <a:buNone/>
                       </a:pPr>
                       <a:r>
@@ -7337,7 +7351,7 @@
                       </a:endParaRPr>
                     </a:p>
                   </a:txBody>
-                  <a:tcPr marL="91440" marR="91440" marT="45720" marB="45720" anchor="ctr">
+                  <a:tcPr anchor="ctr">
                     <a:lnL w="6350" cap="flat" cmpd="sng" algn="ctr">
                       <a:solidFill>
                         <a:srgbClr val="D8DEEA"/>
@@ -7381,7 +7395,7 @@
                     <a:bodyPr/>
                     <a:lstStyle/>
                     <a:p>
-                      <a:pPr indent="0" marL="0">
+                      <a:pPr marL="0" indent="0">
                         <a:buNone/>
                       </a:pPr>
                       <a:r>
@@ -7402,7 +7416,7 @@
                       </a:endParaRPr>
                     </a:p>
                   </a:txBody>
-                  <a:tcPr marL="91440" marR="91440" marT="45720" marB="45720" anchor="ctr">
+                  <a:tcPr anchor="ctr">
                     <a:lnL w="6350" cap="flat" cmpd="sng" algn="ctr">
                       <a:solidFill>
                         <a:srgbClr val="D8DEEA"/>
@@ -7441,6 +7455,11 @@
                     </a:lnB>
                   </a:tcPr>
                 </a:tc>
+                <a:extLst>
+                  <a:ext uri="{0D108BD9-81ED-4DB2-BD59-A6C34878D82A}">
+                    <a16:rowId xmlns:a16="http://schemas.microsoft.com/office/drawing/2014/main" val="10002"/>
+                  </a:ext>
+                </a:extLst>
               </a:tr>
               <a:tr h="658368">
                 <a:tc>
@@ -7448,7 +7467,7 @@
                     <a:bodyPr/>
                     <a:lstStyle/>
                     <a:p>
-                      <a:pPr indent="0" marL="0">
+                      <a:pPr marL="0" indent="0">
                         <a:buNone/>
                       </a:pPr>
                       <a:r>
@@ -7460,7 +7479,7 @@
                           <a:ea typeface="Calibri" pitchFamily="34" charset="-122"/>
                           <a:cs typeface="Calibri" pitchFamily="34" charset="-120"/>
                         </a:rPr>
-                        <a:t>Ravichander '19 — PrivacyQA (EMNLP)</a:t>
+                        <a:t>Ravichander '19 - PrivacyQA (EMNLP)</a:t>
                       </a:r>
                       <a:endParaRPr lang="en-US" sz="1050" dirty="0">
                         <a:latin typeface="Calibri" charset="0"/>
@@ -7469,7 +7488,7 @@
                       </a:endParaRPr>
                     </a:p>
                   </a:txBody>
-                  <a:tcPr marL="91440" marR="91440" marT="45720" marB="45720" anchor="ctr">
+                  <a:tcPr anchor="ctr">
                     <a:lnL w="6350" cap="flat" cmpd="sng" algn="ctr">
                       <a:solidFill>
                         <a:srgbClr val="D8DEEA"/>
@@ -7513,7 +7532,7 @@
                     <a:bodyPr/>
                     <a:lstStyle/>
                     <a:p>
-                      <a:pPr indent="0" marL="0">
+                      <a:pPr marL="0" indent="0">
                         <a:buNone/>
                       </a:pPr>
                       <a:r>
@@ -7534,7 +7553,7 @@
                       </a:endParaRPr>
                     </a:p>
                   </a:txBody>
-                  <a:tcPr marL="91440" marR="91440" marT="45720" marB="45720" anchor="ctr">
+                  <a:tcPr anchor="ctr">
                     <a:lnL w="6350" cap="flat" cmpd="sng" algn="ctr">
                       <a:solidFill>
                         <a:srgbClr val="D8DEEA"/>
@@ -7578,7 +7597,7 @@
                     <a:bodyPr/>
                     <a:lstStyle/>
                     <a:p>
-                      <a:pPr indent="0" marL="0">
+                      <a:pPr marL="0" indent="0">
                         <a:buNone/>
                       </a:pPr>
                       <a:r>
@@ -7599,7 +7618,7 @@
                       </a:endParaRPr>
                     </a:p>
                   </a:txBody>
-                  <a:tcPr marL="91440" marR="91440" marT="45720" marB="45720" anchor="ctr">
+                  <a:tcPr anchor="ctr">
                     <a:lnL w="6350" cap="flat" cmpd="sng" algn="ctr">
                       <a:solidFill>
                         <a:srgbClr val="D8DEEA"/>
@@ -7643,7 +7662,7 @@
                     <a:bodyPr/>
                     <a:lstStyle/>
                     <a:p>
-                      <a:pPr indent="0" marL="0">
+                      <a:pPr marL="0" indent="0">
                         <a:buNone/>
                       </a:pPr>
                       <a:r>
@@ -7655,7 +7674,7 @@
                           <a:ea typeface="Calibri" pitchFamily="34" charset="-122"/>
                           <a:cs typeface="Calibri" pitchFamily="34" charset="-120"/>
                         </a:rPr>
-                        <a:t>NOT_ADDRESSED verdict + confidence — never force PASS/FAIL on silence</a:t>
+                        <a:t>NOT_ADDRESSED verdict + confidence - never force PASS/FAIL on silence</a:t>
                       </a:r>
                       <a:endParaRPr lang="en-US" sz="1050" dirty="0">
                         <a:latin typeface="Calibri" charset="0"/>
@@ -7664,7 +7683,7 @@
                       </a:endParaRPr>
                     </a:p>
                   </a:txBody>
-                  <a:tcPr marL="91440" marR="91440" marT="45720" marB="45720" anchor="ctr">
+                  <a:tcPr anchor="ctr">
                     <a:lnL w="6350" cap="flat" cmpd="sng" algn="ctr">
                       <a:solidFill>
                         <a:srgbClr val="D8DEEA"/>
@@ -7703,6 +7722,11 @@
                     </a:lnB>
                   </a:tcPr>
                 </a:tc>
+                <a:extLst>
+                  <a:ext uri="{0D108BD9-81ED-4DB2-BD59-A6C34878D82A}">
+                    <a16:rowId xmlns:a16="http://schemas.microsoft.com/office/drawing/2014/main" val="10003"/>
+                  </a:ext>
+                </a:extLst>
               </a:tr>
               <a:tr h="658368">
                 <a:tc>
@@ -7710,7 +7734,7 @@
                     <a:bodyPr/>
                     <a:lstStyle/>
                     <a:p>
-                      <a:pPr indent="0" marL="0">
+                      <a:pPr marL="0" indent="0">
                         <a:buNone/>
                       </a:pPr>
                       <a:r>
@@ -7731,7 +7755,7 @@
                       </a:endParaRPr>
                     </a:p>
                   </a:txBody>
-                  <a:tcPr marL="91440" marR="91440" marT="45720" marB="45720" anchor="ctr">
+                  <a:tcPr anchor="ctr">
                     <a:lnL w="6350" cap="flat" cmpd="sng" algn="ctr">
                       <a:solidFill>
                         <a:srgbClr val="D8DEEA"/>
@@ -7775,7 +7799,7 @@
                     <a:bodyPr/>
                     <a:lstStyle/>
                     <a:p>
-                      <a:pPr indent="0" marL="0">
+                      <a:pPr marL="0" indent="0">
                         <a:buNone/>
                       </a:pPr>
                       <a:r>
@@ -7796,7 +7820,7 @@
                       </a:endParaRPr>
                     </a:p>
                   </a:txBody>
-                  <a:tcPr marL="91440" marR="91440" marT="45720" marB="45720" anchor="ctr">
+                  <a:tcPr anchor="ctr">
                     <a:lnL w="6350" cap="flat" cmpd="sng" algn="ctr">
                       <a:solidFill>
                         <a:srgbClr val="D8DEEA"/>
@@ -7840,7 +7864,7 @@
                     <a:bodyPr/>
                     <a:lstStyle/>
                     <a:p>
-                      <a:pPr indent="0" marL="0">
+                      <a:pPr marL="0" indent="0">
                         <a:buNone/>
                       </a:pPr>
                       <a:r>
@@ -7861,7 +7885,7 @@
                       </a:endParaRPr>
                     </a:p>
                   </a:txBody>
-                  <a:tcPr marL="91440" marR="91440" marT="45720" marB="45720" anchor="ctr">
+                  <a:tcPr anchor="ctr">
                     <a:lnL w="6350" cap="flat" cmpd="sng" algn="ctr">
                       <a:solidFill>
                         <a:srgbClr val="D8DEEA"/>
@@ -7905,7 +7929,7 @@
                     <a:bodyPr/>
                     <a:lstStyle/>
                     <a:p>
-                      <a:pPr indent="0" marL="0">
+                      <a:pPr marL="0" indent="0">
                         <a:buNone/>
                       </a:pPr>
                       <a:r>
@@ -7926,7 +7950,7 @@
                       </a:endParaRPr>
                     </a:p>
                   </a:txBody>
-                  <a:tcPr marL="91440" marR="91440" marT="45720" marB="45720" anchor="ctr">
+                  <a:tcPr anchor="ctr">
                     <a:lnL w="6350" cap="flat" cmpd="sng" algn="ctr">
                       <a:solidFill>
                         <a:srgbClr val="D8DEEA"/>
@@ -7965,6 +7989,11 @@
                     </a:lnB>
                   </a:tcPr>
                 </a:tc>
+                <a:extLst>
+                  <a:ext uri="{0D108BD9-81ED-4DB2-BD59-A6C34878D82A}">
+                    <a16:rowId xmlns:a16="http://schemas.microsoft.com/office/drawing/2014/main" val="10004"/>
+                  </a:ext>
+                </a:extLst>
               </a:tr>
               <a:tr h="658368">
                 <a:tc>
@@ -7972,7 +8001,7 @@
                     <a:bodyPr/>
                     <a:lstStyle/>
                     <a:p>
-                      <a:pPr indent="0" marL="0">
+                      <a:pPr marL="0" indent="0">
                         <a:buNone/>
                       </a:pPr>
                       <a:r>
@@ -7984,7 +8013,7 @@
                           <a:ea typeface="Calibri" pitchFamily="34" charset="-122"/>
                           <a:cs typeface="Calibri" pitchFamily="34" charset="-120"/>
                         </a:rPr>
-                        <a:t>Xiao '23 — Lalaine (USENIX)</a:t>
+                        <a:t>Xiao '23 - Lalaine (USENIX)</a:t>
                       </a:r>
                       <a:endParaRPr lang="en-US" sz="1050" dirty="0">
                         <a:latin typeface="Calibri" charset="0"/>
@@ -7993,7 +8022,7 @@
                       </a:endParaRPr>
                     </a:p>
                   </a:txBody>
-                  <a:tcPr marL="91440" marR="91440" marT="45720" marB="45720" anchor="ctr">
+                  <a:tcPr anchor="ctr">
                     <a:lnL w="6350" cap="flat" cmpd="sng" algn="ctr">
                       <a:solidFill>
                         <a:srgbClr val="D8DEEA"/>
@@ -8037,7 +8066,7 @@
                     <a:bodyPr/>
                     <a:lstStyle/>
                     <a:p>
-                      <a:pPr indent="0" marL="0">
+                      <a:pPr marL="0" indent="0">
                         <a:buNone/>
                       </a:pPr>
                       <a:r>
@@ -8058,7 +8087,7 @@
                       </a:endParaRPr>
                     </a:p>
                   </a:txBody>
-                  <a:tcPr marL="91440" marR="91440" marT="45720" marB="45720" anchor="ctr">
+                  <a:tcPr anchor="ctr">
                     <a:lnL w="6350" cap="flat" cmpd="sng" algn="ctr">
                       <a:solidFill>
                         <a:srgbClr val="D8DEEA"/>
@@ -8102,7 +8131,7 @@
                     <a:bodyPr/>
                     <a:lstStyle/>
                     <a:p>
-                      <a:pPr indent="0" marL="0">
+                      <a:pPr marL="0" indent="0">
                         <a:buNone/>
                       </a:pPr>
                       <a:r>
@@ -8123,7 +8152,7 @@
                       </a:endParaRPr>
                     </a:p>
                   </a:txBody>
-                  <a:tcPr marL="91440" marR="91440" marT="45720" marB="45720" anchor="ctr">
+                  <a:tcPr anchor="ctr">
                     <a:lnL w="6350" cap="flat" cmpd="sng" algn="ctr">
                       <a:solidFill>
                         <a:srgbClr val="D8DEEA"/>
@@ -8167,7 +8196,7 @@
                     <a:bodyPr/>
                     <a:lstStyle/>
                     <a:p>
-                      <a:pPr indent="0" marL="0">
+                      <a:pPr marL="0" indent="0">
                         <a:buNone/>
                       </a:pPr>
                       <a:r>
@@ -8179,7 +8208,7 @@
                           <a:ea typeface="Calibri" pitchFamily="34" charset="-122"/>
                           <a:cs typeface="Calibri" pitchFamily="34" charset="-120"/>
                         </a:rPr>
-                        <a:t>discrepancy typology: neglect / contrary / inadequate — in our report schema</a:t>
+                        <a:t>discrepancy typology: neglect / contrary / inadequate - in our report schema</a:t>
                       </a:r>
                       <a:endParaRPr lang="en-US" sz="1050" dirty="0">
                         <a:latin typeface="Calibri" charset="0"/>
@@ -8188,7 +8217,7 @@
                       </a:endParaRPr>
                     </a:p>
                   </a:txBody>
-                  <a:tcPr marL="91440" marR="91440" marT="45720" marB="45720" anchor="ctr">
+                  <a:tcPr anchor="ctr">
                     <a:lnL w="6350" cap="flat" cmpd="sng" algn="ctr">
                       <a:solidFill>
                         <a:srgbClr val="D8DEEA"/>
@@ -8227,6 +8256,11 @@
                     </a:lnB>
                   </a:tcPr>
                 </a:tc>
+                <a:extLst>
+                  <a:ext uri="{0D108BD9-81ED-4DB2-BD59-A6C34878D82A}">
+                    <a16:rowId xmlns:a16="http://schemas.microsoft.com/office/drawing/2014/main" val="10005"/>
+                  </a:ext>
+                </a:extLst>
               </a:tr>
             </a:tbl>
           </a:graphicData>
@@ -8253,7 +8287,7 @@
           <a:bodyPr wrap="square" lIns="0" tIns="0" rIns="0" bIns="0" rtlCol="0" anchor="ctr"/>
           <a:lstStyle/>
           <a:p>
-            <a:pPr algn="r" indent="0" marL="0">
+            <a:pPr marL="0" indent="0" algn="r">
               <a:buNone/>
             </a:pPr>
             <a:r>
@@ -8265,7 +8299,7 @@
                 <a:ea typeface="Calibri" pitchFamily="34" charset="-122"/>
                 <a:cs typeface="Calibri" pitchFamily="34" charset="-120"/>
               </a:rPr>
-              <a:t>comp_square · primary research update — 3</a:t>
+              <a:t>comp_square · primary research update - 3</a:t>
             </a:r>
             <a:endParaRPr lang="en-US" sz="900" dirty="0"/>
           </a:p>
@@ -8287,6 +8321,7 @@
         <a:solidFill>
           <a:srgbClr val="FFFFFF"/>
         </a:solidFill>
+        <a:effectLst/>
       </p:bgPr>
     </p:bg>
     <p:spTree>
@@ -8324,7 +8359,7 @@
           <a:bodyPr wrap="square" lIns="0" tIns="0" rIns="0" bIns="0" rtlCol="0" anchor="ctr"/>
           <a:lstStyle/>
           <a:p>
-            <a:pPr indent="0" marL="0">
+            <a:pPr marL="0" indent="0">
               <a:buNone/>
             </a:pPr>
             <a:r>
@@ -8336,7 +8371,7 @@
                 <a:ea typeface="Cambria" pitchFamily="34" charset="-122"/>
                 <a:cs typeface="Cambria" pitchFamily="34" charset="-120"/>
               </a:rPr>
-              <a:t>What each paper contributes — II: web audits &amp; LLM legal</a:t>
+              <a:t>What each paper contributes - II: web audits &amp; LLM legal</a:t>
             </a:r>
             <a:endParaRPr lang="en-US" sz="3000" dirty="0"/>
           </a:p>
@@ -8363,7 +8398,7 @@
           <a:bodyPr wrap="square" lIns="0" tIns="0" rIns="0" bIns="0" rtlCol="0" anchor="ctr"/>
           <a:lstStyle/>
           <a:p>
-            <a:pPr indent="0" marL="0">
+            <a:pPr marL="0" indent="0">
               <a:buNone/>
             </a:pPr>
             <a:r>
@@ -8375,7 +8410,7 @@
                 <a:ea typeface="Calibri" pitchFamily="34" charset="-122"/>
                 <a:cs typeface="Calibri" pitchFamily="34" charset="-120"/>
               </a:rPr>
-              <a:t>The two directions closest to us — and what they still cannot do</a:t>
+              <a:t>The two directions closest to us - and what they still cannot do</a:t>
             </a:r>
             <a:endParaRPr lang="en-US" sz="1300" dirty="0"/>
           </a:p>
@@ -8397,17 +8432,41 @@
         </p:nvGraphicFramePr>
         <p:xfrm>
           <a:off x="548640" y="1417320"/>
-          <a:ext cx="11091672" cy="914400"/>
+          <a:ext cx="11091672" cy="3931920"/>
         </p:xfrm>
         <a:graphic>
           <a:graphicData uri="http://schemas.openxmlformats.org/drawingml/2006/table">
             <a:tbl>
               <a:tblPr/>
               <a:tblGrid>
-                <a:gridCol w="2286000"/>
-                <a:gridCol w="3291840"/>
-                <a:gridCol w="1828800"/>
-                <a:gridCol w="3685032"/>
+                <a:gridCol w="2286000">
+                  <a:extLst>
+                    <a:ext uri="{9D8B030D-6E8A-4147-A177-3AD203B41FA5}">
+                      <a16:colId xmlns:a16="http://schemas.microsoft.com/office/drawing/2014/main" val="20000"/>
+                    </a:ext>
+                  </a:extLst>
+                </a:gridCol>
+                <a:gridCol w="3291840">
+                  <a:extLst>
+                    <a:ext uri="{9D8B030D-6E8A-4147-A177-3AD203B41FA5}">
+                      <a16:colId xmlns:a16="http://schemas.microsoft.com/office/drawing/2014/main" val="20001"/>
+                    </a:ext>
+                  </a:extLst>
+                </a:gridCol>
+                <a:gridCol w="1828800">
+                  <a:extLst>
+                    <a:ext uri="{9D8B030D-6E8A-4147-A177-3AD203B41FA5}">
+                      <a16:colId xmlns:a16="http://schemas.microsoft.com/office/drawing/2014/main" val="20002"/>
+                    </a:ext>
+                  </a:extLst>
+                </a:gridCol>
+                <a:gridCol w="3685032">
+                  <a:extLst>
+                    <a:ext uri="{9D8B030D-6E8A-4147-A177-3AD203B41FA5}">
+                      <a16:colId xmlns:a16="http://schemas.microsoft.com/office/drawing/2014/main" val="20003"/>
+                    </a:ext>
+                  </a:extLst>
+                </a:gridCol>
               </a:tblGrid>
               <a:tr h="786384">
                 <a:tc>
@@ -8415,7 +8474,7 @@
                     <a:bodyPr/>
                     <a:lstStyle/>
                     <a:p>
-                      <a:pPr indent="0" marL="0">
+                      <a:pPr marL="0" indent="0">
                         <a:buNone/>
                       </a:pPr>
                       <a:r>
@@ -8436,7 +8495,7 @@
                       </a:endParaRPr>
                     </a:p>
                   </a:txBody>
-                  <a:tcPr marL="91440" marR="91440" marT="45720" marB="45720" anchor="ctr">
+                  <a:tcPr anchor="ctr">
                     <a:lnL w="6350" cap="flat" cmpd="sng" algn="ctr">
                       <a:solidFill>
                         <a:srgbClr val="D8DEEA"/>
@@ -8483,7 +8542,7 @@
                     <a:bodyPr/>
                     <a:lstStyle/>
                     <a:p>
-                      <a:pPr indent="0" marL="0">
+                      <a:pPr marL="0" indent="0">
                         <a:buNone/>
                       </a:pPr>
                       <a:r>
@@ -8504,7 +8563,7 @@
                       </a:endParaRPr>
                     </a:p>
                   </a:txBody>
-                  <a:tcPr marL="91440" marR="91440" marT="45720" marB="45720" anchor="ctr">
+                  <a:tcPr anchor="ctr">
                     <a:lnL w="6350" cap="flat" cmpd="sng" algn="ctr">
                       <a:solidFill>
                         <a:srgbClr val="D8DEEA"/>
@@ -8551,7 +8610,7 @@
                     <a:bodyPr/>
                     <a:lstStyle/>
                     <a:p>
-                      <a:pPr indent="0" marL="0">
+                      <a:pPr marL="0" indent="0">
                         <a:buNone/>
                       </a:pPr>
                       <a:r>
@@ -8572,7 +8631,7 @@
                       </a:endParaRPr>
                     </a:p>
                   </a:txBody>
-                  <a:tcPr marL="91440" marR="91440" marT="45720" marB="45720" anchor="ctr">
+                  <a:tcPr anchor="ctr">
                     <a:lnL w="6350" cap="flat" cmpd="sng" algn="ctr">
                       <a:solidFill>
                         <a:srgbClr val="D8DEEA"/>
@@ -8619,7 +8678,7 @@
                     <a:bodyPr/>
                     <a:lstStyle/>
                     <a:p>
-                      <a:pPr indent="0" marL="0">
+                      <a:pPr marL="0" indent="0">
                         <a:buNone/>
                       </a:pPr>
                       <a:r>
@@ -8640,7 +8699,7 @@
                       </a:endParaRPr>
                     </a:p>
                   </a:txBody>
-                  <a:tcPr marL="91440" marR="91440" marT="45720" marB="45720" anchor="ctr">
+                  <a:tcPr anchor="ctr">
                     <a:lnL w="6350" cap="flat" cmpd="sng" algn="ctr">
                       <a:solidFill>
                         <a:srgbClr val="D8DEEA"/>
@@ -8682,6 +8741,11 @@
                     </a:solidFill>
                   </a:tcPr>
                 </a:tc>
+                <a:extLst>
+                  <a:ext uri="{0D108BD9-81ED-4DB2-BD59-A6C34878D82A}">
+                    <a16:rowId xmlns:a16="http://schemas.microsoft.com/office/drawing/2014/main" val="10000"/>
+                  </a:ext>
+                </a:extLst>
               </a:tr>
               <a:tr h="786384">
                 <a:tc>
@@ -8689,7 +8753,7 @@
                     <a:bodyPr/>
                     <a:lstStyle/>
                     <a:p>
-                      <a:pPr indent="0" marL="0">
+                      <a:pPr marL="0" indent="0">
                         <a:buNone/>
                       </a:pPr>
                       <a:r>
@@ -8701,7 +8765,7 @@
                           <a:ea typeface="Calibri" pitchFamily="34" charset="-122"/>
                           <a:cs typeface="Calibri" pitchFamily="34" charset="-120"/>
                         </a:rPr>
-                        <a:t>Trevisan '19 — CookieCheck (PoPETs)</a:t>
+                        <a:t>Trevisan '19 - CookieCheck (PoPETs)</a:t>
                       </a:r>
                       <a:endParaRPr lang="en-US" sz="1050" dirty="0">
                         <a:latin typeface="Calibri" charset="0"/>
@@ -8710,7 +8774,7 @@
                       </a:endParaRPr>
                     </a:p>
                   </a:txBody>
-                  <a:tcPr marL="91440" marR="91440" marT="45720" marB="45720" anchor="ctr">
+                  <a:tcPr anchor="ctr">
                     <a:lnL w="6350" cap="flat" cmpd="sng" algn="ctr">
                       <a:solidFill>
                         <a:srgbClr val="D8DEEA"/>
@@ -8754,7 +8818,7 @@
                     <a:bodyPr/>
                     <a:lstStyle/>
                     <a:p>
-                      <a:pPr indent="0" marL="0">
+                      <a:pPr marL="0" indent="0">
                         <a:buNone/>
                       </a:pPr>
                       <a:r>
@@ -8775,7 +8839,7 @@
                       </a:endParaRPr>
                     </a:p>
                   </a:txBody>
-                  <a:tcPr marL="91440" marR="91440" marT="45720" marB="45720" anchor="ctr">
+                  <a:tcPr anchor="ctr">
                     <a:lnL w="6350" cap="flat" cmpd="sng" algn="ctr">
                       <a:solidFill>
                         <a:srgbClr val="D8DEEA"/>
@@ -8819,7 +8883,7 @@
                     <a:bodyPr/>
                     <a:lstStyle/>
                     <a:p>
-                      <a:pPr indent="0" marL="0">
+                      <a:pPr marL="0" indent="0">
                         <a:buNone/>
                       </a:pPr>
                       <a:r>
@@ -8840,7 +8904,7 @@
                       </a:endParaRPr>
                     </a:p>
                   </a:txBody>
-                  <a:tcPr marL="91440" marR="91440" marT="45720" marB="45720" anchor="ctr">
+                  <a:tcPr anchor="ctr">
                     <a:lnL w="6350" cap="flat" cmpd="sng" algn="ctr">
                       <a:solidFill>
                         <a:srgbClr val="D8DEEA"/>
@@ -8884,7 +8948,7 @@
                     <a:bodyPr/>
                     <a:lstStyle/>
                     <a:p>
-                      <a:pPr indent="0" marL="0">
+                      <a:pPr marL="0" indent="0">
                         <a:buNone/>
                       </a:pPr>
                       <a:r>
@@ -8905,7 +8969,7 @@
                       </a:endParaRPr>
                     </a:p>
                   </a:txBody>
-                  <a:tcPr marL="91440" marR="91440" marT="45720" marB="45720" anchor="ctr">
+                  <a:tcPr anchor="ctr">
                     <a:lnL w="6350" cap="flat" cmpd="sng" algn="ctr">
                       <a:solidFill>
                         <a:srgbClr val="D8DEEA"/>
@@ -8944,6 +9008,11 @@
                     </a:lnB>
                   </a:tcPr>
                 </a:tc>
+                <a:extLst>
+                  <a:ext uri="{0D108BD9-81ED-4DB2-BD59-A6C34878D82A}">
+                    <a16:rowId xmlns:a16="http://schemas.microsoft.com/office/drawing/2014/main" val="10001"/>
+                  </a:ext>
+                </a:extLst>
               </a:tr>
               <a:tr h="786384">
                 <a:tc>
@@ -8951,7 +9020,7 @@
                     <a:bodyPr/>
                     <a:lstStyle/>
                     <a:p>
-                      <a:pPr indent="0" marL="0">
+                      <a:pPr marL="0" indent="0">
                         <a:buNone/>
                       </a:pPr>
                       <a:r>
@@ -8963,7 +9032,7 @@
                           <a:ea typeface="Calibri" pitchFamily="34" charset="-122"/>
                           <a:cs typeface="Calibri" pitchFamily="34" charset="-120"/>
                         </a:rPr>
-                        <a:t>Bouhoula '24 — alsacnc (USENIX)</a:t>
+                        <a:t>Bouhoula '24 - alsacnc (USENIX)</a:t>
                       </a:r>
                       <a:endParaRPr lang="en-US" sz="1050" dirty="0">
                         <a:latin typeface="Calibri" charset="0"/>
@@ -8972,7 +9041,7 @@
                       </a:endParaRPr>
                     </a:p>
                   </a:txBody>
-                  <a:tcPr marL="91440" marR="91440" marT="45720" marB="45720" anchor="ctr">
+                  <a:tcPr anchor="ctr">
                     <a:lnL w="6350" cap="flat" cmpd="sng" algn="ctr">
                       <a:solidFill>
                         <a:srgbClr val="D8DEEA"/>
@@ -9016,7 +9085,7 @@
                     <a:bodyPr/>
                     <a:lstStyle/>
                     <a:p>
-                      <a:pPr indent="0" marL="0">
+                      <a:pPr marL="0" indent="0">
                         <a:buNone/>
                       </a:pPr>
                       <a:r>
@@ -9037,7 +9106,7 @@
                       </a:endParaRPr>
                     </a:p>
                   </a:txBody>
-                  <a:tcPr marL="91440" marR="91440" marT="45720" marB="45720" anchor="ctr">
+                  <a:tcPr anchor="ctr">
                     <a:lnL w="6350" cap="flat" cmpd="sng" algn="ctr">
                       <a:solidFill>
                         <a:srgbClr val="D8DEEA"/>
@@ -9081,7 +9150,7 @@
                     <a:bodyPr/>
                     <a:lstStyle/>
                     <a:p>
-                      <a:pPr indent="0" marL="0">
+                      <a:pPr marL="0" indent="0">
                         <a:buNone/>
                       </a:pPr>
                       <a:r>
@@ -9102,7 +9171,7 @@
                       </a:endParaRPr>
                     </a:p>
                   </a:txBody>
-                  <a:tcPr marL="91440" marR="91440" marT="45720" marB="45720" anchor="ctr">
+                  <a:tcPr anchor="ctr">
                     <a:lnL w="6350" cap="flat" cmpd="sng" algn="ctr">
                       <a:solidFill>
                         <a:srgbClr val="D8DEEA"/>
@@ -9146,7 +9215,7 @@
                     <a:bodyPr/>
                     <a:lstStyle/>
                     <a:p>
-                      <a:pPr indent="0" marL="0">
+                      <a:pPr marL="0" indent="0">
                         <a:buNone/>
                       </a:pPr>
                       <a:r>
@@ -9158,7 +9227,7 @@
                           <a:ea typeface="Calibri" pitchFamily="34" charset="-122"/>
                           <a:cs typeface="Calibri" pitchFamily="34" charset="-120"/>
                         </a:rPr>
-                        <a:t>AA-cookie definition; conservative tuning; banner-detection heuristics (EasyList Cookie + z-index) for our collector upgrade — code is open source</a:t>
+                        <a:t>AA-cookie definition; conservative tuning; banner-detection heuristics (EasyList Cookie + z-index) for our collector upgrade - code is open source</a:t>
                       </a:r>
                       <a:endParaRPr lang="en-US" sz="1050" dirty="0">
                         <a:latin typeface="Calibri" charset="0"/>
@@ -9167,7 +9236,7 @@
                       </a:endParaRPr>
                     </a:p>
                   </a:txBody>
-                  <a:tcPr marL="91440" marR="91440" marT="45720" marB="45720" anchor="ctr">
+                  <a:tcPr anchor="ctr">
                     <a:lnL w="6350" cap="flat" cmpd="sng" algn="ctr">
                       <a:solidFill>
                         <a:srgbClr val="D8DEEA"/>
@@ -9206,6 +9275,11 @@
                     </a:lnB>
                   </a:tcPr>
                 </a:tc>
+                <a:extLst>
+                  <a:ext uri="{0D108BD9-81ED-4DB2-BD59-A6C34878D82A}">
+                    <a16:rowId xmlns:a16="http://schemas.microsoft.com/office/drawing/2014/main" val="10002"/>
+                  </a:ext>
+                </a:extLst>
               </a:tr>
               <a:tr h="786384">
                 <a:tc>
@@ -9213,7 +9287,7 @@
                     <a:bodyPr/>
                     <a:lstStyle/>
                     <a:p>
-                      <a:pPr indent="0" marL="0">
+                      <a:pPr marL="0" indent="0">
                         <a:buNone/>
                       </a:pPr>
                       <a:r>
@@ -9225,7 +9299,7 @@
                           <a:ea typeface="Calibri" pitchFamily="34" charset="-122"/>
                           <a:cs typeface="Calibri" pitchFamily="34" charset="-120"/>
                         </a:rPr>
-                        <a:t>Guha '23 — LegalBench (NeurIPS)</a:t>
+                        <a:t>Guha '23 - LegalBench (NeurIPS)</a:t>
                       </a:r>
                       <a:endParaRPr lang="en-US" sz="1050" dirty="0">
                         <a:latin typeface="Calibri" charset="0"/>
@@ -9234,7 +9308,7 @@
                       </a:endParaRPr>
                     </a:p>
                   </a:txBody>
-                  <a:tcPr marL="91440" marR="91440" marT="45720" marB="45720" anchor="ctr">
+                  <a:tcPr anchor="ctr">
                     <a:lnL w="6350" cap="flat" cmpd="sng" algn="ctr">
                       <a:solidFill>
                         <a:srgbClr val="D8DEEA"/>
@@ -9278,7 +9352,7 @@
                     <a:bodyPr/>
                     <a:lstStyle/>
                     <a:p>
-                      <a:pPr indent="0" marL="0">
+                      <a:pPr marL="0" indent="0">
                         <a:buNone/>
                       </a:pPr>
                       <a:r>
@@ -9299,7 +9373,7 @@
                       </a:endParaRPr>
                     </a:p>
                   </a:txBody>
-                  <a:tcPr marL="91440" marR="91440" marT="45720" marB="45720" anchor="ctr">
+                  <a:tcPr anchor="ctr">
                     <a:lnL w="6350" cap="flat" cmpd="sng" algn="ctr">
                       <a:solidFill>
                         <a:srgbClr val="D8DEEA"/>
@@ -9343,7 +9417,7 @@
                     <a:bodyPr/>
                     <a:lstStyle/>
                     <a:p>
-                      <a:pPr indent="0" marL="0">
+                      <a:pPr marL="0" indent="0">
                         <a:buNone/>
                       </a:pPr>
                       <a:r>
@@ -9364,7 +9438,7 @@
                       </a:endParaRPr>
                     </a:p>
                   </a:txBody>
-                  <a:tcPr marL="91440" marR="91440" marT="45720" marB="45720" anchor="ctr">
+                  <a:tcPr anchor="ctr">
                     <a:lnL w="6350" cap="flat" cmpd="sng" algn="ctr">
                       <a:solidFill>
                         <a:srgbClr val="D8DEEA"/>
@@ -9408,7 +9482,7 @@
                     <a:bodyPr/>
                     <a:lstStyle/>
                     <a:p>
-                      <a:pPr indent="0" marL="0">
+                      <a:pPr marL="0" indent="0">
                         <a:buNone/>
                       </a:pPr>
                       <a:r>
@@ -9429,7 +9503,7 @@
                       </a:endParaRPr>
                     </a:p>
                   </a:txBody>
-                  <a:tcPr marL="91440" marR="91440" marT="45720" marB="45720" anchor="ctr">
+                  <a:tcPr anchor="ctr">
                     <a:lnL w="6350" cap="flat" cmpd="sng" algn="ctr">
                       <a:solidFill>
                         <a:srgbClr val="D8DEEA"/>
@@ -9468,6 +9542,11 @@
                     </a:lnB>
                   </a:tcPr>
                 </a:tc>
+                <a:extLst>
+                  <a:ext uri="{0D108BD9-81ED-4DB2-BD59-A6C34878D82A}">
+                    <a16:rowId xmlns:a16="http://schemas.microsoft.com/office/drawing/2014/main" val="10003"/>
+                  </a:ext>
+                </a:extLst>
               </a:tr>
               <a:tr h="786384">
                 <a:tc>
@@ -9475,7 +9554,7 @@
                     <a:bodyPr/>
                     <a:lstStyle/>
                     <a:p>
-                      <a:pPr indent="0" marL="0">
+                      <a:pPr marL="0" indent="0">
                         <a:buNone/>
                       </a:pPr>
                       <a:r>
@@ -9496,7 +9575,7 @@
                       </a:endParaRPr>
                     </a:p>
                   </a:txBody>
-                  <a:tcPr marL="91440" marR="91440" marT="45720" marB="45720" anchor="ctr">
+                  <a:tcPr anchor="ctr">
                     <a:lnL w="6350" cap="flat" cmpd="sng" algn="ctr">
                       <a:solidFill>
                         <a:srgbClr val="D8DEEA"/>
@@ -9540,7 +9619,7 @@
                     <a:bodyPr/>
                     <a:lstStyle/>
                     <a:p>
-                      <a:pPr indent="0" marL="0">
+                      <a:pPr marL="0" indent="0">
                         <a:buNone/>
                       </a:pPr>
                       <a:r>
@@ -9561,7 +9640,7 @@
                       </a:endParaRPr>
                     </a:p>
                   </a:txBody>
-                  <a:tcPr marL="91440" marR="91440" marT="45720" marB="45720" anchor="ctr">
+                  <a:tcPr anchor="ctr">
                     <a:lnL w="6350" cap="flat" cmpd="sng" algn="ctr">
                       <a:solidFill>
                         <a:srgbClr val="D8DEEA"/>
@@ -9605,7 +9684,7 @@
                     <a:bodyPr/>
                     <a:lstStyle/>
                     <a:p>
-                      <a:pPr indent="0" marL="0">
+                      <a:pPr marL="0" indent="0">
                         <a:buNone/>
                       </a:pPr>
                       <a:r>
@@ -9617,7 +9696,7 @@
                           <a:ea typeface="Calibri" pitchFamily="34" charset="-122"/>
                           <a:cs typeface="Calibri" pitchFamily="34" charset="-120"/>
                         </a:rPr>
-                        <a:t>policy text only — no runtime evidence</a:t>
+                        <a:t>policy text only - no runtime evidence</a:t>
                       </a:r>
                       <a:endParaRPr lang="en-US" sz="1050" dirty="0">
                         <a:latin typeface="Calibri" charset="0"/>
@@ -9626,7 +9705,7 @@
                       </a:endParaRPr>
                     </a:p>
                   </a:txBody>
-                  <a:tcPr marL="91440" marR="91440" marT="45720" marB="45720" anchor="ctr">
+                  <a:tcPr anchor="ctr">
                     <a:lnL w="6350" cap="flat" cmpd="sng" algn="ctr">
                       <a:solidFill>
                         <a:srgbClr val="D8DEEA"/>
@@ -9670,7 +9749,7 @@
                     <a:bodyPr/>
                     <a:lstStyle/>
                     <a:p>
-                      <a:pPr indent="0" marL="0">
+                      <a:pPr marL="0" indent="0">
                         <a:buNone/>
                       </a:pPr>
                       <a:r>
@@ -9691,7 +9770,7 @@
                       </a:endParaRPr>
                     </a:p>
                   </a:txBody>
-                  <a:tcPr marL="91440" marR="91440" marT="45720" marB="45720" anchor="ctr">
+                  <a:tcPr anchor="ctr">
                     <a:lnL w="6350" cap="flat" cmpd="sng" algn="ctr">
                       <a:solidFill>
                         <a:srgbClr val="D8DEEA"/>
@@ -9730,6 +9809,11 @@
                     </a:lnB>
                   </a:tcPr>
                 </a:tc>
+                <a:extLst>
+                  <a:ext uri="{0D108BD9-81ED-4DB2-BD59-A6C34878D82A}">
+                    <a16:rowId xmlns:a16="http://schemas.microsoft.com/office/drawing/2014/main" val="10004"/>
+                  </a:ext>
+                </a:extLst>
               </a:tr>
             </a:tbl>
           </a:graphicData>
@@ -9737,7 +9821,7 @@
       </p:graphicFrame>
       <p:sp>
         <p:nvSpPr>
-          <p:cNvPr id="5" name="Text 2"/>
+          <p:cNvPr id="4" name="Text 2"/>
           <p:cNvSpPr/>
           <p:nvPr/>
         </p:nvSpPr>
@@ -9756,7 +9840,7 @@
           <a:bodyPr wrap="square" lIns="0" tIns="0" rIns="0" bIns="0" rtlCol="0" anchor="ctr"/>
           <a:lstStyle/>
           <a:p>
-            <a:pPr indent="0" marL="0">
+            <a:pPr marL="0" indent="0">
               <a:buNone/>
             </a:pPr>
             <a:r>
@@ -9795,7 +9879,7 @@
           <a:bodyPr wrap="square" lIns="0" tIns="0" rIns="0" bIns="0" rtlCol="0" anchor="ctr"/>
           <a:lstStyle/>
           <a:p>
-            <a:pPr algn="r" indent="0" marL="0">
+            <a:pPr marL="0" indent="0" algn="r">
               <a:buNone/>
             </a:pPr>
             <a:r>
@@ -9807,7 +9891,7 @@
                 <a:ea typeface="Calibri" pitchFamily="34" charset="-122"/>
                 <a:cs typeface="Calibri" pitchFamily="34" charset="-120"/>
               </a:rPr>
-              <a:t>comp_square · primary research update — 4</a:t>
+              <a:t>comp_square · primary research update - 4</a:t>
             </a:r>
             <a:endParaRPr lang="en-US" sz="900" dirty="0"/>
           </a:p>
@@ -9829,6 +9913,7 @@
         <a:solidFill>
           <a:srgbClr val="FFFFFF"/>
         </a:solidFill>
+        <a:effectLst/>
       </p:bgPr>
     </p:bg>
     <p:spTree>
@@ -9866,7 +9951,7 @@
           <a:bodyPr wrap="square" lIns="0" tIns="0" rIns="0" bIns="0" rtlCol="0" anchor="ctr"/>
           <a:lstStyle/>
           <a:p>
-            <a:pPr indent="0" marL="0">
+            <a:pPr marL="0" indent="0">
               <a:buNone/>
             </a:pPr>
             <a:r>
@@ -9878,7 +9963,7 @@
                 <a:ea typeface="Cambria" pitchFamily="34" charset="-122"/>
                 <a:cs typeface="Cambria" pitchFamily="34" charset="-120"/>
               </a:rPr>
-              <a:t>Gap → design decision — nothing chosen in the abstract</a:t>
+              <a:t>Gap → design decision - nothing chosen in the abstract</a:t>
             </a:r>
             <a:endParaRPr lang="en-US" sz="3000" dirty="0"/>
           </a:p>
@@ -9905,7 +9990,7 @@
           <a:bodyPr wrap="square" lIns="0" tIns="0" rIns="0" bIns="0" rtlCol="0" anchor="ctr"/>
           <a:lstStyle/>
           <a:p>
-            <a:pPr indent="0" marL="0">
+            <a:pPr marL="0" indent="0">
               <a:buNone/>
             </a:pPr>
             <a:r>
@@ -9946,7 +10031,7 @@
           <a:bodyPr wrap="square" lIns="0" tIns="0" rIns="0" bIns="0" rtlCol="0" anchor="ctr"/>
           <a:lstStyle/>
           <a:p>
-            <a:pPr algn="ctr" indent="0" marL="0">
+            <a:pPr marL="0" indent="0" algn="ctr">
               <a:buNone/>
             </a:pPr>
             <a:r>
@@ -9989,7 +10074,7 @@
           <a:bodyPr wrap="square" lIns="1778" tIns="1778" rIns="1778" bIns="1778" rtlCol="0" anchor="ctr"/>
           <a:lstStyle/>
           <a:p>
-            <a:pPr indent="0" marL="0">
+            <a:pPr marL="0" indent="0">
               <a:buNone/>
             </a:pPr>
             <a:r>
@@ -10003,9 +10088,6 @@
               </a:rPr>
               <a:t>Text-only NLP cannot verify behaviour   </a:t>
             </a:r>
-            <a:pPr indent="0" marL="0">
-              <a:buNone/>
-            </a:pPr>
             <a:r>
               <a:rPr lang="en-US" sz="1300" dirty="0">
                 <a:solidFill>
@@ -10042,7 +10124,7 @@
           <a:bodyPr wrap="square" lIns="0" tIns="0" rIns="0" bIns="0" rtlCol="0" anchor="ctr"/>
           <a:lstStyle/>
           <a:p>
-            <a:pPr indent="0" marL="0">
+            <a:pPr marL="0" indent="0">
               <a:buNone/>
             </a:pPr>
             <a:r>
@@ -10083,7 +10165,7 @@
           <a:bodyPr wrap="square" lIns="0" tIns="0" rIns="0" bIns="0" rtlCol="0" anchor="ctr"/>
           <a:lstStyle/>
           <a:p>
-            <a:pPr algn="ctr" indent="0" marL="0">
+            <a:pPr marL="0" indent="0" algn="ctr">
               <a:buNone/>
             </a:pPr>
             <a:r>
@@ -10126,7 +10208,7 @@
           <a:bodyPr wrap="square" lIns="1778" tIns="1778" rIns="1778" bIns="1778" rtlCol="0" anchor="ctr"/>
           <a:lstStyle/>
           <a:p>
-            <a:pPr indent="0" marL="0">
+            <a:pPr marL="0" indent="0">
               <a:buNone/>
             </a:pPr>
             <a:r>
@@ -10140,9 +10222,6 @@
               </a:rPr>
               <a:t>Hybrid auditing limited to static mobile binaries   </a:t>
             </a:r>
-            <a:pPr indent="0" marL="0">
-              <a:buNone/>
-            </a:pPr>
             <a:r>
               <a:rPr lang="en-US" sz="1300" dirty="0">
                 <a:solidFill>
@@ -10179,7 +10258,7 @@
           <a:bodyPr wrap="square" lIns="0" tIns="0" rIns="0" bIns="0" rtlCol="0" anchor="ctr"/>
           <a:lstStyle/>
           <a:p>
-            <a:pPr indent="0" marL="0">
+            <a:pPr marL="0" indent="0">
               <a:buNone/>
             </a:pPr>
             <a:r>
@@ -10220,7 +10299,7 @@
           <a:bodyPr wrap="square" lIns="0" tIns="0" rIns="0" bIns="0" rtlCol="0" anchor="ctr"/>
           <a:lstStyle/>
           <a:p>
-            <a:pPr algn="ctr" indent="0" marL="0">
+            <a:pPr marL="0" indent="0" algn="ctr">
               <a:buNone/>
             </a:pPr>
             <a:r>
@@ -10263,7 +10342,7 @@
           <a:bodyPr wrap="square" lIns="1778" tIns="1778" rIns="1778" bIns="1778" rtlCol="0" anchor="ctr"/>
           <a:lstStyle/>
           <a:p>
-            <a:pPr indent="0" marL="0">
+            <a:pPr marL="0" indent="0">
               <a:buNone/>
             </a:pPr>
             <a:r>
@@ -10277,9 +10356,6 @@
               </a:rPr>
               <a:t>Web auditing ignores the written policy   </a:t>
             </a:r>
-            <a:pPr indent="0" marL="0">
-              <a:buNone/>
-            </a:pPr>
             <a:r>
               <a:rPr lang="en-US" sz="1300" dirty="0">
                 <a:solidFill>
@@ -10316,7 +10392,7 @@
           <a:bodyPr wrap="square" lIns="0" tIns="0" rIns="0" bIns="0" rtlCol="0" anchor="ctr"/>
           <a:lstStyle/>
           <a:p>
-            <a:pPr indent="0" marL="0">
+            <a:pPr marL="0" indent="0">
               <a:buNone/>
             </a:pPr>
             <a:r>
@@ -10357,7 +10433,7 @@
           <a:bodyPr wrap="square" lIns="0" tIns="0" rIns="0" bIns="0" rtlCol="0" anchor="ctr"/>
           <a:lstStyle/>
           <a:p>
-            <a:pPr algn="ctr" indent="0" marL="0">
+            <a:pPr marL="0" indent="0" algn="ctr">
               <a:buNone/>
             </a:pPr>
             <a:r>
@@ -10400,7 +10476,7 @@
           <a:bodyPr wrap="square" lIns="1778" tIns="1778" rIns="1778" bIns="1778" rtlCol="0" anchor="ctr"/>
           <a:lstStyle/>
           <a:p>
-            <a:pPr indent="0" marL="0">
+            <a:pPr marL="0" indent="0">
               <a:buNone/>
             </a:pPr>
             <a:r>
@@ -10414,9 +10490,6 @@
               </a:rPr>
               <a:t>LLMs reason over law without grounded evidence   </a:t>
             </a:r>
-            <a:pPr indent="0" marL="0">
-              <a:buNone/>
-            </a:pPr>
             <a:r>
               <a:rPr lang="en-US" sz="1300" dirty="0">
                 <a:solidFill>
@@ -10426,7 +10499,7 @@
                 <a:ea typeface="Calibri" pitchFamily="34" charset="-122"/>
                 <a:cs typeface="Calibri" pitchFamily="34" charset="-120"/>
               </a:rPr>
-              <a:t>→  RAG over a legal vector store — the exact article text is retrieved and quoted, never recalled from memory</a:t>
+              <a:t>→  RAG over a legal vector store - the exact article text is retrieved and quoted, never recalled from memory</a:t>
             </a:r>
             <a:endParaRPr lang="en-US" sz="1300" dirty="0"/>
           </a:p>
@@ -10453,7 +10526,7 @@
           <a:bodyPr wrap="square" lIns="0" tIns="0" rIns="0" bIns="0" rtlCol="0" anchor="ctr"/>
           <a:lstStyle/>
           <a:p>
-            <a:pPr indent="0" marL="0">
+            <a:pPr marL="0" indent="0">
               <a:buNone/>
             </a:pPr>
             <a:r>
@@ -10492,7 +10565,7 @@
           <a:bodyPr wrap="square" lIns="0" tIns="0" rIns="0" bIns="0" rtlCol="0" anchor="ctr"/>
           <a:lstStyle/>
           <a:p>
-            <a:pPr algn="r" indent="0" marL="0">
+            <a:pPr marL="0" indent="0" algn="r">
               <a:buNone/>
             </a:pPr>
             <a:r>
@@ -10504,7 +10577,7 @@
                 <a:ea typeface="Calibri" pitchFamily="34" charset="-122"/>
                 <a:cs typeface="Calibri" pitchFamily="34" charset="-120"/>
               </a:rPr>
-              <a:t>comp_square · primary research update — 5</a:t>
+              <a:t>comp_square · primary research update - 5</a:t>
             </a:r>
             <a:endParaRPr lang="en-US" sz="900" dirty="0"/>
           </a:p>
@@ -10526,6 +10599,7 @@
         <a:solidFill>
           <a:srgbClr val="FFFFFF"/>
         </a:solidFill>
+        <a:effectLst/>
       </p:bgPr>
     </p:bg>
     <p:spTree>
@@ -10563,7 +10637,7 @@
           <a:bodyPr wrap="square" lIns="0" tIns="0" rIns="0" bIns="0" rtlCol="0" anchor="ctr"/>
           <a:lstStyle/>
           <a:p>
-            <a:pPr indent="0" marL="0">
+            <a:pPr marL="0" indent="0">
               <a:buNone/>
             </a:pPr>
             <a:r>
@@ -10575,7 +10649,7 @@
                 <a:ea typeface="Cambria" pitchFamily="34" charset="-122"/>
                 <a:cs typeface="Cambria" pitchFamily="34" charset="-120"/>
               </a:rPr>
-              <a:t>Architecture — three phases converge on the RAG scorer</a:t>
+              <a:t>Architecture - three phases converge on the RAG scorer</a:t>
             </a:r>
             <a:endParaRPr lang="en-US" sz="3000" dirty="0"/>
           </a:p>
@@ -10602,7 +10676,7 @@
           <a:bodyPr wrap="square" lIns="0" tIns="0" rIns="0" bIns="0" rtlCol="0" anchor="ctr"/>
           <a:lstStyle/>
           <a:p>
-            <a:pPr indent="0" marL="0">
+            <a:pPr marL="0" indent="0">
               <a:buNone/>
             </a:pPr>
             <a:r>
@@ -10646,6 +10720,13 @@
             <a:prstDash val="dash"/>
           </a:ln>
         </p:spPr>
+        <p:txBody>
+          <a:bodyPr/>
+          <a:lstStyle/>
+          <a:p>
+            <a:endParaRPr lang="en-US"/>
+          </a:p>
+        </p:txBody>
       </p:sp>
       <p:sp>
         <p:nvSpPr>
@@ -10668,7 +10749,7 @@
           <a:bodyPr wrap="square" lIns="0" tIns="0" rIns="0" bIns="0" rtlCol="0" anchor="ctr"/>
           <a:lstStyle/>
           <a:p>
-            <a:pPr indent="0" marL="0">
+            <a:pPr marL="0" indent="0">
               <a:buNone/>
             </a:pPr>
             <a:r>
@@ -10715,7 +10796,7 @@
           <a:bodyPr wrap="square" lIns="635" tIns="635" rIns="635" bIns="635" rtlCol="0" anchor="ctr"/>
           <a:lstStyle/>
           <a:p>
-            <a:pPr algn="ctr" indent="0" marL="0">
+            <a:pPr marL="0" indent="0" algn="ctr">
               <a:buNone/>
             </a:pPr>
             <a:r>
@@ -10730,9 +10811,6 @@
               <a:t>GDPR · PECR · DPDP
 </a:t>
             </a:r>
-            <a:pPr algn="ctr" indent="0" marL="0">
-              <a:buNone/>
-            </a:pPr>
             <a:r>
               <a:rPr lang="en-US" sz="950" dirty="0">
                 <a:solidFill>
@@ -10777,7 +10855,7 @@
           <a:bodyPr wrap="square" lIns="635" tIns="635" rIns="635" bIns="635" rtlCol="0" anchor="ctr"/>
           <a:lstStyle/>
           <a:p>
-            <a:pPr algn="ctr" indent="0" marL="0">
+            <a:pPr marL="0" indent="0" algn="ctr">
               <a:buNone/>
             </a:pPr>
             <a:r>
@@ -10792,9 +10870,6 @@
               <a:t>LegalDocumentChunker
 </a:t>
             </a:r>
-            <a:pPr algn="ctr" indent="0" marL="0">
-              <a:buNone/>
-            </a:pPr>
             <a:r>
               <a:rPr lang="en-US" sz="950" dirty="0">
                 <a:solidFill>
@@ -10804,7 +10879,7 @@
                 <a:ea typeface="Calibri" pitchFamily="34" charset="-122"/>
                 <a:cs typeface="Calibri" pitchFamily="34" charset="-120"/>
               </a:rPr>
-              <a:t>by Article / Reg / § — not tokens</a:t>
+              <a:t>by Article / Reg / § - not tokens</a:t>
             </a:r>
             <a:endParaRPr lang="en-US" sz="1200" dirty="0"/>
           </a:p>
@@ -10839,7 +10914,7 @@
           <a:bodyPr wrap="square" lIns="635" tIns="635" rIns="635" bIns="635" rtlCol="0" anchor="ctr"/>
           <a:lstStyle/>
           <a:p>
-            <a:pPr algn="ctr" indent="0" marL="0">
+            <a:pPr marL="0" indent="0" algn="ctr">
               <a:buNone/>
             </a:pPr>
             <a:r>
@@ -10854,9 +10929,6 @@
               <a:t>all-mpnet-base-v2
 </a:t>
             </a:r>
-            <a:pPr algn="ctr" indent="0" marL="0">
-              <a:buNone/>
-            </a:pPr>
             <a:r>
               <a:rPr lang="en-US" sz="950" dirty="0">
                 <a:solidFill>
@@ -10901,7 +10973,7 @@
           <a:bodyPr wrap="square" lIns="635" tIns="635" rIns="635" bIns="635" rtlCol="0" anchor="ctr"/>
           <a:lstStyle/>
           <a:p>
-            <a:pPr algn="ctr" indent="0" marL="0">
+            <a:pPr marL="0" indent="0" algn="ctr">
               <a:buNone/>
             </a:pPr>
             <a:r>
@@ -10916,9 +10988,6 @@
               <a:t>ChromaDB compliance_docs
 </a:t>
             </a:r>
-            <a:pPr algn="ctr" indent="0" marL="0">
-              <a:buNone/>
-            </a:pPr>
             <a:r>
               <a:rPr lang="en-US" sz="950" dirty="0">
                 <a:solidFill>
@@ -10960,6 +11029,13 @@
             <a:prstDash val="dash"/>
           </a:ln>
         </p:spPr>
+        <p:txBody>
+          <a:bodyPr/>
+          <a:lstStyle/>
+          <a:p>
+            <a:endParaRPr lang="en-US"/>
+          </a:p>
+        </p:txBody>
       </p:sp>
       <p:sp>
         <p:nvSpPr>
@@ -10982,7 +11058,7 @@
           <a:bodyPr wrap="square" lIns="0" tIns="0" rIns="0" bIns="0" rtlCol="0" anchor="ctr"/>
           <a:lstStyle/>
           <a:p>
-            <a:pPr indent="0" marL="0">
+            <a:pPr marL="0" indent="0">
               <a:buNone/>
             </a:pPr>
             <a:r>
@@ -11029,7 +11105,7 @@
           <a:bodyPr wrap="square" lIns="635" tIns="635" rIns="635" bIns="635" rtlCol="0" anchor="ctr"/>
           <a:lstStyle/>
           <a:p>
-            <a:pPr algn="ctr" indent="0" marL="0">
+            <a:pPr marL="0" indent="0" algn="ctr">
               <a:buNone/>
             </a:pPr>
             <a:r>
@@ -11044,9 +11120,6 @@
               <a:t>Playwright collector
 </a:t>
             </a:r>
-            <a:pPr algn="ctr" indent="0" marL="0">
-              <a:buNone/>
-            </a:pPr>
             <a:r>
               <a:rPr lang="en-US" sz="950" dirty="0">
                 <a:solidFill>
@@ -11091,7 +11164,7 @@
           <a:bodyPr wrap="square" lIns="635" tIns="635" rIns="635" bIns="635" rtlCol="0" anchor="ctr"/>
           <a:lstStyle/>
           <a:p>
-            <a:pPr algn="ctr" indent="0" marL="0">
+            <a:pPr marL="0" indent="0" algn="ctr">
               <a:buNone/>
             </a:pPr>
             <a:r>
@@ -11106,9 +11179,6 @@
               <a:t>har_extractor
 </a:t>
             </a:r>
-            <a:pPr algn="ctr" indent="0" marL="0">
-              <a:buNone/>
-            </a:pPr>
             <a:r>
               <a:rPr lang="en-US" sz="950" dirty="0">
                 <a:solidFill>
@@ -11153,7 +11223,7 @@
           <a:bodyPr wrap="square" lIns="635" tIns="635" rIns="635" bIns="635" rtlCol="0" anchor="ctr"/>
           <a:lstStyle/>
           <a:p>
-            <a:pPr algn="ctr" indent="0" marL="0">
+            <a:pPr marL="0" indent="0" algn="ctr">
               <a:buNone/>
             </a:pPr>
             <a:r>
@@ -11168,9 +11238,6 @@
               <a:t>policy_scraper
 </a:t>
             </a:r>
-            <a:pPr algn="ctr" indent="0" marL="0">
-              <a:buNone/>
-            </a:pPr>
             <a:r>
               <a:rPr lang="en-US" sz="950" dirty="0">
                 <a:solidFill>
@@ -11212,6 +11279,13 @@
             <a:prstDash val="dash"/>
           </a:ln>
         </p:spPr>
+        <p:txBody>
+          <a:bodyPr/>
+          <a:lstStyle/>
+          <a:p>
+            <a:endParaRPr lang="en-US"/>
+          </a:p>
+        </p:txBody>
       </p:sp>
       <p:sp>
         <p:nvSpPr>
@@ -11234,7 +11308,7 @@
           <a:bodyPr wrap="square" lIns="0" tIns="0" rIns="0" bIns="0" rtlCol="0" anchor="ctr"/>
           <a:lstStyle/>
           <a:p>
-            <a:pPr indent="0" marL="0">
+            <a:pPr marL="0" indent="0">
               <a:buNone/>
             </a:pPr>
             <a:r>
@@ -11281,7 +11355,7 @@
           <a:bodyPr wrap="square" lIns="635" tIns="635" rIns="635" bIns="635" rtlCol="0" anchor="ctr"/>
           <a:lstStyle/>
           <a:p>
-            <a:pPr algn="ctr" indent="0" marL="0">
+            <a:pPr marL="0" indent="0" algn="ctr">
               <a:buNone/>
             </a:pPr>
             <a:r>
@@ -11296,9 +11370,6 @@
               <a:t>Dimension-anchored retrieval
 </a:t>
             </a:r>
-            <a:pPr algn="ctr" indent="0" marL="0">
-              <a:buNone/>
-            </a:pPr>
             <a:r>
               <a:rPr lang="en-US" sz="950" dirty="0">
                 <a:solidFill>
@@ -11343,7 +11414,7 @@
           <a:bodyPr wrap="square" lIns="635" tIns="635" rIns="635" bIns="635" rtlCol="0" anchor="ctr"/>
           <a:lstStyle/>
           <a:p>
-            <a:pPr algn="ctr" indent="0" marL="0">
+            <a:pPr marL="0" indent="0" algn="ctr">
               <a:buNone/>
             </a:pPr>
             <a:r>
@@ -11358,9 +11429,6 @@
               <a:t>IRAC scorer (LLM, temp 0)
 </a:t>
             </a:r>
-            <a:pPr algn="ctr" indent="0" marL="0">
-              <a:buNone/>
-            </a:pPr>
             <a:r>
               <a:rPr lang="en-US" sz="950" dirty="0">
                 <a:solidFill>
@@ -11405,7 +11473,7 @@
           <a:bodyPr wrap="square" lIns="635" tIns="635" rIns="635" bIns="635" rtlCol="0" anchor="ctr"/>
           <a:lstStyle/>
           <a:p>
-            <a:pPr algn="ctr" indent="0" marL="0">
+            <a:pPr marL="0" indent="0" algn="ctr">
               <a:buNone/>
             </a:pPr>
             <a:r>
@@ -11420,9 +11488,6 @@
               <a:t>Severity-weighted report
 </a:t>
             </a:r>
-            <a:pPr algn="ctr" indent="0" marL="0">
-              <a:buNone/>
-            </a:pPr>
             <a:r>
               <a:rPr lang="en-US" sz="950" dirty="0">
                 <a:solidFill>
@@ -11461,6 +11526,13 @@
             <a:tailEnd type="triangle"/>
           </a:ln>
         </p:spPr>
+        <p:txBody>
+          <a:bodyPr/>
+          <a:lstStyle/>
+          <a:p>
+            <a:endParaRPr lang="en-US"/>
+          </a:p>
+        </p:txBody>
       </p:sp>
       <p:sp>
         <p:nvSpPr>
@@ -11485,6 +11557,13 @@
             <a:tailEnd type="triangle"/>
           </a:ln>
         </p:spPr>
+        <p:txBody>
+          <a:bodyPr/>
+          <a:lstStyle/>
+          <a:p>
+            <a:endParaRPr lang="en-US"/>
+          </a:p>
+        </p:txBody>
       </p:sp>
       <p:sp>
         <p:nvSpPr>
@@ -11511,7 +11590,7 @@
           <a:bodyPr wrap="square" lIns="0" tIns="0" rIns="0" bIns="0" rtlCol="0" anchor="ctr"/>
           <a:lstStyle/>
           <a:p>
-            <a:pPr algn="ctr" indent="0" marL="0">
+            <a:pPr marL="0" indent="0" algn="ctr">
               <a:buNone/>
             </a:pPr>
             <a:r>
@@ -11554,7 +11633,7 @@
           <a:bodyPr wrap="square" lIns="0" tIns="0" rIns="0" bIns="0" rtlCol="0" anchor="ctr"/>
           <a:lstStyle/>
           <a:p>
-            <a:pPr algn="ctr" indent="0" marL="0">
+            <a:pPr marL="0" indent="0" algn="ctr">
               <a:buNone/>
             </a:pPr>
             <a:r>
@@ -11597,7 +11676,7 @@
           <a:bodyPr wrap="square" lIns="0" tIns="0" rIns="0" bIns="0" rtlCol="0" anchor="ctr"/>
           <a:lstStyle/>
           <a:p>
-            <a:pPr algn="ctr" indent="0" marL="0">
+            <a:pPr marL="0" indent="0" algn="ctr">
               <a:buNone/>
             </a:pPr>
             <a:r>
@@ -11636,7 +11715,7 @@
           <a:bodyPr wrap="square" lIns="0" tIns="0" rIns="0" bIns="0" rtlCol="0" anchor="ctr"/>
           <a:lstStyle/>
           <a:p>
-            <a:pPr algn="r" indent="0" marL="0">
+            <a:pPr marL="0" indent="0" algn="r">
               <a:buNone/>
             </a:pPr>
             <a:r>
@@ -11648,7 +11727,7 @@
                 <a:ea typeface="Calibri" pitchFamily="34" charset="-122"/>
                 <a:cs typeface="Calibri" pitchFamily="34" charset="-120"/>
               </a:rPr>
-              <a:t>comp_square · primary research update — 6</a:t>
+              <a:t>comp_square · primary research update - 6</a:t>
             </a:r>
             <a:endParaRPr lang="en-US" sz="900" dirty="0"/>
           </a:p>
@@ -11670,6 +11749,7 @@
         <a:solidFill>
           <a:srgbClr val="FFFFFF"/>
         </a:solidFill>
+        <a:effectLst/>
       </p:bgPr>
     </p:bg>
     <p:spTree>
@@ -11707,7 +11787,7 @@
           <a:bodyPr wrap="square" lIns="0" tIns="0" rIns="0" bIns="0" rtlCol="0" anchor="ctr"/>
           <a:lstStyle/>
           <a:p>
-            <a:pPr indent="0" marL="0">
+            <a:pPr marL="0" indent="0">
               <a:buNone/>
             </a:pPr>
             <a:r>
@@ -11719,7 +11799,7 @@
                 <a:ea typeface="Cambria" pitchFamily="34" charset="-122"/>
                 <a:cs typeface="Cambria" pitchFamily="34" charset="-120"/>
               </a:rPr>
-              <a:t>Model choices — and the evidence behind each</a:t>
+              <a:t>Model choices - and the evidence behind each</a:t>
             </a:r>
             <a:endParaRPr lang="en-US" sz="3000" dirty="0"/>
           </a:p>
@@ -11746,7 +11826,7 @@
           <a:bodyPr wrap="square" lIns="0" tIns="0" rIns="0" bIns="0" rtlCol="0" anchor="ctr"/>
           <a:lstStyle/>
           <a:p>
-            <a:pPr indent="0" marL="0">
+            <a:pPr marL="0" indent="0">
               <a:buNone/>
             </a:pPr>
             <a:r>
@@ -11785,7 +11865,7 @@
           <a:bodyPr wrap="square" lIns="0" tIns="0" rIns="0" bIns="0" rtlCol="0" anchor="ctr"/>
           <a:lstStyle/>
           <a:p>
-            <a:pPr indent="0" marL="0">
+            <a:pPr marL="0" indent="0">
               <a:buNone/>
             </a:pPr>
             <a:r>
@@ -11797,7 +11877,7 @@
                 <a:ea typeface="Cambria" pitchFamily="34" charset="-122"/>
                 <a:cs typeface="Cambria" pitchFamily="34" charset="-120"/>
               </a:rPr>
-              <a:t>Embedder — changed on evidence</a:t>
+              <a:t>Embedder - changed on evidence</a:t>
             </a:r>
             <a:endParaRPr lang="en-US" sz="1600" dirty="0"/>
           </a:p>
@@ -11828,7 +11908,7 @@
           <a:bodyPr wrap="square" lIns="1778" tIns="1778" rIns="1778" bIns="1778" rtlCol="0" anchor="t"/>
           <a:lstStyle/>
           <a:p>
-            <a:pPr indent="0" marL="0">
+            <a:pPr marL="0" indent="0">
               <a:spcAft>
                 <a:spcPts val="600"/>
               </a:spcAft>
@@ -11864,7 +11944,7 @@
                 <a:ea typeface="Calibri" pitchFamily="34" charset="-122"/>
                 <a:cs typeface="Calibri" pitchFamily="34" charset="-120"/>
               </a:rPr>
-              <a:t>Plan A (legal-BERT): legal vocabulary — but it is a raw BERT, not sentence-trained</a:t>
+              <a:t>Plan A (legal-BERT): legal vocabulary - but it is a raw BERT, not sentence-trained</a:t>
             </a:r>
             <a:endParaRPr lang="en-US" sz="1250" dirty="0"/>
           </a:p>
@@ -11954,7 +12034,7 @@
           <a:bodyPr wrap="square" lIns="0" tIns="0" rIns="0" bIns="0" rtlCol="0" anchor="ctr"/>
           <a:lstStyle/>
           <a:p>
-            <a:pPr indent="0" marL="0">
+            <a:pPr marL="0" indent="0">
               <a:buNone/>
             </a:pPr>
             <a:r>
@@ -11966,7 +12046,7 @@
                 <a:ea typeface="Cambria" pitchFamily="34" charset="-122"/>
                 <a:cs typeface="Cambria" pitchFamily="34" charset="-120"/>
               </a:rPr>
-              <a:t>Scorer LLM — provider-agnostic</a:t>
+              <a:t>Scorer LLM - provider-agnostic</a:t>
             </a:r>
             <a:endParaRPr lang="en-US" sz="1600" dirty="0"/>
           </a:p>
@@ -11997,7 +12077,7 @@
           <a:bodyPr wrap="square" lIns="1778" tIns="1778" rIns="1778" bIns="1778" rtlCol="0" anchor="t"/>
           <a:lstStyle/>
           <a:p>
-            <a:pPr indent="0" marL="0">
+            <a:pPr marL="0" indent="0">
               <a:spcAft>
                 <a:spcPts val="600"/>
               </a:spcAft>
@@ -12054,7 +12134,7 @@
                 <a:ea typeface="Calibri" pitchFamily="34" charset="-122"/>
                 <a:cs typeface="Calibri" pitchFamily="34" charset="-120"/>
               </a:rPr>
-              <a:t>temperature = 0 — reproducible runs for evaluation</a:t>
+              <a:t>temperature = 0 - reproducible runs for evaluation</a:t>
             </a:r>
             <a:endParaRPr lang="en-US" sz="1250" dirty="0"/>
           </a:p>
@@ -12123,7 +12203,7 @@
           <a:bodyPr wrap="square" lIns="0" tIns="0" rIns="0" bIns="0" rtlCol="0" anchor="ctr"/>
           <a:lstStyle/>
           <a:p>
-            <a:pPr indent="0" marL="0">
+            <a:pPr marL="0" indent="0">
               <a:buNone/>
             </a:pPr>
             <a:r>
@@ -12135,7 +12215,7 @@
                 <a:ea typeface="Cambria" pitchFamily="34" charset="-122"/>
                 <a:cs typeface="Cambria" pitchFamily="34" charset="-120"/>
               </a:rPr>
-              <a:t>Retrieval — anchored + filtered</a:t>
+              <a:t>Retrieval - anchored + filtered</a:t>
             </a:r>
             <a:endParaRPr lang="en-US" sz="1600" dirty="0"/>
           </a:p>
@@ -12166,7 +12246,7 @@
           <a:bodyPr wrap="square" lIns="1778" tIns="1778" rIns="1778" bIns="1778" rtlCol="0" anchor="t"/>
           <a:lstStyle/>
           <a:p>
-            <a:pPr indent="0" marL="0">
+            <a:pPr marL="0" indent="0">
               <a:spcAft>
                 <a:spcPts val="600"/>
               </a:spcAft>
@@ -12271,7 +12351,7 @@
           <a:bodyPr wrap="square" lIns="0" tIns="0" rIns="0" bIns="0" rtlCol="0" anchor="ctr"/>
           <a:lstStyle/>
           <a:p>
-            <a:pPr algn="r" indent="0" marL="0">
+            <a:pPr marL="0" indent="0" algn="r">
               <a:buNone/>
             </a:pPr>
             <a:r>
@@ -12283,7 +12363,7 @@
                 <a:ea typeface="Calibri" pitchFamily="34" charset="-122"/>
                 <a:cs typeface="Calibri" pitchFamily="34" charset="-120"/>
               </a:rPr>
-              <a:t>comp_square · primary research update — 7</a:t>
+              <a:t>comp_square · primary research update - 7</a:t>
             </a:r>
             <a:endParaRPr lang="en-US" sz="900" dirty="0"/>
           </a:p>
@@ -12305,6 +12385,7 @@
         <a:solidFill>
           <a:srgbClr val="FFFFFF"/>
         </a:solidFill>
+        <a:effectLst/>
       </p:bgPr>
     </p:bg>
     <p:spTree>
@@ -12342,7 +12423,7 @@
           <a:bodyPr wrap="square" lIns="0" tIns="0" rIns="0" bIns="0" rtlCol="0" anchor="ctr"/>
           <a:lstStyle/>
           <a:p>
-            <a:pPr indent="0" marL="0">
+            <a:pPr marL="0" indent="0">
               <a:buNone/>
             </a:pPr>
             <a:r>
@@ -12354,7 +12435,7 @@
                 <a:ea typeface="Cambria" pitchFamily="34" charset="-122"/>
                 <a:cs typeface="Cambria" pitchFamily="34" charset="-120"/>
               </a:rPr>
-              <a:t>Code provenance — mine · adapted · reused</a:t>
+              <a:t>Code provenance - mine · adapted · reused</a:t>
             </a:r>
             <a:endParaRPr lang="en-US" sz="3000" dirty="0"/>
           </a:p>
@@ -12381,7 +12462,7 @@
           <a:bodyPr wrap="square" lIns="0" tIns="0" rIns="0" bIns="0" rtlCol="0" anchor="ctr"/>
           <a:lstStyle/>
           <a:p>
-            <a:pPr indent="0" marL="0">
+            <a:pPr marL="0" indent="0">
               <a:buNone/>
             </a:pPr>
             <a:r>
@@ -12424,7 +12505,7 @@
           <a:bodyPr wrap="square" lIns="0" tIns="0" rIns="0" bIns="0" rtlCol="0" anchor="ctr"/>
           <a:lstStyle/>
           <a:p>
-            <a:pPr algn="ctr" indent="0" marL="0">
+            <a:pPr marL="0" indent="0" algn="ctr">
               <a:buNone/>
             </a:pPr>
             <a:r>
@@ -12598,7 +12679,7 @@
           <a:bodyPr wrap="square" lIns="0" tIns="0" rIns="0" bIns="0" rtlCol="0" anchor="ctr"/>
           <a:lstStyle/>
           <a:p>
-            <a:pPr algn="ctr" indent="0" marL="0">
+            <a:pPr marL="0" indent="0" algn="ctr">
               <a:buNone/>
             </a:pPr>
             <a:r>
@@ -12772,7 +12853,7 @@
           <a:bodyPr wrap="square" lIns="0" tIns="0" rIns="0" bIns="0" rtlCol="0" anchor="ctr"/>
           <a:lstStyle/>
           <a:p>
-            <a:pPr algn="ctr" indent="0" marL="0">
+            <a:pPr marL="0" indent="0" algn="ctr">
               <a:buNone/>
             </a:pPr>
             <a:r>
@@ -12925,7 +13006,7 @@
           <a:bodyPr wrap="square" lIns="1778" tIns="1778" rIns="1778" bIns="1778" rtlCol="0" anchor="ctr"/>
           <a:lstStyle/>
           <a:p>
-            <a:pPr indent="0" marL="0">
+            <a:pPr marL="0" indent="0">
               <a:buNone/>
             </a:pPr>
             <a:r>
@@ -12939,9 +13020,6 @@
               </a:rPr>
               <a:t>Why not run CookieCheck / alsacnc directly?  </a:t>
             </a:r>
-            <a:pPr indent="0" marL="0">
-              <a:buNone/>
-            </a:pPr>
             <a:r>
               <a:rPr lang="en-US" sz="1200" dirty="0">
                 <a:solidFill>
@@ -12951,7 +13029,7 @@
                 <a:ea typeface="Calibri" pitchFamily="34" charset="-122"/>
                 <a:cs typeface="Calibri" pitchFamily="34" charset="-120"/>
               </a:rPr>
-              <a:t>CookieCheck (2017): unmaintained, measurement-only, aggregate statistics. alsacnc: infrastructure for 97k-site crawls (Postgres + GPU + translation stack). Both answer “how many sites violate?” — we answer “what is THIS site doing wrong, under which article, contradicted by which policy sentence?” No existing system does law+notice+practice; we adopt their validated rules, not their pipelines.</a:t>
+              <a:t>CookieCheck (2017): unmaintained, measurement-only, aggregate statistics. alsacnc: infrastructure for 97k-site crawls (Postgres + GPU + translation stack). Both answer “how many sites violate?” - we answer “what is THIS site doing wrong, under which article, contradicted by which policy sentence?” No existing system does law+notice+practice; we adopt their validated rules, not their pipelines.</a:t>
             </a:r>
             <a:endParaRPr lang="en-US" sz="1200" dirty="0"/>
           </a:p>
@@ -12978,7 +13056,7 @@
           <a:bodyPr wrap="square" lIns="0" tIns="0" rIns="0" bIns="0" rtlCol="0" anchor="ctr"/>
           <a:lstStyle/>
           <a:p>
-            <a:pPr algn="r" indent="0" marL="0">
+            <a:pPr marL="0" indent="0" algn="r">
               <a:buNone/>
             </a:pPr>
             <a:r>
@@ -12990,7 +13068,7 @@
                 <a:ea typeface="Calibri" pitchFamily="34" charset="-122"/>
                 <a:cs typeface="Calibri" pitchFamily="34" charset="-120"/>
               </a:rPr>
-              <a:t>comp_square · primary research update — 8</a:t>
+              <a:t>comp_square · primary research update - 8</a:t>
             </a:r>
             <a:endParaRPr lang="en-US" sz="900" dirty="0"/>
           </a:p>
@@ -13012,6 +13090,7 @@
         <a:solidFill>
           <a:srgbClr val="FFFFFF"/>
         </a:solidFill>
+        <a:effectLst/>
       </p:bgPr>
     </p:bg>
     <p:spTree>
@@ -13049,7 +13128,7 @@
           <a:bodyPr wrap="square" lIns="0" tIns="0" rIns="0" bIns="0" rtlCol="0" anchor="ctr"/>
           <a:lstStyle/>
           <a:p>
-            <a:pPr indent="0" marL="0">
+            <a:pPr marL="0" indent="0">
               <a:buNone/>
             </a:pPr>
             <a:r>
@@ -13061,7 +13140,7 @@
                 <a:ea typeface="Cambria" pitchFamily="34" charset="-122"/>
                 <a:cs typeface="Cambria" pitchFamily="34" charset="-120"/>
               </a:rPr>
-              <a:t>Built and verified — module status</a:t>
+              <a:t>Built and verified - module status</a:t>
             </a:r>
             <a:endParaRPr lang="en-US" sz="3000" dirty="0"/>
           </a:p>
@@ -13088,7 +13167,7 @@
           <a:bodyPr wrap="square" lIns="0" tIns="0" rIns="0" bIns="0" rtlCol="0" anchor="ctr"/>
           <a:lstStyle/>
           <a:p>
-            <a:pPr indent="0" marL="0">
+            <a:pPr marL="0" indent="0">
               <a:buNone/>
             </a:pPr>
             <a:r>
@@ -13122,16 +13201,34 @@
         </p:nvGraphicFramePr>
         <p:xfrm>
           <a:off x="548640" y="1463040"/>
-          <a:ext cx="11091672" cy="914400"/>
+          <a:ext cx="11091672" cy="4535424"/>
         </p:xfrm>
         <a:graphic>
           <a:graphicData uri="http://schemas.openxmlformats.org/drawingml/2006/table">
             <a:tbl>
               <a:tblPr/>
               <a:tblGrid>
-                <a:gridCol w="5760720"/>
-                <a:gridCol w="1554480"/>
-                <a:gridCol w="3776472"/>
+                <a:gridCol w="5760720">
+                  <a:extLst>
+                    <a:ext uri="{9D8B030D-6E8A-4147-A177-3AD203B41FA5}">
+                      <a16:colId xmlns:a16="http://schemas.microsoft.com/office/drawing/2014/main" val="20000"/>
+                    </a:ext>
+                  </a:extLst>
+                </a:gridCol>
+                <a:gridCol w="1554480">
+                  <a:extLst>
+                    <a:ext uri="{9D8B030D-6E8A-4147-A177-3AD203B41FA5}">
+                      <a16:colId xmlns:a16="http://schemas.microsoft.com/office/drawing/2014/main" val="20001"/>
+                    </a:ext>
+                  </a:extLst>
+                </a:gridCol>
+                <a:gridCol w="3776472">
+                  <a:extLst>
+                    <a:ext uri="{9D8B030D-6E8A-4147-A177-3AD203B41FA5}">
+                      <a16:colId xmlns:a16="http://schemas.microsoft.com/office/drawing/2014/main" val="20002"/>
+                    </a:ext>
+                  </a:extLst>
+                </a:gridCol>
               </a:tblGrid>
               <a:tr h="566928">
                 <a:tc>
@@ -13139,7 +13236,7 @@
                     <a:bodyPr/>
                     <a:lstStyle/>
                     <a:p>
-                      <a:pPr indent="0" marL="0">
+                      <a:pPr marL="0" indent="0">
                         <a:buNone/>
                       </a:pPr>
                       <a:r>
@@ -13160,7 +13257,7 @@
                       </a:endParaRPr>
                     </a:p>
                   </a:txBody>
-                  <a:tcPr marL="91440" marR="91440" marT="45720" marB="45720" anchor="ctr">
+                  <a:tcPr anchor="ctr">
                     <a:lnL w="6350" cap="flat" cmpd="sng" algn="ctr">
                       <a:solidFill>
                         <a:srgbClr val="D8DEEA"/>
@@ -13207,7 +13304,7 @@
                     <a:bodyPr/>
                     <a:lstStyle/>
                     <a:p>
-                      <a:pPr indent="0" marL="0">
+                      <a:pPr marL="0" indent="0">
                         <a:buNone/>
                       </a:pPr>
                       <a:r>
@@ -13228,7 +13325,7 @@
                       </a:endParaRPr>
                     </a:p>
                   </a:txBody>
-                  <a:tcPr marL="91440" marR="91440" marT="45720" marB="45720" anchor="ctr">
+                  <a:tcPr anchor="ctr">
                     <a:lnL w="6350" cap="flat" cmpd="sng" algn="ctr">
                       <a:solidFill>
                         <a:srgbClr val="D8DEEA"/>
@@ -13275,7 +13372,7 @@
                     <a:bodyPr/>
                     <a:lstStyle/>
                     <a:p>
-                      <a:pPr indent="0" marL="0">
+                      <a:pPr marL="0" indent="0">
                         <a:buNone/>
                       </a:pPr>
                       <a:r>
@@ -13296,7 +13393,7 @@
                       </a:endParaRPr>
                     </a:p>
                   </a:txBody>
-                  <a:tcPr marL="91440" marR="91440" marT="45720" marB="45720" anchor="ctr">
+                  <a:tcPr anchor="ctr">
                     <a:lnL w="6350" cap="flat" cmpd="sng" algn="ctr">
                       <a:solidFill>
                         <a:srgbClr val="D8DEEA"/>
@@ -13338,6 +13435,11 @@
                     </a:solidFill>
                   </a:tcPr>
                 </a:tc>
+                <a:extLst>
+                  <a:ext uri="{0D108BD9-81ED-4DB2-BD59-A6C34878D82A}">
+                    <a16:rowId xmlns:a16="http://schemas.microsoft.com/office/drawing/2014/main" val="10000"/>
+                  </a:ext>
+                </a:extLst>
               </a:tr>
               <a:tr h="566928">
                 <a:tc>
@@ -13345,9 +13447,20 @@
                     <a:bodyPr/>
                     <a:lstStyle/>
                     <a:p>
-                      <a:pPr indent="0" marL="0">
+                      <a:pPr marL="0" indent="0">
                         <a:buNone/>
                       </a:pPr>
+                      <a:r>
+                        <a:rPr lang="en-US" sz="1050" dirty="0" err="1">
+                          <a:solidFill>
+                            <a:srgbClr val="1A1A2E"/>
+                          </a:solidFill>
+                          <a:latin typeface="Calibri" pitchFamily="34" charset="0"/>
+                          <a:ea typeface="Calibri" pitchFamily="34" charset="-122"/>
+                          <a:cs typeface="Calibri" pitchFamily="34" charset="-120"/>
+                        </a:rPr>
+                        <a:t>telemetry_collector.py</a:t>
+                      </a:r>
                       <a:r>
                         <a:rPr lang="en-US" sz="1050" dirty="0">
                           <a:solidFill>
@@ -13357,7 +13470,7 @@
                           <a:ea typeface="Calibri" pitchFamily="34" charset="-122"/>
                           <a:cs typeface="Calibri" pitchFamily="34" charset="-120"/>
                         </a:rPr>
-                        <a:t>telemetry_collector.py — HAR, fingerprint traps, consent-UI tagging</a:t>
+                        <a:t> - HAR, fingerprint traps, consent-UI tagging</a:t>
                       </a:r>
                       <a:endParaRPr lang="en-US" sz="1050" dirty="0">
                         <a:latin typeface="Calibri" charset="0"/>
@@ -13366,7 +13479,7 @@
                       </a:endParaRPr>
                     </a:p>
                   </a:txBody>
-                  <a:tcPr marL="91440" marR="91440" marT="45720" marB="45720" anchor="ctr">
+                  <a:tcPr anchor="ctr">
                     <a:lnL w="6350" cap="flat" cmpd="sng" algn="ctr">
                       <a:solidFill>
                         <a:srgbClr val="D8DEEA"/>
@@ -13410,7 +13523,7 @@
                     <a:bodyPr/>
                     <a:lstStyle/>
                     <a:p>
-                      <a:pPr indent="0" marL="0">
+                      <a:pPr marL="0" indent="0">
                         <a:buNone/>
                       </a:pPr>
                       <a:r>
@@ -13431,7 +13544,7 @@
                       </a:endParaRPr>
                     </a:p>
                   </a:txBody>
-                  <a:tcPr marL="91440" marR="91440" marT="45720" marB="45720" anchor="ctr">
+                  <a:tcPr anchor="ctr">
                     <a:lnL w="6350" cap="flat" cmpd="sng" algn="ctr">
                       <a:solidFill>
                         <a:srgbClr val="D8DEEA"/>
@@ -13475,7 +13588,7 @@
                     <a:bodyPr/>
                     <a:lstStyle/>
                     <a:p>
-                      <a:pPr indent="0" marL="0">
+                      <a:pPr marL="0" indent="0">
                         <a:buNone/>
                       </a:pPr>
                       <a:r>
@@ -13496,7 +13609,7 @@
                       </a:endParaRPr>
                     </a:p>
                   </a:txBody>
-                  <a:tcPr marL="91440" marR="91440" marT="45720" marB="45720" anchor="ctr">
+                  <a:tcPr anchor="ctr">
                     <a:lnL w="6350" cap="flat" cmpd="sng" algn="ctr">
                       <a:solidFill>
                         <a:srgbClr val="D8DEEA"/>
@@ -13535,6 +13648,11 @@
                     </a:lnB>
                   </a:tcPr>
                 </a:tc>
+                <a:extLst>
+                  <a:ext uri="{0D108BD9-81ED-4DB2-BD59-A6C34878D82A}">
+                    <a16:rowId xmlns:a16="http://schemas.microsoft.com/office/drawing/2014/main" val="10001"/>
+                  </a:ext>
+                </a:extLst>
               </a:tr>
               <a:tr h="566928">
                 <a:tc>
@@ -13542,7 +13660,7 @@
                     <a:bodyPr/>
                     <a:lstStyle/>
                     <a:p>
-                      <a:pPr indent="0" marL="0">
+                      <a:pPr marL="0" indent="0">
                         <a:buNone/>
                       </a:pPr>
                       <a:r>
@@ -13554,7 +13672,7 @@
                           <a:ea typeface="Calibri" pitchFamily="34" charset="-122"/>
                           <a:cs typeface="Calibri" pitchFamily="34" charset="-120"/>
                         </a:rPr>
-                        <a:t>policy_scraper_2.py — discovery, classification, markdown export</a:t>
+                        <a:t>policy_scraper_2.py - discovery, classification, markdown export</a:t>
                       </a:r>
                       <a:endParaRPr lang="en-US" sz="1050" dirty="0">
                         <a:latin typeface="Calibri" charset="0"/>
@@ -13563,7 +13681,7 @@
                       </a:endParaRPr>
                     </a:p>
                   </a:txBody>
-                  <a:tcPr marL="91440" marR="91440" marT="45720" marB="45720" anchor="ctr">
+                  <a:tcPr anchor="ctr">
                     <a:lnL w="6350" cap="flat" cmpd="sng" algn="ctr">
                       <a:solidFill>
                         <a:srgbClr val="D8DEEA"/>
@@ -13607,7 +13725,7 @@
                     <a:bodyPr/>
                     <a:lstStyle/>
                     <a:p>
-                      <a:pPr indent="0" marL="0">
+                      <a:pPr marL="0" indent="0">
                         <a:buNone/>
                       </a:pPr>
                       <a:r>
@@ -13628,7 +13746,7 @@
                       </a:endParaRPr>
                     </a:p>
                   </a:txBody>
-                  <a:tcPr marL="91440" marR="91440" marT="45720" marB="45720" anchor="ctr">
+                  <a:tcPr anchor="ctr">
                     <a:lnL w="6350" cap="flat" cmpd="sng" algn="ctr">
                       <a:solidFill>
                         <a:srgbClr val="D8DEEA"/>
@@ -13672,7 +13790,7 @@
                     <a:bodyPr/>
                     <a:lstStyle/>
                     <a:p>
-                      <a:pPr indent="0" marL="0">
+                      <a:pPr marL="0" indent="0">
                         <a:buNone/>
                       </a:pPr>
                       <a:r>
@@ -13693,7 +13811,7 @@
                       </a:endParaRPr>
                     </a:p>
                   </a:txBody>
-                  <a:tcPr marL="91440" marR="91440" marT="45720" marB="45720" anchor="ctr">
+                  <a:tcPr anchor="ctr">
                     <a:lnL w="6350" cap="flat" cmpd="sng" algn="ctr">
                       <a:solidFill>
                         <a:srgbClr val="D8DEEA"/>
@@ -13732,6 +13850,11 @@
                     </a:lnB>
                   </a:tcPr>
                 </a:tc>
+                <a:extLst>
+                  <a:ext uri="{0D108BD9-81ED-4DB2-BD59-A6C34878D82A}">
+                    <a16:rowId xmlns:a16="http://schemas.microsoft.com/office/drawing/2014/main" val="10002"/>
+                  </a:ext>
+                </a:extLst>
               </a:tr>
               <a:tr h="566928">
                 <a:tc>
@@ -13739,7 +13862,7 @@
                     <a:bodyPr/>
                     <a:lstStyle/>
                     <a:p>
-                      <a:pPr indent="0" marL="0">
+                      <a:pPr marL="0" indent="0">
                         <a:buNone/>
                       </a:pPr>
                       <a:r>
@@ -13751,7 +13874,7 @@
                           <a:ea typeface="Calibri" pitchFamily="34" charset="-122"/>
                           <a:cs typeface="Calibri" pitchFamily="34" charset="-120"/>
                         </a:rPr>
-                        <a:t>ingestion — HTML/PDF chunking by legal unit + ChromaDB</a:t>
+                        <a:t>ingestion - HTML/PDF chunking by legal unit + ChromaDB</a:t>
                       </a:r>
                       <a:endParaRPr lang="en-US" sz="1050" dirty="0">
                         <a:latin typeface="Calibri" charset="0"/>
@@ -13760,7 +13883,7 @@
                       </a:endParaRPr>
                     </a:p>
                   </a:txBody>
-                  <a:tcPr marL="91440" marR="91440" marT="45720" marB="45720" anchor="ctr">
+                  <a:tcPr anchor="ctr">
                     <a:lnL w="6350" cap="flat" cmpd="sng" algn="ctr">
                       <a:solidFill>
                         <a:srgbClr val="D8DEEA"/>
@@ -13804,7 +13927,7 @@
                     <a:bodyPr/>
                     <a:lstStyle/>
                     <a:p>
-                      <a:pPr indent="0" marL="0">
+                      <a:pPr marL="0" indent="0">
                         <a:buNone/>
                       </a:pPr>
                       <a:r>
@@ -13825,7 +13948,7 @@
                       </a:endParaRPr>
                     </a:p>
                   </a:txBody>
-                  <a:tcPr marL="91440" marR="91440" marT="45720" marB="45720" anchor="ctr">
+                  <a:tcPr anchor="ctr">
                     <a:lnL w="6350" cap="flat" cmpd="sng" algn="ctr">
                       <a:solidFill>
                         <a:srgbClr val="D8DEEA"/>
@@ -13869,7 +13992,7 @@
                     <a:bodyPr/>
                     <a:lstStyle/>
                     <a:p>
-                      <a:pPr indent="0" marL="0">
+                      <a:pPr marL="0" indent="0">
                         <a:buNone/>
                       </a:pPr>
                       <a:r>
@@ -13890,7 +14013,7 @@
                       </a:endParaRPr>
                     </a:p>
                   </a:txBody>
-                  <a:tcPr marL="91440" marR="91440" marT="45720" marB="45720" anchor="ctr">
+                  <a:tcPr anchor="ctr">
                     <a:lnL w="6350" cap="flat" cmpd="sng" algn="ctr">
                       <a:solidFill>
                         <a:srgbClr val="D8DEEA"/>
@@ -13929,6 +14052,11 @@
                     </a:lnB>
                   </a:tcPr>
                 </a:tc>
+                <a:extLst>
+                  <a:ext uri="{0D108BD9-81ED-4DB2-BD59-A6C34878D82A}">
+                    <a16:rowId xmlns:a16="http://schemas.microsoft.com/office/drawing/2014/main" val="10003"/>
+                  </a:ext>
+                </a:extLst>
               </a:tr>
               <a:tr h="566928">
                 <a:tc>
@@ -13936,9 +14064,20 @@
                     <a:bodyPr/>
                     <a:lstStyle/>
                     <a:p>
-                      <a:pPr indent="0" marL="0">
+                      <a:pPr marL="0" indent="0">
                         <a:buNone/>
                       </a:pPr>
+                      <a:r>
+                        <a:rPr lang="en-US" sz="1050" dirty="0" err="1">
+                          <a:solidFill>
+                            <a:srgbClr val="1A1A2E"/>
+                          </a:solidFill>
+                          <a:latin typeface="Calibri" pitchFamily="34" charset="0"/>
+                          <a:ea typeface="Calibri" pitchFamily="34" charset="-122"/>
+                          <a:cs typeface="Calibri" pitchFamily="34" charset="-120"/>
+                        </a:rPr>
+                        <a:t>har_extractor.py</a:t>
+                      </a:r>
                       <a:r>
                         <a:rPr lang="en-US" sz="1050" dirty="0">
                           <a:solidFill>
@@ -13948,7 +14087,7 @@
                           <a:ea typeface="Calibri" pitchFamily="34" charset="-122"/>
                           <a:cs typeface="Calibri" pitchFamily="34" charset="-120"/>
                         </a:rPr>
-                        <a:t>har_extractor.py — profiling-cookie rule, evidence dict</a:t>
+                        <a:t> - profiling-cookie rule, evidence dict</a:t>
                       </a:r>
                       <a:endParaRPr lang="en-US" sz="1050" dirty="0">
                         <a:latin typeface="Calibri" charset="0"/>
@@ -13957,7 +14096,7 @@
                       </a:endParaRPr>
                     </a:p>
                   </a:txBody>
-                  <a:tcPr marL="91440" marR="91440" marT="45720" marB="45720" anchor="ctr">
+                  <a:tcPr anchor="ctr">
                     <a:lnL w="6350" cap="flat" cmpd="sng" algn="ctr">
                       <a:solidFill>
                         <a:srgbClr val="D8DEEA"/>
@@ -14001,7 +14140,7 @@
                     <a:bodyPr/>
                     <a:lstStyle/>
                     <a:p>
-                      <a:pPr indent="0" marL="0">
+                      <a:pPr marL="0" indent="0">
                         <a:buNone/>
                       </a:pPr>
                       <a:r>
@@ -14022,7 +14161,7 @@
                       </a:endParaRPr>
                     </a:p>
                   </a:txBody>
-                  <a:tcPr marL="91440" marR="91440" marT="45720" marB="45720" anchor="ctr">
+                  <a:tcPr anchor="ctr">
                     <a:lnL w="6350" cap="flat" cmpd="sng" algn="ctr">
                       <a:solidFill>
                         <a:srgbClr val="D8DEEA"/>
@@ -14066,7 +14205,7 @@
                     <a:bodyPr/>
                     <a:lstStyle/>
                     <a:p>
-                      <a:pPr indent="0" marL="0">
+                      <a:pPr marL="0" indent="0">
                         <a:buNone/>
                       </a:pPr>
                       <a:r>
@@ -14087,7 +14226,7 @@
                       </a:endParaRPr>
                     </a:p>
                   </a:txBody>
-                  <a:tcPr marL="91440" marR="91440" marT="45720" marB="45720" anchor="ctr">
+                  <a:tcPr anchor="ctr">
                     <a:lnL w="6350" cap="flat" cmpd="sng" algn="ctr">
                       <a:solidFill>
                         <a:srgbClr val="D8DEEA"/>
@@ -14126,6 +14265,11 @@
                     </a:lnB>
                   </a:tcPr>
                 </a:tc>
+                <a:extLst>
+                  <a:ext uri="{0D108BD9-81ED-4DB2-BD59-A6C34878D82A}">
+                    <a16:rowId xmlns:a16="http://schemas.microsoft.com/office/drawing/2014/main" val="10004"/>
+                  </a:ext>
+                </a:extLst>
               </a:tr>
               <a:tr h="566928">
                 <a:tc>
@@ -14133,7 +14277,7 @@
                     <a:bodyPr/>
                     <a:lstStyle/>
                     <a:p>
-                      <a:pPr indent="0" marL="0">
+                      <a:pPr marL="0" indent="0">
                         <a:buNone/>
                       </a:pPr>
                       <a:r>
@@ -14145,7 +14289,7 @@
                           <a:ea typeface="Calibri" pitchFamily="34" charset="-122"/>
                           <a:cs typeface="Calibri" pitchFamily="34" charset="-120"/>
                         </a:rPr>
-                        <a:t>rag/ — dimensions, anchored retrieval, IRAC scorer</a:t>
+                        <a:t>rag/ - dimensions, anchored retrieval, IRAC scorer</a:t>
                       </a:r>
                       <a:endParaRPr lang="en-US" sz="1050" dirty="0">
                         <a:latin typeface="Calibri" charset="0"/>
@@ -14154,7 +14298,7 @@
                       </a:endParaRPr>
                     </a:p>
                   </a:txBody>
-                  <a:tcPr marL="91440" marR="91440" marT="45720" marB="45720" anchor="ctr">
+                  <a:tcPr anchor="ctr">
                     <a:lnL w="6350" cap="flat" cmpd="sng" algn="ctr">
                       <a:solidFill>
                         <a:srgbClr val="D8DEEA"/>
@@ -14198,7 +14342,7 @@
                     <a:bodyPr/>
                     <a:lstStyle/>
                     <a:p>
-                      <a:pPr indent="0" marL="0">
+                      <a:pPr marL="0" indent="0">
                         <a:buNone/>
                       </a:pPr>
                       <a:r>
@@ -14219,7 +14363,7 @@
                       </a:endParaRPr>
                     </a:p>
                   </a:txBody>
-                  <a:tcPr marL="91440" marR="91440" marT="45720" marB="45720" anchor="ctr">
+                  <a:tcPr anchor="ctr">
                     <a:lnL w="6350" cap="flat" cmpd="sng" algn="ctr">
                       <a:solidFill>
                         <a:srgbClr val="D8DEEA"/>
@@ -14263,7 +14407,7 @@
                     <a:bodyPr/>
                     <a:lstStyle/>
                     <a:p>
-                      <a:pPr indent="0" marL="0">
+                      <a:pPr marL="0" indent="0">
                         <a:buNone/>
                       </a:pPr>
                       <a:r>
@@ -14284,7 +14428,7 @@
                       </a:endParaRPr>
                     </a:p>
                   </a:txBody>
-                  <a:tcPr marL="91440" marR="91440" marT="45720" marB="45720" anchor="ctr">
+                  <a:tcPr anchor="ctr">
                     <a:lnL w="6350" cap="flat" cmpd="sng" algn="ctr">
                       <a:solidFill>
                         <a:srgbClr val="D8DEEA"/>
@@ -14323,6 +14467,11 @@
                     </a:lnB>
                   </a:tcPr>
                 </a:tc>
+                <a:extLst>
+                  <a:ext uri="{0D108BD9-81ED-4DB2-BD59-A6C34878D82A}">
+                    <a16:rowId xmlns:a16="http://schemas.microsoft.com/office/drawing/2014/main" val="10005"/>
+                  </a:ext>
+                </a:extLst>
               </a:tr>
               <a:tr h="566928">
                 <a:tc>
@@ -14330,7 +14479,7 @@
                     <a:bodyPr/>
                     <a:lstStyle/>
                     <a:p>
-                      <a:pPr indent="0" marL="0">
+                      <a:pPr marL="0" indent="0">
                         <a:buNone/>
                       </a:pPr>
                       <a:r>
@@ -14351,7 +14500,7 @@
                       </a:endParaRPr>
                     </a:p>
                   </a:txBody>
-                  <a:tcPr marL="91440" marR="91440" marT="45720" marB="45720" anchor="ctr">
+                  <a:tcPr anchor="ctr">
                     <a:lnL w="6350" cap="flat" cmpd="sng" algn="ctr">
                       <a:solidFill>
                         <a:srgbClr val="D8DEEA"/>
@@ -14395,7 +14544,7 @@
                     <a:bodyPr/>
                     <a:lstStyle/>
                     <a:p>
-                      <a:pPr indent="0" marL="0">
+                      <a:pPr marL="0" indent="0">
                         <a:buNone/>
                       </a:pPr>
                       <a:r>
@@ -14416,7 +14565,7 @@
                       </a:endParaRPr>
                     </a:p>
                   </a:txBody>
-                  <a:tcPr marL="91440" marR="91440" marT="45720" marB="45720" anchor="ctr">
+                  <a:tcPr anchor="ctr">
                     <a:lnL w="6350" cap="flat" cmpd="sng" algn="ctr">
                       <a:solidFill>
                         <a:srgbClr val="D8DEEA"/>
@@ -14460,7 +14609,7 @@
                     <a:bodyPr/>
                     <a:lstStyle/>
                     <a:p>
-                      <a:pPr indent="0" marL="0">
+                      <a:pPr marL="0" indent="0">
                         <a:buNone/>
                       </a:pPr>
                       <a:r>
@@ -14472,7 +14621,7 @@
                           <a:ea typeface="Calibri" pitchFamily="34" charset="-122"/>
                           <a:cs typeface="Calibri" pitchFamily="34" charset="-120"/>
                         </a:rPr>
-                        <a:t>—</a:t>
+                        <a:t>-</a:t>
                       </a:r>
                       <a:endParaRPr lang="en-US" sz="1050" dirty="0">
                         <a:latin typeface="Calibri" charset="0"/>
@@ -14481,7 +14630,7 @@
                       </a:endParaRPr>
                     </a:p>
                   </a:txBody>
-                  <a:tcPr marL="91440" marR="91440" marT="45720" marB="45720" anchor="ctr">
+                  <a:tcPr anchor="ctr">
                     <a:lnL w="6350" cap="flat" cmpd="sng" algn="ctr">
                       <a:solidFill>
                         <a:srgbClr val="D8DEEA"/>
@@ -14520,6 +14669,11 @@
                     </a:lnB>
                   </a:tcPr>
                 </a:tc>
+                <a:extLst>
+                  <a:ext uri="{0D108BD9-81ED-4DB2-BD59-A6C34878D82A}">
+                    <a16:rowId xmlns:a16="http://schemas.microsoft.com/office/drawing/2014/main" val="10006"/>
+                  </a:ext>
+                </a:extLst>
               </a:tr>
               <a:tr h="566928">
                 <a:tc>
@@ -14527,9 +14681,20 @@
                     <a:bodyPr/>
                     <a:lstStyle/>
                     <a:p>
-                      <a:pPr indent="0" marL="0">
+                      <a:pPr marL="0" indent="0">
                         <a:buNone/>
                       </a:pPr>
+                      <a:r>
+                        <a:rPr lang="en-US" sz="1050" dirty="0" err="1">
+                          <a:solidFill>
+                            <a:srgbClr val="1A1A2E"/>
+                          </a:solidFill>
+                          <a:latin typeface="Calibri" pitchFamily="34" charset="0"/>
+                          <a:ea typeface="Calibri" pitchFamily="34" charset="-122"/>
+                          <a:cs typeface="Calibri" pitchFamily="34" charset="-120"/>
+                        </a:rPr>
+                        <a:t>report_builder.py</a:t>
+                      </a:r>
                       <a:r>
                         <a:rPr lang="en-US" sz="1050" dirty="0">
                           <a:solidFill>
@@ -14539,7 +14704,7 @@
                           <a:ea typeface="Calibri" pitchFamily="34" charset="-122"/>
                           <a:cs typeface="Calibri" pitchFamily="34" charset="-120"/>
                         </a:rPr>
-                        <a:t>report_builder.py — executive summary (larger model)</a:t>
+                        <a:t> - executive summary (larger model)</a:t>
                       </a:r>
                       <a:endParaRPr lang="en-US" sz="1050" dirty="0">
                         <a:latin typeface="Calibri" charset="0"/>
@@ -14548,7 +14713,7 @@
                       </a:endParaRPr>
                     </a:p>
                   </a:txBody>
-                  <a:tcPr marL="91440" marR="91440" marT="45720" marB="45720" anchor="ctr">
+                  <a:tcPr anchor="ctr">
                     <a:lnL w="6350" cap="flat" cmpd="sng" algn="ctr">
                       <a:solidFill>
                         <a:srgbClr val="D8DEEA"/>
@@ -14592,7 +14757,7 @@
                     <a:bodyPr/>
                     <a:lstStyle/>
                     <a:p>
-                      <a:pPr indent="0" marL="0">
+                      <a:pPr marL="0" indent="0">
                         <a:buNone/>
                       </a:pPr>
                       <a:r>
@@ -14613,7 +14778,7 @@
                       </a:endParaRPr>
                     </a:p>
                   </a:txBody>
-                  <a:tcPr marL="91440" marR="91440" marT="45720" marB="45720" anchor="ctr">
+                  <a:tcPr anchor="ctr">
                     <a:lnL w="6350" cap="flat" cmpd="sng" algn="ctr">
                       <a:solidFill>
                         <a:srgbClr val="D8DEEA"/>
@@ -14657,7 +14822,7 @@
                     <a:bodyPr/>
                     <a:lstStyle/>
                     <a:p>
-                      <a:pPr indent="0" marL="0">
+                      <a:pPr marL="0" indent="0">
                         <a:buNone/>
                       </a:pPr>
                       <a:r>
@@ -14669,7 +14834,7 @@
                           <a:ea typeface="Calibri" pitchFamily="34" charset="-122"/>
                           <a:cs typeface="Calibri" pitchFamily="34" charset="-120"/>
                         </a:rPr>
-                        <a:t>—</a:t>
+                        <a:t>-</a:t>
                       </a:r>
                       <a:endParaRPr lang="en-US" sz="1050" dirty="0">
                         <a:latin typeface="Calibri" charset="0"/>
@@ -14678,7 +14843,7 @@
                       </a:endParaRPr>
                     </a:p>
                   </a:txBody>
-                  <a:tcPr marL="91440" marR="91440" marT="45720" marB="45720" anchor="ctr">
+                  <a:tcPr anchor="ctr">
                     <a:lnL w="6350" cap="flat" cmpd="sng" algn="ctr">
                       <a:solidFill>
                         <a:srgbClr val="D8DEEA"/>
@@ -14717,6 +14882,11 @@
                     </a:lnB>
                   </a:tcPr>
                 </a:tc>
+                <a:extLst>
+                  <a:ext uri="{0D108BD9-81ED-4DB2-BD59-A6C34878D82A}">
+                    <a16:rowId xmlns:a16="http://schemas.microsoft.com/office/drawing/2014/main" val="10007"/>
+                  </a:ext>
+                </a:extLst>
               </a:tr>
             </a:tbl>
           </a:graphicData>
@@ -14743,7 +14913,7 @@
           <a:bodyPr wrap="square" lIns="0" tIns="0" rIns="0" bIns="0" rtlCol="0" anchor="ctr"/>
           <a:lstStyle/>
           <a:p>
-            <a:pPr algn="r" indent="0" marL="0">
+            <a:pPr marL="0" indent="0" algn="r">
               <a:buNone/>
             </a:pPr>
             <a:r>
@@ -14755,7 +14925,7 @@
                 <a:ea typeface="Calibri" pitchFamily="34" charset="-122"/>
                 <a:cs typeface="Calibri" pitchFamily="34" charset="-120"/>
               </a:rPr>
-              <a:t>comp_square · primary research update — 9</a:t>
+              <a:t>comp_square · primary research update - 9</a:t>
             </a:r>
             <a:endParaRPr lang="en-US" sz="900" dirty="0"/>
           </a:p>
@@ -15062,4 +15232,319 @@
     </a:ext>
   </a:extLst>
 </a:theme>
+</file>
+
+<file path=ppt/theme/theme2.xml><?xml version="1.0" encoding="utf-8"?>
+<a:theme xmlns:a="http://schemas.openxmlformats.org/drawingml/2006/main" name="Office Theme">
+  <a:themeElements>
+    <a:clrScheme name="Office">
+      <a:dk1>
+        <a:sysClr val="windowText" lastClr="000000"/>
+      </a:dk1>
+      <a:lt1>
+        <a:sysClr val="window" lastClr="FFFFFF"/>
+      </a:lt1>
+      <a:dk2>
+        <a:srgbClr val="0E2841"/>
+      </a:dk2>
+      <a:lt2>
+        <a:srgbClr val="E8E8E8"/>
+      </a:lt2>
+      <a:accent1>
+        <a:srgbClr val="156082"/>
+      </a:accent1>
+      <a:accent2>
+        <a:srgbClr val="E97132"/>
+      </a:accent2>
+      <a:accent3>
+        <a:srgbClr val="196B24"/>
+      </a:accent3>
+      <a:accent4>
+        <a:srgbClr val="0F9ED5"/>
+      </a:accent4>
+      <a:accent5>
+        <a:srgbClr val="A02B93"/>
+      </a:accent5>
+      <a:accent6>
+        <a:srgbClr val="4EA72E"/>
+      </a:accent6>
+      <a:hlink>
+        <a:srgbClr val="467886"/>
+      </a:hlink>
+      <a:folHlink>
+        <a:srgbClr val="96607D"/>
+      </a:folHlink>
+    </a:clrScheme>
+    <a:fontScheme name="Office">
+      <a:majorFont>
+        <a:latin typeface="Aptos Display" panose="02110004020202020204"/>
+        <a:ea typeface=""/>
+        <a:cs typeface=""/>
+        <a:font script="Jpan" typeface="游ゴシック Light"/>
+        <a:font script="Hang" typeface="맑은 고딕"/>
+        <a:font script="Hans" typeface="等线 Light"/>
+        <a:font script="Hant" typeface="新細明體"/>
+        <a:font script="Arab" typeface="Times New Roman"/>
+        <a:font script="Hebr" typeface="Times New Roman"/>
+        <a:font script="Thai" typeface="Angsana New"/>
+        <a:font script="Ethi" typeface="Nyala"/>
+        <a:font script="Beng" typeface="Vrinda"/>
+        <a:font script="Gujr" typeface="Shruti"/>
+        <a:font script="Khmr" typeface="MoolBoran"/>
+        <a:font script="Knda" typeface="Tunga"/>
+        <a:font script="Guru" typeface="Raavi"/>
+        <a:font script="Cans" typeface="Euphemia"/>
+        <a:font script="Cher" typeface="Plantagenet Cherokee"/>
+        <a:font script="Yiii" typeface="Microsoft Yi Baiti"/>
+        <a:font script="Tibt" typeface="Microsoft Himalaya"/>
+        <a:font script="Thaa" typeface="MV Boli"/>
+        <a:font script="Deva" typeface="Mangal"/>
+        <a:font script="Telu" typeface="Gautami"/>
+        <a:font script="Taml" typeface="Latha"/>
+        <a:font script="Syrc" typeface="Estrangelo Edessa"/>
+        <a:font script="Orya" typeface="Kalinga"/>
+        <a:font script="Mlym" typeface="Kartika"/>
+        <a:font script="Laoo" typeface="DokChampa"/>
+        <a:font script="Sinh" typeface="Iskoola Pota"/>
+        <a:font script="Mong" typeface="Mongolian Baiti"/>
+        <a:font script="Viet" typeface="Times New Roman"/>
+        <a:font script="Uigh" typeface="Microsoft Uighur"/>
+        <a:font script="Geor" typeface="Sylfaen"/>
+        <a:font script="Armn" typeface="Arial"/>
+        <a:font script="Bugi" typeface="Leelawadee UI"/>
+        <a:font script="Bopo" typeface="Microsoft JhengHei"/>
+        <a:font script="Java" typeface="Javanese Text"/>
+        <a:font script="Lisu" typeface="Segoe UI"/>
+        <a:font script="Mymr" typeface="Myanmar Text"/>
+        <a:font script="Nkoo" typeface="Ebrima"/>
+        <a:font script="Olck" typeface="Nirmala UI"/>
+        <a:font script="Osma" typeface="Ebrima"/>
+        <a:font script="Phag" typeface="Phagspa"/>
+        <a:font script="Syrn" typeface="Estrangelo Edessa"/>
+        <a:font script="Syrj" typeface="Estrangelo Edessa"/>
+        <a:font script="Syre" typeface="Estrangelo Edessa"/>
+        <a:font script="Sora" typeface="Nirmala UI"/>
+        <a:font script="Tale" typeface="Microsoft Tai Le"/>
+        <a:font script="Talu" typeface="Microsoft New Tai Lue"/>
+        <a:font script="Tfng" typeface="Ebrima"/>
+      </a:majorFont>
+      <a:minorFont>
+        <a:latin typeface="Aptos" panose="02110004020202020204"/>
+        <a:ea typeface=""/>
+        <a:cs typeface=""/>
+        <a:font script="Jpan" typeface="游ゴシック"/>
+        <a:font script="Hang" typeface="맑은 고딕"/>
+        <a:font script="Hans" typeface="等线"/>
+        <a:font script="Hant" typeface="新細明體"/>
+        <a:font script="Arab" typeface="Arial"/>
+        <a:font script="Hebr" typeface="Arial"/>
+        <a:font script="Thai" typeface="Cordia New"/>
+        <a:font script="Ethi" typeface="Nyala"/>
+        <a:font script="Beng" typeface="Vrinda"/>
+        <a:font script="Gujr" typeface="Shruti"/>
+        <a:font script="Khmr" typeface="DaunPenh"/>
+        <a:font script="Knda" typeface="Tunga"/>
+        <a:font script="Guru" typeface="Raavi"/>
+        <a:font script="Cans" typeface="Euphemia"/>
+        <a:font script="Cher" typeface="Plantagenet Cherokee"/>
+        <a:font script="Yiii" typeface="Microsoft Yi Baiti"/>
+        <a:font script="Tibt" typeface="Microsoft Himalaya"/>
+        <a:font script="Thaa" typeface="MV Boli"/>
+        <a:font script="Deva" typeface="Mangal"/>
+        <a:font script="Telu" typeface="Gautami"/>
+        <a:font script="Taml" typeface="Latha"/>
+        <a:font script="Syrc" typeface="Estrangelo Edessa"/>
+        <a:font script="Orya" typeface="Kalinga"/>
+        <a:font script="Mlym" typeface="Kartika"/>
+        <a:font script="Laoo" typeface="DokChampa"/>
+        <a:font script="Sinh" typeface="Iskoola Pota"/>
+        <a:font script="Mong" typeface="Mongolian Baiti"/>
+        <a:font script="Viet" typeface="Arial"/>
+        <a:font script="Uigh" typeface="Microsoft Uighur"/>
+        <a:font script="Geor" typeface="Sylfaen"/>
+        <a:font script="Armn" typeface="Arial"/>
+        <a:font script="Bugi" typeface="Leelawadee UI"/>
+        <a:font script="Bopo" typeface="Microsoft JhengHei"/>
+        <a:font script="Java" typeface="Javanese Text"/>
+        <a:font script="Lisu" typeface="Segoe UI"/>
+        <a:font script="Mymr" typeface="Myanmar Text"/>
+        <a:font script="Nkoo" typeface="Ebrima"/>
+        <a:font script="Olck" typeface="Nirmala UI"/>
+        <a:font script="Osma" typeface="Ebrima"/>
+        <a:font script="Phag" typeface="Phagspa"/>
+        <a:font script="Syrn" typeface="Estrangelo Edessa"/>
+        <a:font script="Syrj" typeface="Estrangelo Edessa"/>
+        <a:font script="Syre" typeface="Estrangelo Edessa"/>
+        <a:font script="Sora" typeface="Nirmala UI"/>
+        <a:font script="Tale" typeface="Microsoft Tai Le"/>
+        <a:font script="Talu" typeface="Microsoft New Tai Lue"/>
+        <a:font script="Tfng" typeface="Ebrima"/>
+      </a:minorFont>
+    </a:fontScheme>
+    <a:fmtScheme name="Office">
+      <a:fillStyleLst>
+        <a:solidFill>
+          <a:schemeClr val="phClr"/>
+        </a:solidFill>
+        <a:gradFill rotWithShape="1">
+          <a:gsLst>
+            <a:gs pos="0">
+              <a:schemeClr val="phClr">
+                <a:lumMod val="110000"/>
+                <a:satMod val="105000"/>
+                <a:tint val="67000"/>
+              </a:schemeClr>
+            </a:gs>
+            <a:gs pos="50000">
+              <a:schemeClr val="phClr">
+                <a:lumMod val="105000"/>
+                <a:satMod val="103000"/>
+                <a:tint val="73000"/>
+              </a:schemeClr>
+            </a:gs>
+            <a:gs pos="100000">
+              <a:schemeClr val="phClr">
+                <a:lumMod val="105000"/>
+                <a:satMod val="109000"/>
+                <a:tint val="81000"/>
+              </a:schemeClr>
+            </a:gs>
+          </a:gsLst>
+          <a:lin ang="5400000" scaled="0"/>
+        </a:gradFill>
+        <a:gradFill rotWithShape="1">
+          <a:gsLst>
+            <a:gs pos="0">
+              <a:schemeClr val="phClr">
+                <a:satMod val="103000"/>
+                <a:lumMod val="102000"/>
+                <a:tint val="94000"/>
+              </a:schemeClr>
+            </a:gs>
+            <a:gs pos="50000">
+              <a:schemeClr val="phClr">
+                <a:satMod val="110000"/>
+                <a:lumMod val="100000"/>
+                <a:shade val="100000"/>
+              </a:schemeClr>
+            </a:gs>
+            <a:gs pos="100000">
+              <a:schemeClr val="phClr">
+                <a:lumMod val="99000"/>
+                <a:satMod val="120000"/>
+                <a:shade val="78000"/>
+              </a:schemeClr>
+            </a:gs>
+          </a:gsLst>
+          <a:lin ang="5400000" scaled="0"/>
+        </a:gradFill>
+      </a:fillStyleLst>
+      <a:lnStyleLst>
+        <a:ln w="12700" cap="flat" cmpd="sng" algn="ctr">
+          <a:solidFill>
+            <a:schemeClr val="phClr"/>
+          </a:solidFill>
+          <a:prstDash val="solid"/>
+          <a:miter lim="800000"/>
+        </a:ln>
+        <a:ln w="19050" cap="flat" cmpd="sng" algn="ctr">
+          <a:solidFill>
+            <a:schemeClr val="phClr"/>
+          </a:solidFill>
+          <a:prstDash val="solid"/>
+          <a:miter lim="800000"/>
+        </a:ln>
+        <a:ln w="25400" cap="flat" cmpd="sng" algn="ctr">
+          <a:solidFill>
+            <a:schemeClr val="phClr"/>
+          </a:solidFill>
+          <a:prstDash val="solid"/>
+          <a:miter lim="800000"/>
+        </a:ln>
+      </a:lnStyleLst>
+      <a:effectStyleLst>
+        <a:effectStyle>
+          <a:effectLst/>
+        </a:effectStyle>
+        <a:effectStyle>
+          <a:effectLst/>
+        </a:effectStyle>
+        <a:effectStyle>
+          <a:effectLst>
+            <a:outerShdw blurRad="57150" dist="19050" dir="5400000" algn="ctr" rotWithShape="0">
+              <a:srgbClr val="000000">
+                <a:alpha val="63000"/>
+              </a:srgbClr>
+            </a:outerShdw>
+          </a:effectLst>
+        </a:effectStyle>
+      </a:effectStyleLst>
+      <a:bgFillStyleLst>
+        <a:solidFill>
+          <a:schemeClr val="phClr"/>
+        </a:solidFill>
+        <a:solidFill>
+          <a:schemeClr val="phClr">
+            <a:tint val="95000"/>
+            <a:satMod val="170000"/>
+          </a:schemeClr>
+        </a:solidFill>
+        <a:gradFill rotWithShape="1">
+          <a:gsLst>
+            <a:gs pos="0">
+              <a:schemeClr val="phClr">
+                <a:tint val="93000"/>
+                <a:satMod val="150000"/>
+                <a:shade val="98000"/>
+                <a:lumMod val="102000"/>
+              </a:schemeClr>
+            </a:gs>
+            <a:gs pos="50000">
+              <a:schemeClr val="phClr">
+                <a:tint val="98000"/>
+                <a:satMod val="130000"/>
+                <a:shade val="90000"/>
+                <a:lumMod val="103000"/>
+              </a:schemeClr>
+            </a:gs>
+            <a:gs pos="100000">
+              <a:schemeClr val="phClr">
+                <a:shade val="63000"/>
+                <a:satMod val="120000"/>
+              </a:schemeClr>
+            </a:gs>
+          </a:gsLst>
+          <a:lin ang="5400000" scaled="0"/>
+        </a:gradFill>
+      </a:bgFillStyleLst>
+    </a:fmtScheme>
+  </a:themeElements>
+  <a:objectDefaults>
+    <a:lnDef>
+      <a:spPr/>
+      <a:bodyPr/>
+      <a:lstStyle/>
+      <a:style>
+        <a:lnRef idx="2">
+          <a:schemeClr val="accent1"/>
+        </a:lnRef>
+        <a:fillRef idx="0">
+          <a:schemeClr val="accent1"/>
+        </a:fillRef>
+        <a:effectRef idx="1">
+          <a:schemeClr val="accent1"/>
+        </a:effectRef>
+        <a:fontRef idx="minor">
+          <a:schemeClr val="tx1"/>
+        </a:fontRef>
+      </a:style>
+    </a:lnDef>
+  </a:objectDefaults>
+  <a:extraClrSchemeLst/>
+  <a:extLst>
+    <a:ext uri="{05A4C25C-085E-4340-85A3-A5531E510DB2}">
+      <thm15:themeFamily xmlns:thm15="http://schemas.microsoft.com/office/thememl/2012/main" name="Office Theme" id="{2E142A2C-CD16-42D6-873A-C26D2A0506FA}" vid="{1BDDFF52-6CD6-40A5-AB3C-68EB2F1E4D0A}"/>
+    </a:ext>
+  </a:extLst>
+</a:theme>
 </file>